--- a/ゲーム科2年/00_前期/ゲーム開発Ⅰ/ゲーム物理学/座学/18_合力.pptx
+++ b/ゲーム科2年/00_前期/ゲーム開発Ⅰ/ゲーム物理学/座学/18_合力.pptx
@@ -6,7 +6,17 @@
   </p:sldMasterIdLst>
   <p:sldIdLst>
     <p:sldId id="261" r:id="rId2"/>
-    <p:sldId id="262" r:id="rId3"/>
+    <p:sldId id="263" r:id="rId3"/>
+    <p:sldId id="264" r:id="rId4"/>
+    <p:sldId id="265" r:id="rId5"/>
+    <p:sldId id="267" r:id="rId6"/>
+    <p:sldId id="262" r:id="rId7"/>
+    <p:sldId id="268" r:id="rId8"/>
+    <p:sldId id="269" r:id="rId9"/>
+    <p:sldId id="270" r:id="rId10"/>
+    <p:sldId id="271" r:id="rId11"/>
+    <p:sldId id="272" r:id="rId12"/>
+    <p:sldId id="273" r:id="rId13"/>
   </p:sldIdLst>
   <p:sldSz cx="12192000" cy="6858000"/>
   <p:notesSz cx="6858000" cy="9144000"/>
@@ -260,7 +270,7 @@
           <a:p>
             <a:fld id="{E9CC885B-4903-4D54-9A93-00025F12DED9}" type="datetimeFigureOut">
               <a:rPr kumimoji="1" lang="ja-JP" altLang="en-US" smtClean="0"/>
-              <a:t>2025/8/1</a:t>
+              <a:t>2025/9/29</a:t>
             </a:fld>
             <a:endParaRPr kumimoji="1" lang="ja-JP" altLang="en-US"/>
           </a:p>
@@ -490,7 +500,7 @@
           <a:p>
             <a:fld id="{E9CC885B-4903-4D54-9A93-00025F12DED9}" type="datetimeFigureOut">
               <a:rPr kumimoji="1" lang="ja-JP" altLang="en-US" smtClean="0"/>
-              <a:t>2025/8/1</a:t>
+              <a:t>2025/9/29</a:t>
             </a:fld>
             <a:endParaRPr kumimoji="1" lang="ja-JP" altLang="en-US"/>
           </a:p>
@@ -730,7 +740,7 @@
           <a:p>
             <a:fld id="{E9CC885B-4903-4D54-9A93-00025F12DED9}" type="datetimeFigureOut">
               <a:rPr kumimoji="1" lang="ja-JP" altLang="en-US" smtClean="0"/>
-              <a:t>2025/8/1</a:t>
+              <a:t>2025/9/29</a:t>
             </a:fld>
             <a:endParaRPr kumimoji="1" lang="ja-JP" altLang="en-US"/>
           </a:p>
@@ -960,7 +970,7 @@
           <a:p>
             <a:fld id="{E9CC885B-4903-4D54-9A93-00025F12DED9}" type="datetimeFigureOut">
               <a:rPr kumimoji="1" lang="ja-JP" altLang="en-US" smtClean="0"/>
-              <a:t>2025/8/1</a:t>
+              <a:t>2025/9/29</a:t>
             </a:fld>
             <a:endParaRPr kumimoji="1" lang="ja-JP" altLang="en-US"/>
           </a:p>
@@ -1235,7 +1245,7 @@
           <a:p>
             <a:fld id="{E9CC885B-4903-4D54-9A93-00025F12DED9}" type="datetimeFigureOut">
               <a:rPr kumimoji="1" lang="ja-JP" altLang="en-US" smtClean="0"/>
-              <a:t>2025/8/1</a:t>
+              <a:t>2025/9/29</a:t>
             </a:fld>
             <a:endParaRPr kumimoji="1" lang="ja-JP" altLang="en-US"/>
           </a:p>
@@ -1564,7 +1574,7 @@
           <a:p>
             <a:fld id="{E9CC885B-4903-4D54-9A93-00025F12DED9}" type="datetimeFigureOut">
               <a:rPr kumimoji="1" lang="ja-JP" altLang="en-US" smtClean="0"/>
-              <a:t>2025/8/1</a:t>
+              <a:t>2025/9/29</a:t>
             </a:fld>
             <a:endParaRPr kumimoji="1" lang="ja-JP" altLang="en-US"/>
           </a:p>
@@ -2040,7 +2050,7 @@
           <a:p>
             <a:fld id="{E9CC885B-4903-4D54-9A93-00025F12DED9}" type="datetimeFigureOut">
               <a:rPr kumimoji="1" lang="ja-JP" altLang="en-US" smtClean="0"/>
-              <a:t>2025/8/1</a:t>
+              <a:t>2025/9/29</a:t>
             </a:fld>
             <a:endParaRPr kumimoji="1" lang="ja-JP" altLang="en-US"/>
           </a:p>
@@ -2181,7 +2191,7 @@
           <a:p>
             <a:fld id="{E9CC885B-4903-4D54-9A93-00025F12DED9}" type="datetimeFigureOut">
               <a:rPr kumimoji="1" lang="ja-JP" altLang="en-US" smtClean="0"/>
-              <a:t>2025/8/1</a:t>
+              <a:t>2025/9/29</a:t>
             </a:fld>
             <a:endParaRPr kumimoji="1" lang="ja-JP" altLang="en-US"/>
           </a:p>
@@ -2294,7 +2304,7 @@
           <a:p>
             <a:fld id="{E9CC885B-4903-4D54-9A93-00025F12DED9}" type="datetimeFigureOut">
               <a:rPr kumimoji="1" lang="ja-JP" altLang="en-US" smtClean="0"/>
-              <a:t>2025/8/1</a:t>
+              <a:t>2025/9/29</a:t>
             </a:fld>
             <a:endParaRPr kumimoji="1" lang="ja-JP" altLang="en-US"/>
           </a:p>
@@ -2637,7 +2647,7 @@
           <a:p>
             <a:fld id="{E9CC885B-4903-4D54-9A93-00025F12DED9}" type="datetimeFigureOut">
               <a:rPr kumimoji="1" lang="ja-JP" altLang="en-US" smtClean="0"/>
-              <a:t>2025/8/1</a:t>
+              <a:t>2025/9/29</a:t>
             </a:fld>
             <a:endParaRPr kumimoji="1" lang="ja-JP" altLang="en-US"/>
           </a:p>
@@ -2925,7 +2935,7 @@
           <a:p>
             <a:fld id="{E9CC885B-4903-4D54-9A93-00025F12DED9}" type="datetimeFigureOut">
               <a:rPr kumimoji="1" lang="ja-JP" altLang="en-US" smtClean="0"/>
-              <a:t>2025/8/1</a:t>
+              <a:t>2025/9/29</a:t>
             </a:fld>
             <a:endParaRPr kumimoji="1" lang="ja-JP" altLang="en-US"/>
           </a:p>
@@ -3198,7 +3208,7 @@
           <a:p>
             <a:fld id="{E9CC885B-4903-4D54-9A93-00025F12DED9}" type="datetimeFigureOut">
               <a:rPr kumimoji="1" lang="ja-JP" altLang="en-US" smtClean="0"/>
-              <a:t>2025/8/1</a:t>
+              <a:t>2025/9/29</a:t>
             </a:fld>
             <a:endParaRPr kumimoji="1" lang="ja-JP" altLang="en-US"/>
           </a:p>
@@ -3666,7 +3676,7 @@
         <p:spPr>
           <a:xfrm>
             <a:off x="567542" y="1216429"/>
-            <a:ext cx="8494633" cy="4524315"/>
+            <a:ext cx="10033516" cy="4154984"/>
           </a:xfrm>
           <a:prstGeom prst="rect">
             <a:avLst/>
@@ -3722,35 +3732,24 @@
           <a:p>
             <a:r>
               <a:rPr lang="ja-JP" altLang="en-US" sz="2400" dirty="0"/>
-              <a:t>物体が動くときに必要な力は基本的にこの４つになります。</a:t>
+              <a:t>物体を動かすには、動かす力とこれらをすべて合計することにより、</a:t>
             </a:r>
             <a:endParaRPr lang="en-US" altLang="ja-JP" sz="2400" dirty="0"/>
           </a:p>
           <a:p>
             <a:r>
               <a:rPr lang="ja-JP" altLang="en-US" sz="2400" dirty="0"/>
-              <a:t>これらをすべて合計することにより、</a:t>
+              <a:t>最終的な物体が動く力を計算することができます。</a:t>
             </a:r>
             <a:endParaRPr lang="en-US" altLang="ja-JP" sz="2400" dirty="0"/>
           </a:p>
           <a:p>
+            <a:endParaRPr lang="en-US" altLang="ja-JP" sz="2400" dirty="0"/>
+          </a:p>
+          <a:p>
             <a:r>
               <a:rPr lang="ja-JP" altLang="en-US" sz="2400" dirty="0"/>
-              <a:t>物体が動く力を計算することができます。</a:t>
-            </a:r>
-            <a:endParaRPr lang="en-US" altLang="ja-JP" sz="2400" dirty="0"/>
-          </a:p>
-          <a:p>
-            <a:endParaRPr lang="en-US" altLang="ja-JP" sz="2400" dirty="0"/>
-          </a:p>
-          <a:p>
-            <a:r>
-              <a:rPr lang="en-US" altLang="ja-JP" sz="2400" dirty="0"/>
-              <a:t>※</a:t>
-            </a:r>
-            <a:r>
-              <a:rPr lang="ja-JP" altLang="en-US" sz="2400" dirty="0"/>
-              <a:t>複数の力の合計のことを</a:t>
+              <a:t>このとき、合計された動く力のことを</a:t>
             </a:r>
             <a:r>
               <a:rPr lang="ja-JP" altLang="en-US" sz="2400" b="1" dirty="0">
@@ -3772,6 +3771,2656 @@
     <p:extLst>
       <p:ext uri="{BB962C8B-B14F-4D97-AF65-F5344CB8AC3E}">
         <p14:creationId xmlns:p14="http://schemas.microsoft.com/office/powerpoint/2010/main" val="1639033532"/>
+      </p:ext>
+    </p:extLst>
+  </p:cSld>
+  <p:clrMapOvr>
+    <a:masterClrMapping/>
+  </p:clrMapOvr>
+</p:sld>
+</file>
+
+<file path=ppt/slides/slide10.xml><?xml version="1.0" encoding="utf-8"?>
+<p:sld xmlns:a="http://schemas.openxmlformats.org/drawingml/2006/main" xmlns:r="http://schemas.openxmlformats.org/officeDocument/2006/relationships" xmlns:p="http://schemas.openxmlformats.org/presentationml/2006/main">
+  <p:cSld>
+    <p:spTree>
+      <p:nvGrpSpPr>
+        <p:cNvPr id="1" name=""/>
+        <p:cNvGrpSpPr/>
+        <p:nvPr/>
+      </p:nvGrpSpPr>
+      <p:grpSpPr>
+        <a:xfrm>
+          <a:off x="0" y="0"/>
+          <a:ext cx="0" cy="0"/>
+          <a:chOff x="0" y="0"/>
+          <a:chExt cx="0" cy="0"/>
+        </a:xfrm>
+      </p:grpSpPr>
+      <p:sp>
+        <p:nvSpPr>
+          <p:cNvPr id="4" name="テキスト ボックス 3">
+            <a:extLst>
+              <a:ext uri="{FF2B5EF4-FFF2-40B4-BE49-F238E27FC236}">
+                <a16:creationId xmlns:a16="http://schemas.microsoft.com/office/drawing/2014/main" id="{5A13BF46-B8C5-48AA-8308-C9ECFF431A18}"/>
+              </a:ext>
+            </a:extLst>
+          </p:cNvPr>
+          <p:cNvSpPr txBox="1"/>
+          <p:nvPr/>
+        </p:nvSpPr>
+        <p:spPr>
+          <a:xfrm>
+            <a:off x="567542" y="491954"/>
+            <a:ext cx="1943161" cy="584775"/>
+          </a:xfrm>
+          <a:prstGeom prst="rect">
+            <a:avLst/>
+          </a:prstGeom>
+          <a:noFill/>
+        </p:spPr>
+        <p:txBody>
+          <a:bodyPr wrap="none" rtlCol="0">
+            <a:spAutoFit/>
+          </a:bodyPr>
+          <a:lstStyle/>
+          <a:p>
+            <a:r>
+              <a:rPr kumimoji="1" lang="ja-JP" altLang="en-US" sz="3200" b="1" u="sng" dirty="0"/>
+              <a:t>合力 例題</a:t>
+            </a:r>
+            <a:endParaRPr kumimoji="1" lang="en-US" altLang="ja-JP" sz="3200" b="1" u="sng" dirty="0"/>
+          </a:p>
+        </p:txBody>
+      </p:sp>
+      <mc:AlternateContent xmlns:mc="http://schemas.openxmlformats.org/markup-compatibility/2006" xmlns:a14="http://schemas.microsoft.com/office/drawing/2010/main">
+        <mc:Choice Requires="a14">
+          <p:sp>
+            <p:nvSpPr>
+              <p:cNvPr id="6" name="テキスト ボックス 5">
+                <a:extLst>
+                  <a:ext uri="{FF2B5EF4-FFF2-40B4-BE49-F238E27FC236}">
+                    <a16:creationId xmlns:a16="http://schemas.microsoft.com/office/drawing/2014/main" id="{55830AD6-028B-4C4E-80BF-B70DFC1C3A46}"/>
+                  </a:ext>
+                </a:extLst>
+              </p:cNvPr>
+              <p:cNvSpPr txBox="1"/>
+              <p:nvPr/>
+            </p:nvSpPr>
+            <p:spPr>
+              <a:xfrm>
+                <a:off x="567542" y="1216429"/>
+                <a:ext cx="8026556" cy="1200329"/>
+              </a:xfrm>
+              <a:prstGeom prst="rect">
+                <a:avLst/>
+              </a:prstGeom>
+              <a:noFill/>
+            </p:spPr>
+            <p:txBody>
+              <a:bodyPr wrap="none" rtlCol="0">
+                <a:spAutoFit/>
+              </a:bodyPr>
+              <a:lstStyle/>
+              <a:p>
+                <a:r>
+                  <a:rPr lang="ja-JP" altLang="en-US" sz="2400" dirty="0"/>
+                  <a:t>ゲーム中の氷の床の上に</a:t>
+                </a:r>
+                <a:r>
+                  <a:rPr lang="en-US" altLang="ja-JP" sz="2400" dirty="0"/>
+                  <a:t>20kg</a:t>
+                </a:r>
+                <a:r>
+                  <a:rPr lang="ja-JP" altLang="en-US" sz="2400" dirty="0"/>
+                  <a:t>の金属の箱があり、</a:t>
+                </a:r>
+                <a:endParaRPr lang="en-US" altLang="ja-JP" sz="2400" dirty="0"/>
+              </a:p>
+              <a:p>
+                <a:r>
+                  <a:rPr lang="ja-JP" altLang="en-US" sz="2400" dirty="0"/>
+                  <a:t>この箱にロープをつけて</a:t>
+                </a:r>
+                <a:r>
+                  <a:rPr lang="en-US" altLang="ja-JP" sz="2400" dirty="0"/>
+                  <a:t>100N</a:t>
+                </a:r>
+                <a:r>
+                  <a:rPr lang="ja-JP" altLang="en-US" sz="2400" dirty="0"/>
+                  <a:t>の力で引っ張ります。</a:t>
+                </a:r>
+                <a:endParaRPr lang="en-US" altLang="ja-JP" sz="2400" dirty="0"/>
+              </a:p>
+              <a:p>
+                <a:r>
+                  <a:rPr lang="ja-JP" altLang="en-US" sz="2400" dirty="0"/>
+                  <a:t>ロープの角度が</a:t>
+                </a:r>
+                <a14:m>
+                  <m:oMath xmlns:m="http://schemas.openxmlformats.org/officeDocument/2006/math">
+                    <m:r>
+                      <a:rPr lang="en-US" altLang="ja-JP" sz="2400" i="1" dirty="0" smtClean="0">
+                        <a:latin typeface="Cambria Math" panose="02040503050406030204" pitchFamily="18" charset="0"/>
+                      </a:rPr>
+                      <m:t>60</m:t>
+                    </m:r>
+                    <m:r>
+                      <a:rPr lang="en-US" altLang="ja-JP" sz="2400" i="1" dirty="0">
+                        <a:latin typeface="Cambria Math" panose="02040503050406030204" pitchFamily="18" charset="0"/>
+                      </a:rPr>
+                      <m:t>°</m:t>
+                    </m:r>
+                  </m:oMath>
+                </a14:m>
+                <a:r>
+                  <a:rPr lang="ja-JP" altLang="en-US" sz="2400" dirty="0"/>
+                  <a:t>のとき、箱に働く合力を求めなさい。</a:t>
+                </a:r>
+                <a:endParaRPr lang="en-US" altLang="ja-JP" sz="2400" dirty="0"/>
+              </a:p>
+            </p:txBody>
+          </p:sp>
+        </mc:Choice>
+        <mc:Fallback xmlns="">
+          <p:sp>
+            <p:nvSpPr>
+              <p:cNvPr id="6" name="テキスト ボックス 5">
+                <a:extLst>
+                  <a:ext uri="{FF2B5EF4-FFF2-40B4-BE49-F238E27FC236}">
+                    <a16:creationId xmlns:a16="http://schemas.microsoft.com/office/drawing/2014/main" id="{55830AD6-028B-4C4E-80BF-B70DFC1C3A46}"/>
+                  </a:ext>
+                </a:extLst>
+              </p:cNvPr>
+              <p:cNvSpPr txBox="1">
+                <a:spLocks noRot="1" noChangeAspect="1" noMove="1" noResize="1" noEditPoints="1" noAdjustHandles="1" noChangeArrowheads="1" noChangeShapeType="1" noTextEdit="1"/>
+              </p:cNvSpPr>
+              <p:nvPr/>
+            </p:nvSpPr>
+            <p:spPr>
+              <a:xfrm>
+                <a:off x="567542" y="1216429"/>
+                <a:ext cx="8026556" cy="1200329"/>
+              </a:xfrm>
+              <a:prstGeom prst="rect">
+                <a:avLst/>
+              </a:prstGeom>
+              <a:blipFill>
+                <a:blip r:embed="rId2"/>
+                <a:stretch>
+                  <a:fillRect l="-1139" t="-4082" r="-228" b="-11224"/>
+                </a:stretch>
+              </a:blipFill>
+            </p:spPr>
+            <p:txBody>
+              <a:bodyPr/>
+              <a:lstStyle/>
+              <a:p>
+                <a:r>
+                  <a:rPr lang="ja-JP" altLang="en-US">
+                    <a:noFill/>
+                  </a:rPr>
+                  <a:t> </a:t>
+                </a:r>
+              </a:p>
+            </p:txBody>
+          </p:sp>
+        </mc:Fallback>
+      </mc:AlternateContent>
+      <p:sp>
+        <p:nvSpPr>
+          <p:cNvPr id="3" name="正方形/長方形 2">
+            <a:extLst>
+              <a:ext uri="{FF2B5EF4-FFF2-40B4-BE49-F238E27FC236}">
+                <a16:creationId xmlns:a16="http://schemas.microsoft.com/office/drawing/2014/main" id="{5D248159-D1DA-49E7-984D-40C755EC6B3D}"/>
+              </a:ext>
+            </a:extLst>
+          </p:cNvPr>
+          <p:cNvSpPr/>
+          <p:nvPr/>
+        </p:nvSpPr>
+        <p:spPr>
+          <a:xfrm>
+            <a:off x="2073612" y="4356848"/>
+            <a:ext cx="1174376" cy="1129553"/>
+          </a:xfrm>
+          <a:prstGeom prst="rect">
+            <a:avLst/>
+          </a:prstGeom>
+        </p:spPr>
+        <p:style>
+          <a:lnRef idx="2">
+            <a:schemeClr val="accent3">
+              <a:shade val="50000"/>
+            </a:schemeClr>
+          </a:lnRef>
+          <a:fillRef idx="1">
+            <a:schemeClr val="accent3"/>
+          </a:fillRef>
+          <a:effectRef idx="0">
+            <a:schemeClr val="accent3"/>
+          </a:effectRef>
+          <a:fontRef idx="minor">
+            <a:schemeClr val="lt1"/>
+          </a:fontRef>
+        </p:style>
+        <p:txBody>
+          <a:bodyPr rtlCol="0" anchor="ctr"/>
+          <a:lstStyle/>
+          <a:p>
+            <a:pPr algn="ctr"/>
+            <a:r>
+              <a:rPr kumimoji="1" lang="en-US" altLang="ja-JP" b="1" dirty="0"/>
+              <a:t>20kg</a:t>
+            </a:r>
+            <a:endParaRPr kumimoji="1" lang="ja-JP" altLang="en-US" b="1" dirty="0"/>
+          </a:p>
+        </p:txBody>
+      </p:sp>
+      <mc:AlternateContent xmlns:mc="http://schemas.openxmlformats.org/markup-compatibility/2006">
+        <mc:Choice xmlns:a14="http://schemas.microsoft.com/office/drawing/2010/main" Requires="a14">
+          <p:sp>
+            <p:nvSpPr>
+              <p:cNvPr id="16" name="テキスト ボックス 15">
+                <a:extLst>
+                  <a:ext uri="{FF2B5EF4-FFF2-40B4-BE49-F238E27FC236}">
+                    <a16:creationId xmlns:a16="http://schemas.microsoft.com/office/drawing/2014/main" id="{87B09C6C-6D01-4872-BA3C-08158207807E}"/>
+                  </a:ext>
+                </a:extLst>
+              </p:cNvPr>
+              <p:cNvSpPr txBox="1"/>
+              <p:nvPr/>
+            </p:nvSpPr>
+            <p:spPr>
+              <a:xfrm>
+                <a:off x="5974688" y="2846764"/>
+                <a:ext cx="5703806" cy="3046988"/>
+              </a:xfrm>
+              <a:prstGeom prst="rect">
+                <a:avLst/>
+              </a:prstGeom>
+              <a:noFill/>
+            </p:spPr>
+            <p:txBody>
+              <a:bodyPr wrap="none" rtlCol="0">
+                <a:spAutoFit/>
+              </a:bodyPr>
+              <a:lstStyle/>
+              <a:p>
+                <a:r>
+                  <a:rPr lang="ja-JP" altLang="en-US" sz="2400" b="1" dirty="0">
+                    <a:solidFill>
+                      <a:srgbClr val="FF0000"/>
+                    </a:solidFill>
+                  </a:rPr>
+                  <a:t>■解答</a:t>
+                </a:r>
+              </a:p>
+              <a:p>
+                <a:r>
+                  <a:rPr lang="ja-JP" altLang="en-US" sz="2400" dirty="0"/>
+                  <a:t>金属と氷の運動摩擦係数は</a:t>
+                </a:r>
+                <a:r>
+                  <a:rPr lang="en-US" altLang="ja-JP" sz="2400" dirty="0"/>
+                  <a:t>0.02</a:t>
+                </a:r>
+                <a:r>
+                  <a:rPr lang="ja-JP" altLang="en-US" sz="2400" dirty="0"/>
+                  <a:t>なので、</a:t>
+                </a:r>
+                <a:endParaRPr lang="en-US" altLang="ja-JP" sz="2400" dirty="0"/>
+              </a:p>
+              <a:p>
+                <a:r>
+                  <a:rPr lang="ja-JP" altLang="en-US" sz="2400" dirty="0"/>
+                  <a:t>運動摩擦力は、</a:t>
+                </a:r>
+                <a:endParaRPr lang="en-US" altLang="ja-JP" sz="2400" dirty="0"/>
+              </a:p>
+              <a:p>
+                <a14:m>
+                  <m:oMath xmlns:m="http://schemas.openxmlformats.org/officeDocument/2006/math">
+                    <m:r>
+                      <a:rPr lang="en-US" altLang="ja-JP" sz="2400" i="1" dirty="0">
+                        <a:latin typeface="Cambria Math" panose="02040503050406030204" pitchFamily="18" charset="0"/>
+                      </a:rPr>
+                      <m:t>0.02</m:t>
+                    </m:r>
+                    <m:r>
+                      <a:rPr lang="en-US" altLang="ja-JP" sz="2400" i="1" dirty="0" smtClean="0">
+                        <a:latin typeface="Cambria Math" panose="02040503050406030204" pitchFamily="18" charset="0"/>
+                      </a:rPr>
+                      <m:t>×</m:t>
+                    </m:r>
+                    <m:r>
+                      <a:rPr lang="en-US" altLang="ja-JP" sz="2400" b="0" i="1" dirty="0" smtClean="0">
+                        <a:latin typeface="Cambria Math" panose="02040503050406030204" pitchFamily="18" charset="0"/>
+                      </a:rPr>
+                      <m:t>110</m:t>
+                    </m:r>
+                    <m:r>
+                      <a:rPr lang="en-US" altLang="ja-JP" sz="2400" b="0" i="1" dirty="0" smtClean="0">
+                        <a:latin typeface="Cambria Math" panose="02040503050406030204" pitchFamily="18" charset="0"/>
+                      </a:rPr>
+                      <m:t>𝑁</m:t>
+                    </m:r>
+                    <m:r>
+                      <a:rPr lang="en-US" altLang="ja-JP" sz="2400" b="0" i="1" dirty="0" smtClean="0">
+                        <a:latin typeface="Cambria Math" panose="02040503050406030204" pitchFamily="18" charset="0"/>
+                      </a:rPr>
+                      <m:t>=2.2</m:t>
+                    </m:r>
+                    <m:r>
+                      <a:rPr lang="en-US" altLang="ja-JP" sz="2400" b="0" i="1" dirty="0" smtClean="0">
+                        <a:latin typeface="Cambria Math" panose="02040503050406030204" pitchFamily="18" charset="0"/>
+                      </a:rPr>
+                      <m:t>𝑁</m:t>
+                    </m:r>
+                  </m:oMath>
+                </a14:m>
+                <a:r>
+                  <a:rPr lang="en-US" altLang="ja-JP" sz="2400" dirty="0"/>
+                  <a:t> </a:t>
+                </a:r>
+              </a:p>
+              <a:p>
+                <a:endParaRPr lang="en-US" altLang="ja-JP" sz="2400" dirty="0"/>
+              </a:p>
+              <a:p>
+                <a:r>
+                  <a:rPr lang="ja-JP" altLang="en-US" sz="2400" dirty="0"/>
+                  <a:t>ロープは右向きにひかれているので</a:t>
+                </a:r>
+                <a:endParaRPr lang="en-US" altLang="ja-JP" sz="2400" dirty="0"/>
+              </a:p>
+              <a:p>
+                <a:r>
+                  <a:rPr lang="ja-JP" altLang="en-US" sz="2400" dirty="0"/>
+                  <a:t>摩擦力はその逆向きに加わる。よって</a:t>
+                </a:r>
+                <a:endParaRPr lang="en-US" altLang="ja-JP" sz="2400" dirty="0"/>
+              </a:p>
+              <a:p>
+                <a14:m>
+                  <m:oMath xmlns:m="http://schemas.openxmlformats.org/officeDocument/2006/math">
+                    <m:r>
+                      <a:rPr lang="en-US" altLang="ja-JP" sz="2400" b="0" i="1" smtClean="0">
+                        <a:latin typeface="Cambria Math" panose="02040503050406030204" pitchFamily="18" charset="0"/>
+                      </a:rPr>
+                      <m:t>[−2.2</m:t>
+                    </m:r>
+                    <m:r>
+                      <a:rPr lang="en-US" altLang="ja-JP" sz="2400" b="0" i="1" smtClean="0">
+                        <a:latin typeface="Cambria Math" panose="02040503050406030204" pitchFamily="18" charset="0"/>
+                      </a:rPr>
+                      <m:t>𝑁</m:t>
+                    </m:r>
+                    <m:r>
+                      <a:rPr lang="en-US" altLang="ja-JP" sz="2400" b="0" i="1" smtClean="0">
+                        <a:latin typeface="Cambria Math" panose="02040503050406030204" pitchFamily="18" charset="0"/>
+                      </a:rPr>
+                      <m:t>, 0]</m:t>
+                    </m:r>
+                  </m:oMath>
+                </a14:m>
+                <a:r>
+                  <a:rPr lang="ja-JP" altLang="en-US" sz="2400" dirty="0"/>
+                  <a:t>となる</a:t>
+                </a:r>
+                <a:endParaRPr lang="en-US" altLang="ja-JP" sz="2400" dirty="0"/>
+              </a:p>
+            </p:txBody>
+          </p:sp>
+        </mc:Choice>
+        <mc:Fallback>
+          <p:sp>
+            <p:nvSpPr>
+              <p:cNvPr id="16" name="テキスト ボックス 15">
+                <a:extLst>
+                  <a:ext uri="{FF2B5EF4-FFF2-40B4-BE49-F238E27FC236}">
+                    <a16:creationId xmlns:a16="http://schemas.microsoft.com/office/drawing/2014/main" id="{87B09C6C-6D01-4872-BA3C-08158207807E}"/>
+                  </a:ext>
+                </a:extLst>
+              </p:cNvPr>
+              <p:cNvSpPr txBox="1">
+                <a:spLocks noRot="1" noChangeAspect="1" noMove="1" noResize="1" noEditPoints="1" noAdjustHandles="1" noChangeArrowheads="1" noChangeShapeType="1" noTextEdit="1"/>
+              </p:cNvSpPr>
+              <p:nvPr/>
+            </p:nvSpPr>
+            <p:spPr>
+              <a:xfrm>
+                <a:off x="5974688" y="2846764"/>
+                <a:ext cx="5703806" cy="3046988"/>
+              </a:xfrm>
+              <a:prstGeom prst="rect">
+                <a:avLst/>
+              </a:prstGeom>
+              <a:blipFill>
+                <a:blip r:embed="rId3"/>
+                <a:stretch>
+                  <a:fillRect l="-1603" t="-1600" r="-748" b="-3600"/>
+                </a:stretch>
+              </a:blipFill>
+            </p:spPr>
+            <p:txBody>
+              <a:bodyPr/>
+              <a:lstStyle/>
+              <a:p>
+                <a:r>
+                  <a:rPr lang="ja-JP" altLang="en-US">
+                    <a:noFill/>
+                  </a:rPr>
+                  <a:t> </a:t>
+                </a:r>
+              </a:p>
+            </p:txBody>
+          </p:sp>
+        </mc:Fallback>
+      </mc:AlternateContent>
+      <p:cxnSp>
+        <p:nvCxnSpPr>
+          <p:cNvPr id="11" name="直線矢印コネクタ 10">
+            <a:extLst>
+              <a:ext uri="{FF2B5EF4-FFF2-40B4-BE49-F238E27FC236}">
+                <a16:creationId xmlns:a16="http://schemas.microsoft.com/office/drawing/2014/main" id="{E2AE73B5-EBF3-47A8-BFAA-6C3D70578B76}"/>
+              </a:ext>
+            </a:extLst>
+          </p:cNvPr>
+          <p:cNvCxnSpPr>
+            <a:cxnSpLocks/>
+          </p:cNvCxnSpPr>
+          <p:nvPr/>
+        </p:nvCxnSpPr>
+        <p:spPr>
+          <a:xfrm>
+            <a:off x="2605331" y="5486401"/>
+            <a:ext cx="0" cy="1118210"/>
+          </a:xfrm>
+          <a:prstGeom prst="straightConnector1">
+            <a:avLst/>
+          </a:prstGeom>
+          <a:ln w="38100">
+            <a:solidFill>
+              <a:srgbClr val="7030A0"/>
+            </a:solidFill>
+            <a:tailEnd type="triangle"/>
+          </a:ln>
+        </p:spPr>
+        <p:style>
+          <a:lnRef idx="1">
+            <a:schemeClr val="accent1"/>
+          </a:lnRef>
+          <a:fillRef idx="0">
+            <a:schemeClr val="accent1"/>
+          </a:fillRef>
+          <a:effectRef idx="0">
+            <a:schemeClr val="accent1"/>
+          </a:effectRef>
+          <a:fontRef idx="minor">
+            <a:schemeClr val="tx1"/>
+          </a:fontRef>
+        </p:style>
+      </p:cxnSp>
+      <mc:AlternateContent xmlns:mc="http://schemas.openxmlformats.org/markup-compatibility/2006">
+        <mc:Choice xmlns:a14="http://schemas.microsoft.com/office/drawing/2010/main" Requires="a14">
+          <p:sp>
+            <p:nvSpPr>
+              <p:cNvPr id="12" name="テキスト ボックス 11">
+                <a:extLst>
+                  <a:ext uri="{FF2B5EF4-FFF2-40B4-BE49-F238E27FC236}">
+                    <a16:creationId xmlns:a16="http://schemas.microsoft.com/office/drawing/2014/main" id="{5F9C7478-8BE7-40E1-AC23-D3482AE8FC24}"/>
+                  </a:ext>
+                </a:extLst>
+              </p:cNvPr>
+              <p:cNvSpPr txBox="1"/>
+              <p:nvPr/>
+            </p:nvSpPr>
+            <p:spPr>
+              <a:xfrm>
+                <a:off x="2660800" y="5860840"/>
+                <a:ext cx="1174376" cy="369332"/>
+              </a:xfrm>
+              <a:prstGeom prst="rect">
+                <a:avLst/>
+              </a:prstGeom>
+              <a:noFill/>
+            </p:spPr>
+            <p:txBody>
+              <a:bodyPr wrap="square">
+                <a:spAutoFit/>
+              </a:bodyPr>
+              <a:lstStyle/>
+              <a:p>
+                <a14:m>
+                  <m:oMath xmlns:m="http://schemas.openxmlformats.org/officeDocument/2006/math">
+                    <m:r>
+                      <a:rPr lang="en-US" altLang="ja-JP" sz="1800" i="1" smtClean="0">
+                        <a:solidFill>
+                          <a:srgbClr val="7030A0"/>
+                        </a:solidFill>
+                        <a:latin typeface="Cambria Math" panose="02040503050406030204" pitchFamily="18" charset="0"/>
+                      </a:rPr>
+                      <m:t>[0, </m:t>
+                    </m:r>
+                    <m:r>
+                      <a:rPr lang="en-US" altLang="ja-JP" sz="1800" b="0" i="1" smtClean="0">
+                        <a:solidFill>
+                          <a:srgbClr val="7030A0"/>
+                        </a:solidFill>
+                        <a:latin typeface="Cambria Math" panose="02040503050406030204" pitchFamily="18" charset="0"/>
+                      </a:rPr>
+                      <m:t>−</m:t>
+                    </m:r>
+                    <m:r>
+                      <a:rPr lang="en-US" altLang="ja-JP" sz="1800" i="1" smtClean="0">
+                        <a:solidFill>
+                          <a:srgbClr val="7030A0"/>
+                        </a:solidFill>
+                        <a:latin typeface="Cambria Math" panose="02040503050406030204" pitchFamily="18" charset="0"/>
+                      </a:rPr>
+                      <m:t>196</m:t>
+                    </m:r>
+                    <m:r>
+                      <a:rPr lang="en-US" altLang="ja-JP" sz="1800" i="1" smtClean="0">
+                        <a:solidFill>
+                          <a:srgbClr val="7030A0"/>
+                        </a:solidFill>
+                        <a:latin typeface="Cambria Math" panose="02040503050406030204" pitchFamily="18" charset="0"/>
+                      </a:rPr>
+                      <m:t>𝑁</m:t>
+                    </m:r>
+                    <m:r>
+                      <a:rPr lang="en-US" altLang="ja-JP" sz="1800" i="1" smtClean="0">
+                        <a:solidFill>
+                          <a:srgbClr val="7030A0"/>
+                        </a:solidFill>
+                        <a:latin typeface="Cambria Math" panose="02040503050406030204" pitchFamily="18" charset="0"/>
+                      </a:rPr>
+                      <m:t>]</m:t>
+                    </m:r>
+                  </m:oMath>
+                </a14:m>
+                <a:r>
+                  <a:rPr lang="en-US" altLang="ja-JP" sz="1800" dirty="0">
+                    <a:solidFill>
+                      <a:srgbClr val="7030A0"/>
+                    </a:solidFill>
+                  </a:rPr>
+                  <a:t> </a:t>
+                </a:r>
+              </a:p>
+            </p:txBody>
+          </p:sp>
+        </mc:Choice>
+        <mc:Fallback>
+          <p:sp>
+            <p:nvSpPr>
+              <p:cNvPr id="12" name="テキスト ボックス 11">
+                <a:extLst>
+                  <a:ext uri="{FF2B5EF4-FFF2-40B4-BE49-F238E27FC236}">
+                    <a16:creationId xmlns:a16="http://schemas.microsoft.com/office/drawing/2014/main" id="{5F9C7478-8BE7-40E1-AC23-D3482AE8FC24}"/>
+                  </a:ext>
+                </a:extLst>
+              </p:cNvPr>
+              <p:cNvSpPr txBox="1">
+                <a:spLocks noRot="1" noChangeAspect="1" noMove="1" noResize="1" noEditPoints="1" noAdjustHandles="1" noChangeArrowheads="1" noChangeShapeType="1" noTextEdit="1"/>
+              </p:cNvSpPr>
+              <p:nvPr/>
+            </p:nvSpPr>
+            <p:spPr>
+              <a:xfrm>
+                <a:off x="2660800" y="5860840"/>
+                <a:ext cx="1174376" cy="369332"/>
+              </a:xfrm>
+              <a:prstGeom prst="rect">
+                <a:avLst/>
+              </a:prstGeom>
+              <a:blipFill>
+                <a:blip r:embed="rId4"/>
+                <a:stretch>
+                  <a:fillRect l="-1554" r="-10881" b="-14754"/>
+                </a:stretch>
+              </a:blipFill>
+            </p:spPr>
+            <p:txBody>
+              <a:bodyPr/>
+              <a:lstStyle/>
+              <a:p>
+                <a:r>
+                  <a:rPr lang="ja-JP" altLang="en-US">
+                    <a:noFill/>
+                  </a:rPr>
+                  <a:t> </a:t>
+                </a:r>
+              </a:p>
+            </p:txBody>
+          </p:sp>
+        </mc:Fallback>
+      </mc:AlternateContent>
+      <p:cxnSp>
+        <p:nvCxnSpPr>
+          <p:cNvPr id="5" name="直線矢印コネクタ 4">
+            <a:extLst>
+              <a:ext uri="{FF2B5EF4-FFF2-40B4-BE49-F238E27FC236}">
+                <a16:creationId xmlns:a16="http://schemas.microsoft.com/office/drawing/2014/main" id="{CA53EC50-58D3-40C5-8C2F-BABEE5FA8DD1}"/>
+              </a:ext>
+            </a:extLst>
+          </p:cNvPr>
+          <p:cNvCxnSpPr/>
+          <p:nvPr/>
+        </p:nvCxnSpPr>
+        <p:spPr>
+          <a:xfrm flipV="1">
+            <a:off x="3247988" y="3466938"/>
+            <a:ext cx="880259" cy="1030942"/>
+          </a:xfrm>
+          <a:prstGeom prst="straightConnector1">
+            <a:avLst/>
+          </a:prstGeom>
+          <a:ln w="38100">
+            <a:solidFill>
+              <a:srgbClr val="FFC000"/>
+            </a:solidFill>
+            <a:tailEnd type="triangle"/>
+          </a:ln>
+        </p:spPr>
+        <p:style>
+          <a:lnRef idx="1">
+            <a:schemeClr val="accent1"/>
+          </a:lnRef>
+          <a:fillRef idx="0">
+            <a:schemeClr val="accent1"/>
+          </a:fillRef>
+          <a:effectRef idx="0">
+            <a:schemeClr val="accent1"/>
+          </a:effectRef>
+          <a:fontRef idx="minor">
+            <a:schemeClr val="tx1"/>
+          </a:fontRef>
+        </p:style>
+      </p:cxnSp>
+      <mc:AlternateContent xmlns:mc="http://schemas.openxmlformats.org/markup-compatibility/2006">
+        <mc:Choice xmlns:a14="http://schemas.microsoft.com/office/drawing/2010/main" Requires="a14">
+          <p:sp>
+            <p:nvSpPr>
+              <p:cNvPr id="13" name="テキスト ボックス 12">
+                <a:extLst>
+                  <a:ext uri="{FF2B5EF4-FFF2-40B4-BE49-F238E27FC236}">
+                    <a16:creationId xmlns:a16="http://schemas.microsoft.com/office/drawing/2014/main" id="{E26530F0-EA8A-4C50-8CC5-5C124E0DF2CF}"/>
+                  </a:ext>
+                </a:extLst>
+              </p:cNvPr>
+              <p:cNvSpPr txBox="1"/>
+              <p:nvPr/>
+            </p:nvSpPr>
+            <p:spPr>
+              <a:xfrm>
+                <a:off x="1242010" y="4071911"/>
+                <a:ext cx="6096000" cy="369332"/>
+              </a:xfrm>
+              <a:prstGeom prst="rect">
+                <a:avLst/>
+              </a:prstGeom>
+              <a:noFill/>
+            </p:spPr>
+            <p:txBody>
+              <a:bodyPr wrap="square">
+                <a:spAutoFit/>
+              </a:bodyPr>
+              <a:lstStyle/>
+              <a:p>
+                <a:pPr/>
+                <a14:m>
+                  <m:oMathPara xmlns:m="http://schemas.openxmlformats.org/officeDocument/2006/math">
+                    <m:oMathParaPr>
+                      <m:jc m:val="centerGroup"/>
+                    </m:oMathParaPr>
+                    <m:oMath xmlns:m="http://schemas.openxmlformats.org/officeDocument/2006/math">
+                      <m:r>
+                        <a:rPr lang="en-US" altLang="ja-JP" sz="1800" i="1" smtClean="0">
+                          <a:solidFill>
+                            <a:srgbClr val="FFC000"/>
+                          </a:solidFill>
+                          <a:latin typeface="Cambria Math" panose="02040503050406030204" pitchFamily="18" charset="0"/>
+                        </a:rPr>
+                        <m:t>[</m:t>
+                      </m:r>
+                      <m:r>
+                        <a:rPr lang="en-US" altLang="ja-JP" sz="1800" b="0" i="1" smtClean="0">
+                          <a:solidFill>
+                            <a:srgbClr val="FFC000"/>
+                          </a:solidFill>
+                          <a:latin typeface="Cambria Math" panose="02040503050406030204" pitchFamily="18" charset="0"/>
+                        </a:rPr>
+                        <m:t>50</m:t>
+                      </m:r>
+                      <m:r>
+                        <a:rPr lang="en-US" altLang="ja-JP" sz="1800" b="0" i="1" smtClean="0">
+                          <a:solidFill>
+                            <a:srgbClr val="FFC000"/>
+                          </a:solidFill>
+                          <a:latin typeface="Cambria Math" panose="02040503050406030204" pitchFamily="18" charset="0"/>
+                        </a:rPr>
+                        <m:t>𝑁</m:t>
+                      </m:r>
+                      <m:r>
+                        <a:rPr lang="en-US" altLang="ja-JP" sz="1800" b="0" i="1" smtClean="0">
+                          <a:solidFill>
+                            <a:srgbClr val="FFC000"/>
+                          </a:solidFill>
+                          <a:latin typeface="Cambria Math" panose="02040503050406030204" pitchFamily="18" charset="0"/>
+                        </a:rPr>
+                        <m:t>,86</m:t>
+                      </m:r>
+                      <m:r>
+                        <a:rPr lang="en-US" altLang="ja-JP" sz="1800" b="0" i="1" smtClean="0">
+                          <a:solidFill>
+                            <a:srgbClr val="FFC000"/>
+                          </a:solidFill>
+                          <a:latin typeface="Cambria Math" panose="02040503050406030204" pitchFamily="18" charset="0"/>
+                        </a:rPr>
+                        <m:t>𝑁</m:t>
+                      </m:r>
+                      <m:r>
+                        <a:rPr lang="en-US" altLang="ja-JP" sz="1800" i="1">
+                          <a:solidFill>
+                            <a:srgbClr val="FFC000"/>
+                          </a:solidFill>
+                          <a:latin typeface="Cambria Math" panose="02040503050406030204" pitchFamily="18" charset="0"/>
+                        </a:rPr>
+                        <m:t>]</m:t>
+                      </m:r>
+                    </m:oMath>
+                  </m:oMathPara>
+                </a14:m>
+                <a:endParaRPr lang="ja-JP" altLang="en-US" dirty="0">
+                  <a:solidFill>
+                    <a:srgbClr val="FFC000"/>
+                  </a:solidFill>
+                </a:endParaRPr>
+              </a:p>
+            </p:txBody>
+          </p:sp>
+        </mc:Choice>
+        <mc:Fallback>
+          <p:sp>
+            <p:nvSpPr>
+              <p:cNvPr id="13" name="テキスト ボックス 12">
+                <a:extLst>
+                  <a:ext uri="{FF2B5EF4-FFF2-40B4-BE49-F238E27FC236}">
+                    <a16:creationId xmlns:a16="http://schemas.microsoft.com/office/drawing/2014/main" id="{E26530F0-EA8A-4C50-8CC5-5C124E0DF2CF}"/>
+                  </a:ext>
+                </a:extLst>
+              </p:cNvPr>
+              <p:cNvSpPr txBox="1">
+                <a:spLocks noRot="1" noChangeAspect="1" noMove="1" noResize="1" noEditPoints="1" noAdjustHandles="1" noChangeArrowheads="1" noChangeShapeType="1" noTextEdit="1"/>
+              </p:cNvSpPr>
+              <p:nvPr/>
+            </p:nvSpPr>
+            <p:spPr>
+              <a:xfrm>
+                <a:off x="1242010" y="4071911"/>
+                <a:ext cx="6096000" cy="369332"/>
+              </a:xfrm>
+              <a:prstGeom prst="rect">
+                <a:avLst/>
+              </a:prstGeom>
+              <a:blipFill>
+                <a:blip r:embed="rId5"/>
+                <a:stretch>
+                  <a:fillRect b="-14754"/>
+                </a:stretch>
+              </a:blipFill>
+            </p:spPr>
+            <p:txBody>
+              <a:bodyPr/>
+              <a:lstStyle/>
+              <a:p>
+                <a:r>
+                  <a:rPr lang="ja-JP" altLang="en-US">
+                    <a:noFill/>
+                  </a:rPr>
+                  <a:t> </a:t>
+                </a:r>
+              </a:p>
+            </p:txBody>
+          </p:sp>
+        </mc:Fallback>
+      </mc:AlternateContent>
+      <p:cxnSp>
+        <p:nvCxnSpPr>
+          <p:cNvPr id="10" name="直線矢印コネクタ 9">
+            <a:extLst>
+              <a:ext uri="{FF2B5EF4-FFF2-40B4-BE49-F238E27FC236}">
+                <a16:creationId xmlns:a16="http://schemas.microsoft.com/office/drawing/2014/main" id="{8B65E137-FF19-45DC-B8AB-48CF040F4DA9}"/>
+              </a:ext>
+            </a:extLst>
+          </p:cNvPr>
+          <p:cNvCxnSpPr>
+            <a:cxnSpLocks/>
+          </p:cNvCxnSpPr>
+          <p:nvPr/>
+        </p:nvCxnSpPr>
+        <p:spPr>
+          <a:xfrm flipV="1">
+            <a:off x="2605331" y="3466938"/>
+            <a:ext cx="0" cy="889911"/>
+          </a:xfrm>
+          <a:prstGeom prst="straightConnector1">
+            <a:avLst/>
+          </a:prstGeom>
+          <a:ln w="38100">
+            <a:solidFill>
+              <a:srgbClr val="00B050"/>
+            </a:solidFill>
+            <a:tailEnd type="triangle"/>
+          </a:ln>
+        </p:spPr>
+        <p:style>
+          <a:lnRef idx="1">
+            <a:schemeClr val="accent1"/>
+          </a:lnRef>
+          <a:fillRef idx="0">
+            <a:schemeClr val="accent1"/>
+          </a:fillRef>
+          <a:effectRef idx="0">
+            <a:schemeClr val="accent1"/>
+          </a:effectRef>
+          <a:fontRef idx="minor">
+            <a:schemeClr val="tx1"/>
+          </a:fontRef>
+        </p:style>
+      </p:cxnSp>
+      <mc:AlternateContent xmlns:mc="http://schemas.openxmlformats.org/markup-compatibility/2006">
+        <mc:Choice xmlns:a14="http://schemas.microsoft.com/office/drawing/2010/main" Requires="a14">
+          <p:sp>
+            <p:nvSpPr>
+              <p:cNvPr id="14" name="テキスト ボックス 13">
+                <a:extLst>
+                  <a:ext uri="{FF2B5EF4-FFF2-40B4-BE49-F238E27FC236}">
+                    <a16:creationId xmlns:a16="http://schemas.microsoft.com/office/drawing/2014/main" id="{A59F2E55-2B4C-4A9E-B022-0FA7810E8D75}"/>
+                  </a:ext>
+                </a:extLst>
+              </p:cNvPr>
+              <p:cNvSpPr txBox="1"/>
+              <p:nvPr/>
+            </p:nvSpPr>
+            <p:spPr>
+              <a:xfrm>
+                <a:off x="1486424" y="3772688"/>
+                <a:ext cx="1174376" cy="369332"/>
+              </a:xfrm>
+              <a:prstGeom prst="rect">
+                <a:avLst/>
+              </a:prstGeom>
+              <a:noFill/>
+            </p:spPr>
+            <p:txBody>
+              <a:bodyPr wrap="square">
+                <a:spAutoFit/>
+              </a:bodyPr>
+              <a:lstStyle/>
+              <a:p>
+                <a14:m>
+                  <m:oMath xmlns:m="http://schemas.openxmlformats.org/officeDocument/2006/math">
+                    <m:r>
+                      <a:rPr lang="en-US" altLang="ja-JP" sz="1800" i="1" smtClean="0">
+                        <a:solidFill>
+                          <a:srgbClr val="00B050"/>
+                        </a:solidFill>
+                        <a:latin typeface="Cambria Math" panose="02040503050406030204" pitchFamily="18" charset="0"/>
+                      </a:rPr>
+                      <m:t>[0, </m:t>
+                    </m:r>
+                    <m:r>
+                      <a:rPr lang="en-US" altLang="ja-JP" sz="1800" b="0" i="1" smtClean="0">
+                        <a:solidFill>
+                          <a:srgbClr val="00B050"/>
+                        </a:solidFill>
+                        <a:latin typeface="Cambria Math" panose="02040503050406030204" pitchFamily="18" charset="0"/>
+                      </a:rPr>
+                      <m:t>110</m:t>
+                    </m:r>
+                    <m:r>
+                      <a:rPr lang="en-US" altLang="ja-JP" sz="1800" i="1" smtClean="0">
+                        <a:solidFill>
+                          <a:srgbClr val="00B050"/>
+                        </a:solidFill>
+                        <a:latin typeface="Cambria Math" panose="02040503050406030204" pitchFamily="18" charset="0"/>
+                      </a:rPr>
+                      <m:t>𝑁</m:t>
+                    </m:r>
+                    <m:r>
+                      <a:rPr lang="en-US" altLang="ja-JP" sz="1800" i="1" smtClean="0">
+                        <a:solidFill>
+                          <a:srgbClr val="00B050"/>
+                        </a:solidFill>
+                        <a:latin typeface="Cambria Math" panose="02040503050406030204" pitchFamily="18" charset="0"/>
+                      </a:rPr>
+                      <m:t>]</m:t>
+                    </m:r>
+                  </m:oMath>
+                </a14:m>
+                <a:r>
+                  <a:rPr lang="en-US" altLang="ja-JP" sz="1800" dirty="0">
+                    <a:solidFill>
+                      <a:srgbClr val="00B050"/>
+                    </a:solidFill>
+                  </a:rPr>
+                  <a:t> </a:t>
+                </a:r>
+              </a:p>
+            </p:txBody>
+          </p:sp>
+        </mc:Choice>
+        <mc:Fallback>
+          <p:sp>
+            <p:nvSpPr>
+              <p:cNvPr id="14" name="テキスト ボックス 13">
+                <a:extLst>
+                  <a:ext uri="{FF2B5EF4-FFF2-40B4-BE49-F238E27FC236}">
+                    <a16:creationId xmlns:a16="http://schemas.microsoft.com/office/drawing/2014/main" id="{A59F2E55-2B4C-4A9E-B022-0FA7810E8D75}"/>
+                  </a:ext>
+                </a:extLst>
+              </p:cNvPr>
+              <p:cNvSpPr txBox="1">
+                <a:spLocks noRot="1" noChangeAspect="1" noMove="1" noResize="1" noEditPoints="1" noAdjustHandles="1" noChangeArrowheads="1" noChangeShapeType="1" noTextEdit="1"/>
+              </p:cNvSpPr>
+              <p:nvPr/>
+            </p:nvSpPr>
+            <p:spPr>
+              <a:xfrm>
+                <a:off x="1486424" y="3772688"/>
+                <a:ext cx="1174376" cy="369332"/>
+              </a:xfrm>
+              <a:prstGeom prst="rect">
+                <a:avLst/>
+              </a:prstGeom>
+              <a:blipFill>
+                <a:blip r:embed="rId6"/>
+                <a:stretch>
+                  <a:fillRect l="-2083" b="-16667"/>
+                </a:stretch>
+              </a:blipFill>
+            </p:spPr>
+            <p:txBody>
+              <a:bodyPr/>
+              <a:lstStyle/>
+              <a:p>
+                <a:r>
+                  <a:rPr lang="ja-JP" altLang="en-US">
+                    <a:noFill/>
+                  </a:rPr>
+                  <a:t> </a:t>
+                </a:r>
+              </a:p>
+            </p:txBody>
+          </p:sp>
+        </mc:Fallback>
+      </mc:AlternateContent>
+      <p:cxnSp>
+        <p:nvCxnSpPr>
+          <p:cNvPr id="15" name="直線矢印コネクタ 14">
+            <a:extLst>
+              <a:ext uri="{FF2B5EF4-FFF2-40B4-BE49-F238E27FC236}">
+                <a16:creationId xmlns:a16="http://schemas.microsoft.com/office/drawing/2014/main" id="{E94B9AAC-5287-4FAF-8053-B1E8E393C1A0}"/>
+              </a:ext>
+            </a:extLst>
+          </p:cNvPr>
+          <p:cNvCxnSpPr>
+            <a:cxnSpLocks/>
+          </p:cNvCxnSpPr>
+          <p:nvPr/>
+        </p:nvCxnSpPr>
+        <p:spPr>
+          <a:xfrm flipH="1">
+            <a:off x="1747484" y="4921623"/>
+            <a:ext cx="326128" cy="1"/>
+          </a:xfrm>
+          <a:prstGeom prst="straightConnector1">
+            <a:avLst/>
+          </a:prstGeom>
+          <a:ln w="38100">
+            <a:solidFill>
+              <a:srgbClr val="0070C0"/>
+            </a:solidFill>
+            <a:tailEnd type="triangle"/>
+          </a:ln>
+        </p:spPr>
+        <p:style>
+          <a:lnRef idx="1">
+            <a:schemeClr val="accent1"/>
+          </a:lnRef>
+          <a:fillRef idx="0">
+            <a:schemeClr val="accent1"/>
+          </a:fillRef>
+          <a:effectRef idx="0">
+            <a:schemeClr val="accent1"/>
+          </a:effectRef>
+          <a:fontRef idx="minor">
+            <a:schemeClr val="tx1"/>
+          </a:fontRef>
+        </p:style>
+      </p:cxnSp>
+      <mc:AlternateContent xmlns:mc="http://schemas.openxmlformats.org/markup-compatibility/2006">
+        <mc:Choice xmlns:a14="http://schemas.microsoft.com/office/drawing/2010/main" Requires="a14">
+          <p:sp>
+            <p:nvSpPr>
+              <p:cNvPr id="17" name="テキスト ボックス 16">
+                <a:extLst>
+                  <a:ext uri="{FF2B5EF4-FFF2-40B4-BE49-F238E27FC236}">
+                    <a16:creationId xmlns:a16="http://schemas.microsoft.com/office/drawing/2014/main" id="{0685C82F-52F8-4C79-B1EC-BF6E1AD00595}"/>
+                  </a:ext>
+                </a:extLst>
+              </p:cNvPr>
+              <p:cNvSpPr txBox="1"/>
+              <p:nvPr/>
+            </p:nvSpPr>
+            <p:spPr>
+              <a:xfrm>
+                <a:off x="825145" y="5004722"/>
+                <a:ext cx="1322557" cy="369332"/>
+              </a:xfrm>
+              <a:prstGeom prst="rect">
+                <a:avLst/>
+              </a:prstGeom>
+              <a:noFill/>
+            </p:spPr>
+            <p:txBody>
+              <a:bodyPr wrap="square">
+                <a:spAutoFit/>
+              </a:bodyPr>
+              <a:lstStyle/>
+              <a:p>
+                <a:pPr/>
+                <a14:m>
+                  <m:oMathPara xmlns:m="http://schemas.openxmlformats.org/officeDocument/2006/math">
+                    <m:oMathParaPr>
+                      <m:jc m:val="centerGroup"/>
+                    </m:oMathParaPr>
+                    <m:oMath xmlns:m="http://schemas.openxmlformats.org/officeDocument/2006/math">
+                      <m:r>
+                        <a:rPr lang="en-US" altLang="ja-JP" sz="1800" b="0" i="1" smtClean="0">
+                          <a:solidFill>
+                            <a:srgbClr val="0070C0"/>
+                          </a:solidFill>
+                          <a:latin typeface="Cambria Math" panose="02040503050406030204" pitchFamily="18" charset="0"/>
+                        </a:rPr>
+                        <m:t>[−2.2</m:t>
+                      </m:r>
+                      <m:r>
+                        <a:rPr lang="en-US" altLang="ja-JP" sz="1800" b="0" i="1" smtClean="0">
+                          <a:solidFill>
+                            <a:srgbClr val="0070C0"/>
+                          </a:solidFill>
+                          <a:latin typeface="Cambria Math" panose="02040503050406030204" pitchFamily="18" charset="0"/>
+                        </a:rPr>
+                        <m:t>𝑁</m:t>
+                      </m:r>
+                      <m:r>
+                        <a:rPr lang="en-US" altLang="ja-JP" sz="1800" b="0" i="1" smtClean="0">
+                          <a:solidFill>
+                            <a:srgbClr val="0070C0"/>
+                          </a:solidFill>
+                          <a:latin typeface="Cambria Math" panose="02040503050406030204" pitchFamily="18" charset="0"/>
+                        </a:rPr>
+                        <m:t>, 0]</m:t>
+                      </m:r>
+                    </m:oMath>
+                  </m:oMathPara>
+                </a14:m>
+                <a:endParaRPr lang="ja-JP" altLang="en-US" dirty="0">
+                  <a:solidFill>
+                    <a:srgbClr val="0070C0"/>
+                  </a:solidFill>
+                </a:endParaRPr>
+              </a:p>
+            </p:txBody>
+          </p:sp>
+        </mc:Choice>
+        <mc:Fallback>
+          <p:sp>
+            <p:nvSpPr>
+              <p:cNvPr id="17" name="テキスト ボックス 16">
+                <a:extLst>
+                  <a:ext uri="{FF2B5EF4-FFF2-40B4-BE49-F238E27FC236}">
+                    <a16:creationId xmlns:a16="http://schemas.microsoft.com/office/drawing/2014/main" id="{0685C82F-52F8-4C79-B1EC-BF6E1AD00595}"/>
+                  </a:ext>
+                </a:extLst>
+              </p:cNvPr>
+              <p:cNvSpPr txBox="1">
+                <a:spLocks noRot="1" noChangeAspect="1" noMove="1" noResize="1" noEditPoints="1" noAdjustHandles="1" noChangeArrowheads="1" noChangeShapeType="1" noTextEdit="1"/>
+              </p:cNvSpPr>
+              <p:nvPr/>
+            </p:nvSpPr>
+            <p:spPr>
+              <a:xfrm>
+                <a:off x="825145" y="5004722"/>
+                <a:ext cx="1322557" cy="369332"/>
+              </a:xfrm>
+              <a:prstGeom prst="rect">
+                <a:avLst/>
+              </a:prstGeom>
+              <a:blipFill>
+                <a:blip r:embed="rId7"/>
+                <a:stretch>
+                  <a:fillRect b="-14754"/>
+                </a:stretch>
+              </a:blipFill>
+            </p:spPr>
+            <p:txBody>
+              <a:bodyPr/>
+              <a:lstStyle/>
+              <a:p>
+                <a:r>
+                  <a:rPr lang="ja-JP" altLang="en-US">
+                    <a:noFill/>
+                  </a:rPr>
+                  <a:t> </a:t>
+                </a:r>
+              </a:p>
+            </p:txBody>
+          </p:sp>
+        </mc:Fallback>
+      </mc:AlternateContent>
+    </p:spTree>
+    <p:extLst>
+      <p:ext uri="{BB962C8B-B14F-4D97-AF65-F5344CB8AC3E}">
+        <p14:creationId xmlns:p14="http://schemas.microsoft.com/office/powerpoint/2010/main" val="2602934979"/>
+      </p:ext>
+    </p:extLst>
+  </p:cSld>
+  <p:clrMapOvr>
+    <a:masterClrMapping/>
+  </p:clrMapOvr>
+</p:sld>
+</file>
+
+<file path=ppt/slides/slide11.xml><?xml version="1.0" encoding="utf-8"?>
+<p:sld xmlns:a="http://schemas.openxmlformats.org/drawingml/2006/main" xmlns:r="http://schemas.openxmlformats.org/officeDocument/2006/relationships" xmlns:p="http://schemas.openxmlformats.org/presentationml/2006/main">
+  <p:cSld>
+    <p:spTree>
+      <p:nvGrpSpPr>
+        <p:cNvPr id="1" name=""/>
+        <p:cNvGrpSpPr/>
+        <p:nvPr/>
+      </p:nvGrpSpPr>
+      <p:grpSpPr>
+        <a:xfrm>
+          <a:off x="0" y="0"/>
+          <a:ext cx="0" cy="0"/>
+          <a:chOff x="0" y="0"/>
+          <a:chExt cx="0" cy="0"/>
+        </a:xfrm>
+      </p:grpSpPr>
+      <p:sp>
+        <p:nvSpPr>
+          <p:cNvPr id="4" name="テキスト ボックス 3">
+            <a:extLst>
+              <a:ext uri="{FF2B5EF4-FFF2-40B4-BE49-F238E27FC236}">
+                <a16:creationId xmlns:a16="http://schemas.microsoft.com/office/drawing/2014/main" id="{5A13BF46-B8C5-48AA-8308-C9ECFF431A18}"/>
+              </a:ext>
+            </a:extLst>
+          </p:cNvPr>
+          <p:cNvSpPr txBox="1"/>
+          <p:nvPr/>
+        </p:nvSpPr>
+        <p:spPr>
+          <a:xfrm>
+            <a:off x="567542" y="491954"/>
+            <a:ext cx="1943161" cy="584775"/>
+          </a:xfrm>
+          <a:prstGeom prst="rect">
+            <a:avLst/>
+          </a:prstGeom>
+          <a:noFill/>
+        </p:spPr>
+        <p:txBody>
+          <a:bodyPr wrap="none" rtlCol="0">
+            <a:spAutoFit/>
+          </a:bodyPr>
+          <a:lstStyle/>
+          <a:p>
+            <a:r>
+              <a:rPr kumimoji="1" lang="ja-JP" altLang="en-US" sz="3200" b="1" u="sng" dirty="0"/>
+              <a:t>合力 例題</a:t>
+            </a:r>
+            <a:endParaRPr kumimoji="1" lang="en-US" altLang="ja-JP" sz="3200" b="1" u="sng" dirty="0"/>
+          </a:p>
+        </p:txBody>
+      </p:sp>
+      <mc:AlternateContent xmlns:mc="http://schemas.openxmlformats.org/markup-compatibility/2006" xmlns:a14="http://schemas.microsoft.com/office/drawing/2010/main">
+        <mc:Choice Requires="a14">
+          <p:sp>
+            <p:nvSpPr>
+              <p:cNvPr id="6" name="テキスト ボックス 5">
+                <a:extLst>
+                  <a:ext uri="{FF2B5EF4-FFF2-40B4-BE49-F238E27FC236}">
+                    <a16:creationId xmlns:a16="http://schemas.microsoft.com/office/drawing/2014/main" id="{55830AD6-028B-4C4E-80BF-B70DFC1C3A46}"/>
+                  </a:ext>
+                </a:extLst>
+              </p:cNvPr>
+              <p:cNvSpPr txBox="1"/>
+              <p:nvPr/>
+            </p:nvSpPr>
+            <p:spPr>
+              <a:xfrm>
+                <a:off x="567542" y="1216429"/>
+                <a:ext cx="8026556" cy="1200329"/>
+              </a:xfrm>
+              <a:prstGeom prst="rect">
+                <a:avLst/>
+              </a:prstGeom>
+              <a:noFill/>
+            </p:spPr>
+            <p:txBody>
+              <a:bodyPr wrap="none" rtlCol="0">
+                <a:spAutoFit/>
+              </a:bodyPr>
+              <a:lstStyle/>
+              <a:p>
+                <a:r>
+                  <a:rPr lang="ja-JP" altLang="en-US" sz="2400" dirty="0"/>
+                  <a:t>ゲーム中の氷の床の上に</a:t>
+                </a:r>
+                <a:r>
+                  <a:rPr lang="en-US" altLang="ja-JP" sz="2400" dirty="0"/>
+                  <a:t>20kg</a:t>
+                </a:r>
+                <a:r>
+                  <a:rPr lang="ja-JP" altLang="en-US" sz="2400" dirty="0"/>
+                  <a:t>の金属の箱があり、</a:t>
+                </a:r>
+                <a:endParaRPr lang="en-US" altLang="ja-JP" sz="2400" dirty="0"/>
+              </a:p>
+              <a:p>
+                <a:r>
+                  <a:rPr lang="ja-JP" altLang="en-US" sz="2400" dirty="0"/>
+                  <a:t>この箱にロープをつけて</a:t>
+                </a:r>
+                <a:r>
+                  <a:rPr lang="en-US" altLang="ja-JP" sz="2400" dirty="0"/>
+                  <a:t>100N</a:t>
+                </a:r>
+                <a:r>
+                  <a:rPr lang="ja-JP" altLang="en-US" sz="2400" dirty="0"/>
+                  <a:t>の力で引っ張ります。</a:t>
+                </a:r>
+                <a:endParaRPr lang="en-US" altLang="ja-JP" sz="2400" dirty="0"/>
+              </a:p>
+              <a:p>
+                <a:r>
+                  <a:rPr lang="ja-JP" altLang="en-US" sz="2400" dirty="0"/>
+                  <a:t>ロープの角度が</a:t>
+                </a:r>
+                <a14:m>
+                  <m:oMath xmlns:m="http://schemas.openxmlformats.org/officeDocument/2006/math">
+                    <m:r>
+                      <a:rPr lang="en-US" altLang="ja-JP" sz="2400" i="1" dirty="0" smtClean="0">
+                        <a:latin typeface="Cambria Math" panose="02040503050406030204" pitchFamily="18" charset="0"/>
+                      </a:rPr>
+                      <m:t>60</m:t>
+                    </m:r>
+                    <m:r>
+                      <a:rPr lang="en-US" altLang="ja-JP" sz="2400" i="1" dirty="0">
+                        <a:latin typeface="Cambria Math" panose="02040503050406030204" pitchFamily="18" charset="0"/>
+                      </a:rPr>
+                      <m:t>°</m:t>
+                    </m:r>
+                  </m:oMath>
+                </a14:m>
+                <a:r>
+                  <a:rPr lang="ja-JP" altLang="en-US" sz="2400" dirty="0"/>
+                  <a:t>のとき、箱に働く合力を求めなさい。</a:t>
+                </a:r>
+                <a:endParaRPr lang="en-US" altLang="ja-JP" sz="2400" dirty="0"/>
+              </a:p>
+            </p:txBody>
+          </p:sp>
+        </mc:Choice>
+        <mc:Fallback xmlns="">
+          <p:sp>
+            <p:nvSpPr>
+              <p:cNvPr id="6" name="テキスト ボックス 5">
+                <a:extLst>
+                  <a:ext uri="{FF2B5EF4-FFF2-40B4-BE49-F238E27FC236}">
+                    <a16:creationId xmlns:a16="http://schemas.microsoft.com/office/drawing/2014/main" id="{55830AD6-028B-4C4E-80BF-B70DFC1C3A46}"/>
+                  </a:ext>
+                </a:extLst>
+              </p:cNvPr>
+              <p:cNvSpPr txBox="1">
+                <a:spLocks noRot="1" noChangeAspect="1" noMove="1" noResize="1" noEditPoints="1" noAdjustHandles="1" noChangeArrowheads="1" noChangeShapeType="1" noTextEdit="1"/>
+              </p:cNvSpPr>
+              <p:nvPr/>
+            </p:nvSpPr>
+            <p:spPr>
+              <a:xfrm>
+                <a:off x="567542" y="1216429"/>
+                <a:ext cx="8026556" cy="1200329"/>
+              </a:xfrm>
+              <a:prstGeom prst="rect">
+                <a:avLst/>
+              </a:prstGeom>
+              <a:blipFill>
+                <a:blip r:embed="rId2"/>
+                <a:stretch>
+                  <a:fillRect l="-1139" t="-4082" r="-228" b="-11224"/>
+                </a:stretch>
+              </a:blipFill>
+            </p:spPr>
+            <p:txBody>
+              <a:bodyPr/>
+              <a:lstStyle/>
+              <a:p>
+                <a:r>
+                  <a:rPr lang="ja-JP" altLang="en-US">
+                    <a:noFill/>
+                  </a:rPr>
+                  <a:t> </a:t>
+                </a:r>
+              </a:p>
+            </p:txBody>
+          </p:sp>
+        </mc:Fallback>
+      </mc:AlternateContent>
+      <p:sp>
+        <p:nvSpPr>
+          <p:cNvPr id="3" name="正方形/長方形 2">
+            <a:extLst>
+              <a:ext uri="{FF2B5EF4-FFF2-40B4-BE49-F238E27FC236}">
+                <a16:creationId xmlns:a16="http://schemas.microsoft.com/office/drawing/2014/main" id="{5D248159-D1DA-49E7-984D-40C755EC6B3D}"/>
+              </a:ext>
+            </a:extLst>
+          </p:cNvPr>
+          <p:cNvSpPr/>
+          <p:nvPr/>
+        </p:nvSpPr>
+        <p:spPr>
+          <a:xfrm>
+            <a:off x="2073612" y="4356848"/>
+            <a:ext cx="1174376" cy="1129553"/>
+          </a:xfrm>
+          <a:prstGeom prst="rect">
+            <a:avLst/>
+          </a:prstGeom>
+        </p:spPr>
+        <p:style>
+          <a:lnRef idx="2">
+            <a:schemeClr val="accent3">
+              <a:shade val="50000"/>
+            </a:schemeClr>
+          </a:lnRef>
+          <a:fillRef idx="1">
+            <a:schemeClr val="accent3"/>
+          </a:fillRef>
+          <a:effectRef idx="0">
+            <a:schemeClr val="accent3"/>
+          </a:effectRef>
+          <a:fontRef idx="minor">
+            <a:schemeClr val="lt1"/>
+          </a:fontRef>
+        </p:style>
+        <p:txBody>
+          <a:bodyPr rtlCol="0" anchor="ctr"/>
+          <a:lstStyle/>
+          <a:p>
+            <a:pPr algn="ctr"/>
+            <a:r>
+              <a:rPr kumimoji="1" lang="en-US" altLang="ja-JP" b="1" dirty="0"/>
+              <a:t>20kg</a:t>
+            </a:r>
+            <a:endParaRPr kumimoji="1" lang="ja-JP" altLang="en-US" b="1" dirty="0"/>
+          </a:p>
+        </p:txBody>
+      </p:sp>
+      <mc:AlternateContent xmlns:mc="http://schemas.openxmlformats.org/markup-compatibility/2006">
+        <mc:Choice xmlns:a14="http://schemas.microsoft.com/office/drawing/2010/main" Requires="a14">
+          <p:sp>
+            <p:nvSpPr>
+              <p:cNvPr id="16" name="テキスト ボックス 15">
+                <a:extLst>
+                  <a:ext uri="{FF2B5EF4-FFF2-40B4-BE49-F238E27FC236}">
+                    <a16:creationId xmlns:a16="http://schemas.microsoft.com/office/drawing/2014/main" id="{87B09C6C-6D01-4872-BA3C-08158207807E}"/>
+                  </a:ext>
+                </a:extLst>
+              </p:cNvPr>
+              <p:cNvSpPr txBox="1"/>
+              <p:nvPr/>
+            </p:nvSpPr>
+            <p:spPr>
+              <a:xfrm>
+                <a:off x="5974688" y="2846764"/>
+                <a:ext cx="5832815" cy="1077218"/>
+              </a:xfrm>
+              <a:prstGeom prst="rect">
+                <a:avLst/>
+              </a:prstGeom>
+              <a:noFill/>
+            </p:spPr>
+            <p:txBody>
+              <a:bodyPr wrap="none" rtlCol="0">
+                <a:spAutoFit/>
+              </a:bodyPr>
+              <a:lstStyle/>
+              <a:p>
+                <a:r>
+                  <a:rPr lang="ja-JP" altLang="en-US" sz="2400" b="1" dirty="0">
+                    <a:solidFill>
+                      <a:srgbClr val="FF0000"/>
+                    </a:solidFill>
+                  </a:rPr>
+                  <a:t>■解答</a:t>
+                </a:r>
+              </a:p>
+              <a:p>
+                <a:r>
+                  <a:rPr lang="ja-JP" altLang="en-US" sz="2400" dirty="0"/>
+                  <a:t>全ての力の合計が合力となる</a:t>
+                </a:r>
+                <a:endParaRPr lang="en-US" altLang="ja-JP" sz="2400" dirty="0"/>
+              </a:p>
+              <a:p>
+                <a14:m>
+                  <m:oMath xmlns:m="http://schemas.openxmlformats.org/officeDocument/2006/math">
+                    <m:d>
+                      <m:dPr>
+                        <m:begChr m:val="["/>
+                        <m:endChr m:val="]"/>
+                        <m:ctrlPr>
+                          <a:rPr lang="en-US" altLang="ja-JP" sz="1600" b="0" i="1" smtClean="0">
+                            <a:latin typeface="Cambria Math" panose="02040503050406030204" pitchFamily="18" charset="0"/>
+                          </a:rPr>
+                        </m:ctrlPr>
+                      </m:dPr>
+                      <m:e>
+                        <m:r>
+                          <a:rPr lang="en-US" altLang="ja-JP" sz="1600" b="0" i="1" smtClean="0">
+                            <a:latin typeface="Cambria Math" panose="02040503050406030204" pitchFamily="18" charset="0"/>
+                          </a:rPr>
+                          <m:t>0, −196</m:t>
+                        </m:r>
+                        <m:r>
+                          <a:rPr lang="en-US" altLang="ja-JP" sz="1600" b="0" i="1" smtClean="0">
+                            <a:latin typeface="Cambria Math" panose="02040503050406030204" pitchFamily="18" charset="0"/>
+                          </a:rPr>
+                          <m:t>𝑁</m:t>
+                        </m:r>
+                      </m:e>
+                    </m:d>
+                    <m:r>
+                      <a:rPr lang="en-US" altLang="ja-JP" sz="1600" b="0" i="1" smtClean="0">
+                        <a:latin typeface="Cambria Math" panose="02040503050406030204" pitchFamily="18" charset="0"/>
+                      </a:rPr>
+                      <m:t>+</m:t>
+                    </m:r>
+                    <m:d>
+                      <m:dPr>
+                        <m:begChr m:val="["/>
+                        <m:endChr m:val="]"/>
+                        <m:ctrlPr>
+                          <a:rPr lang="en-US" altLang="ja-JP" sz="1600" b="0" i="1" smtClean="0">
+                            <a:latin typeface="Cambria Math" panose="02040503050406030204" pitchFamily="18" charset="0"/>
+                          </a:rPr>
+                        </m:ctrlPr>
+                      </m:dPr>
+                      <m:e>
+                        <m:r>
+                          <a:rPr lang="en-US" altLang="ja-JP" sz="1600" b="0" i="1" smtClean="0">
+                            <a:latin typeface="Cambria Math" panose="02040503050406030204" pitchFamily="18" charset="0"/>
+                          </a:rPr>
+                          <m:t>50</m:t>
+                        </m:r>
+                        <m:r>
+                          <a:rPr lang="en-US" altLang="ja-JP" sz="1600" b="0" i="1" smtClean="0">
+                            <a:latin typeface="Cambria Math" panose="02040503050406030204" pitchFamily="18" charset="0"/>
+                          </a:rPr>
+                          <m:t>𝑁</m:t>
+                        </m:r>
+                        <m:r>
+                          <a:rPr lang="en-US" altLang="ja-JP" sz="1600" b="0" i="1" smtClean="0">
+                            <a:latin typeface="Cambria Math" panose="02040503050406030204" pitchFamily="18" charset="0"/>
+                          </a:rPr>
+                          <m:t>, 86</m:t>
+                        </m:r>
+                        <m:r>
+                          <a:rPr lang="en-US" altLang="ja-JP" sz="1600" b="0" i="1" smtClean="0">
+                            <a:latin typeface="Cambria Math" panose="02040503050406030204" pitchFamily="18" charset="0"/>
+                          </a:rPr>
+                          <m:t>𝑁</m:t>
+                        </m:r>
+                      </m:e>
+                    </m:d>
+                    <m:r>
+                      <a:rPr lang="en-US" altLang="ja-JP" sz="1600" b="0" i="1" smtClean="0">
+                        <a:latin typeface="Cambria Math" panose="02040503050406030204" pitchFamily="18" charset="0"/>
+                      </a:rPr>
+                      <m:t>+</m:t>
+                    </m:r>
+                    <m:d>
+                      <m:dPr>
+                        <m:begChr m:val="["/>
+                        <m:endChr m:val="]"/>
+                        <m:ctrlPr>
+                          <a:rPr lang="en-US" altLang="ja-JP" sz="1600" b="0" i="1" smtClean="0">
+                            <a:latin typeface="Cambria Math" panose="02040503050406030204" pitchFamily="18" charset="0"/>
+                          </a:rPr>
+                        </m:ctrlPr>
+                      </m:dPr>
+                      <m:e>
+                        <m:r>
+                          <a:rPr lang="en-US" altLang="ja-JP" sz="1600" b="0" i="1" smtClean="0">
+                            <a:latin typeface="Cambria Math" panose="02040503050406030204" pitchFamily="18" charset="0"/>
+                          </a:rPr>
+                          <m:t>0, 110</m:t>
+                        </m:r>
+                        <m:r>
+                          <a:rPr lang="en-US" altLang="ja-JP" sz="1600" b="0" i="1" smtClean="0">
+                            <a:latin typeface="Cambria Math" panose="02040503050406030204" pitchFamily="18" charset="0"/>
+                          </a:rPr>
+                          <m:t>𝑁</m:t>
+                        </m:r>
+                      </m:e>
+                    </m:d>
+                    <m:r>
+                      <a:rPr lang="en-US" altLang="ja-JP" sz="1600" b="0" i="1" smtClean="0">
+                        <a:latin typeface="Cambria Math" panose="02040503050406030204" pitchFamily="18" charset="0"/>
+                      </a:rPr>
+                      <m:t>+</m:t>
+                    </m:r>
+                    <m:d>
+                      <m:dPr>
+                        <m:begChr m:val="["/>
+                        <m:endChr m:val="]"/>
+                        <m:ctrlPr>
+                          <a:rPr lang="en-US" altLang="ja-JP" sz="1600" b="0" i="1" smtClean="0">
+                            <a:latin typeface="Cambria Math" panose="02040503050406030204" pitchFamily="18" charset="0"/>
+                          </a:rPr>
+                        </m:ctrlPr>
+                      </m:dPr>
+                      <m:e>
+                        <m:r>
+                          <a:rPr lang="en-US" altLang="ja-JP" sz="1600" b="0" i="1" smtClean="0">
+                            <a:latin typeface="Cambria Math" panose="02040503050406030204" pitchFamily="18" charset="0"/>
+                          </a:rPr>
+                          <m:t>−2.2</m:t>
+                        </m:r>
+                        <m:r>
+                          <a:rPr lang="en-US" altLang="ja-JP" sz="1600" b="0" i="1" smtClean="0">
+                            <a:latin typeface="Cambria Math" panose="02040503050406030204" pitchFamily="18" charset="0"/>
+                          </a:rPr>
+                          <m:t>𝑁</m:t>
+                        </m:r>
+                        <m:r>
+                          <a:rPr lang="en-US" altLang="ja-JP" sz="1600" b="0" i="1" smtClean="0">
+                            <a:latin typeface="Cambria Math" panose="02040503050406030204" pitchFamily="18" charset="0"/>
+                          </a:rPr>
+                          <m:t>, 0</m:t>
+                        </m:r>
+                      </m:e>
+                    </m:d>
+                    <m:r>
+                      <a:rPr lang="en-US" altLang="ja-JP" sz="1600" b="0" i="1" smtClean="0">
+                        <a:solidFill>
+                          <a:srgbClr val="FF0000"/>
+                        </a:solidFill>
+                        <a:latin typeface="Cambria Math" panose="02040503050406030204" pitchFamily="18" charset="0"/>
+                      </a:rPr>
+                      <m:t>=[47.8</m:t>
+                    </m:r>
+                    <m:r>
+                      <a:rPr lang="en-US" altLang="ja-JP" sz="1600" b="0" i="1" smtClean="0">
+                        <a:solidFill>
+                          <a:srgbClr val="FF0000"/>
+                        </a:solidFill>
+                        <a:latin typeface="Cambria Math" panose="02040503050406030204" pitchFamily="18" charset="0"/>
+                      </a:rPr>
+                      <m:t>𝑁</m:t>
+                    </m:r>
+                    <m:r>
+                      <a:rPr lang="en-US" altLang="ja-JP" sz="1600" b="0" i="1" smtClean="0">
+                        <a:solidFill>
+                          <a:srgbClr val="FF0000"/>
+                        </a:solidFill>
+                        <a:latin typeface="Cambria Math" panose="02040503050406030204" pitchFamily="18" charset="0"/>
+                      </a:rPr>
+                      <m:t>, 0]</m:t>
+                    </m:r>
+                  </m:oMath>
+                </a14:m>
+                <a:r>
+                  <a:rPr lang="en-US" altLang="ja-JP" sz="1600" dirty="0">
+                    <a:solidFill>
+                      <a:srgbClr val="FF0000"/>
+                    </a:solidFill>
+                  </a:rPr>
+                  <a:t> </a:t>
+                </a:r>
+                <a:endParaRPr lang="en-US" altLang="ja-JP" sz="1600" dirty="0"/>
+              </a:p>
+            </p:txBody>
+          </p:sp>
+        </mc:Choice>
+        <mc:Fallback>
+          <p:sp>
+            <p:nvSpPr>
+              <p:cNvPr id="16" name="テキスト ボックス 15">
+                <a:extLst>
+                  <a:ext uri="{FF2B5EF4-FFF2-40B4-BE49-F238E27FC236}">
+                    <a16:creationId xmlns:a16="http://schemas.microsoft.com/office/drawing/2014/main" id="{87B09C6C-6D01-4872-BA3C-08158207807E}"/>
+                  </a:ext>
+                </a:extLst>
+              </p:cNvPr>
+              <p:cNvSpPr txBox="1">
+                <a:spLocks noRot="1" noChangeAspect="1" noMove="1" noResize="1" noEditPoints="1" noAdjustHandles="1" noChangeArrowheads="1" noChangeShapeType="1" noTextEdit="1"/>
+              </p:cNvSpPr>
+              <p:nvPr/>
+            </p:nvSpPr>
+            <p:spPr>
+              <a:xfrm>
+                <a:off x="5974688" y="2846764"/>
+                <a:ext cx="5832815" cy="1077218"/>
+              </a:xfrm>
+              <a:prstGeom prst="rect">
+                <a:avLst/>
+              </a:prstGeom>
+              <a:blipFill>
+                <a:blip r:embed="rId3"/>
+                <a:stretch>
+                  <a:fillRect l="-1567" t="-4520" b="-2260"/>
+                </a:stretch>
+              </a:blipFill>
+            </p:spPr>
+            <p:txBody>
+              <a:bodyPr/>
+              <a:lstStyle/>
+              <a:p>
+                <a:r>
+                  <a:rPr lang="ja-JP" altLang="en-US">
+                    <a:noFill/>
+                  </a:rPr>
+                  <a:t> </a:t>
+                </a:r>
+              </a:p>
+            </p:txBody>
+          </p:sp>
+        </mc:Fallback>
+      </mc:AlternateContent>
+      <p:cxnSp>
+        <p:nvCxnSpPr>
+          <p:cNvPr id="11" name="直線矢印コネクタ 10">
+            <a:extLst>
+              <a:ext uri="{FF2B5EF4-FFF2-40B4-BE49-F238E27FC236}">
+                <a16:creationId xmlns:a16="http://schemas.microsoft.com/office/drawing/2014/main" id="{E2AE73B5-EBF3-47A8-BFAA-6C3D70578B76}"/>
+              </a:ext>
+            </a:extLst>
+          </p:cNvPr>
+          <p:cNvCxnSpPr>
+            <a:cxnSpLocks/>
+          </p:cNvCxnSpPr>
+          <p:nvPr/>
+        </p:nvCxnSpPr>
+        <p:spPr>
+          <a:xfrm>
+            <a:off x="2605331" y="5486401"/>
+            <a:ext cx="0" cy="1118210"/>
+          </a:xfrm>
+          <a:prstGeom prst="straightConnector1">
+            <a:avLst/>
+          </a:prstGeom>
+          <a:ln w="38100">
+            <a:solidFill>
+              <a:srgbClr val="7030A0"/>
+            </a:solidFill>
+            <a:tailEnd type="triangle"/>
+          </a:ln>
+        </p:spPr>
+        <p:style>
+          <a:lnRef idx="1">
+            <a:schemeClr val="accent1"/>
+          </a:lnRef>
+          <a:fillRef idx="0">
+            <a:schemeClr val="accent1"/>
+          </a:fillRef>
+          <a:effectRef idx="0">
+            <a:schemeClr val="accent1"/>
+          </a:effectRef>
+          <a:fontRef idx="minor">
+            <a:schemeClr val="tx1"/>
+          </a:fontRef>
+        </p:style>
+      </p:cxnSp>
+      <mc:AlternateContent xmlns:mc="http://schemas.openxmlformats.org/markup-compatibility/2006">
+        <mc:Choice xmlns:a14="http://schemas.microsoft.com/office/drawing/2010/main" Requires="a14">
+          <p:sp>
+            <p:nvSpPr>
+              <p:cNvPr id="12" name="テキスト ボックス 11">
+                <a:extLst>
+                  <a:ext uri="{FF2B5EF4-FFF2-40B4-BE49-F238E27FC236}">
+                    <a16:creationId xmlns:a16="http://schemas.microsoft.com/office/drawing/2014/main" id="{5F9C7478-8BE7-40E1-AC23-D3482AE8FC24}"/>
+                  </a:ext>
+                </a:extLst>
+              </p:cNvPr>
+              <p:cNvSpPr txBox="1"/>
+              <p:nvPr/>
+            </p:nvSpPr>
+            <p:spPr>
+              <a:xfrm>
+                <a:off x="2660800" y="5860840"/>
+                <a:ext cx="1174376" cy="369332"/>
+              </a:xfrm>
+              <a:prstGeom prst="rect">
+                <a:avLst/>
+              </a:prstGeom>
+              <a:noFill/>
+            </p:spPr>
+            <p:txBody>
+              <a:bodyPr wrap="square">
+                <a:spAutoFit/>
+              </a:bodyPr>
+              <a:lstStyle/>
+              <a:p>
+                <a14:m>
+                  <m:oMath xmlns:m="http://schemas.openxmlformats.org/officeDocument/2006/math">
+                    <m:r>
+                      <a:rPr lang="en-US" altLang="ja-JP" sz="1800" i="1" smtClean="0">
+                        <a:solidFill>
+                          <a:srgbClr val="7030A0"/>
+                        </a:solidFill>
+                        <a:latin typeface="Cambria Math" panose="02040503050406030204" pitchFamily="18" charset="0"/>
+                      </a:rPr>
+                      <m:t>[0, </m:t>
+                    </m:r>
+                    <m:r>
+                      <a:rPr lang="en-US" altLang="ja-JP" sz="1800" b="0" i="1" smtClean="0">
+                        <a:solidFill>
+                          <a:srgbClr val="7030A0"/>
+                        </a:solidFill>
+                        <a:latin typeface="Cambria Math" panose="02040503050406030204" pitchFamily="18" charset="0"/>
+                      </a:rPr>
+                      <m:t>−</m:t>
+                    </m:r>
+                    <m:r>
+                      <a:rPr lang="en-US" altLang="ja-JP" sz="1800" i="1" smtClean="0">
+                        <a:solidFill>
+                          <a:srgbClr val="7030A0"/>
+                        </a:solidFill>
+                        <a:latin typeface="Cambria Math" panose="02040503050406030204" pitchFamily="18" charset="0"/>
+                      </a:rPr>
+                      <m:t>196</m:t>
+                    </m:r>
+                    <m:r>
+                      <a:rPr lang="en-US" altLang="ja-JP" sz="1800" i="1" smtClean="0">
+                        <a:solidFill>
+                          <a:srgbClr val="7030A0"/>
+                        </a:solidFill>
+                        <a:latin typeface="Cambria Math" panose="02040503050406030204" pitchFamily="18" charset="0"/>
+                      </a:rPr>
+                      <m:t>𝑁</m:t>
+                    </m:r>
+                    <m:r>
+                      <a:rPr lang="en-US" altLang="ja-JP" sz="1800" i="1" smtClean="0">
+                        <a:solidFill>
+                          <a:srgbClr val="7030A0"/>
+                        </a:solidFill>
+                        <a:latin typeface="Cambria Math" panose="02040503050406030204" pitchFamily="18" charset="0"/>
+                      </a:rPr>
+                      <m:t>]</m:t>
+                    </m:r>
+                  </m:oMath>
+                </a14:m>
+                <a:r>
+                  <a:rPr lang="en-US" altLang="ja-JP" sz="1800" dirty="0">
+                    <a:solidFill>
+                      <a:srgbClr val="7030A0"/>
+                    </a:solidFill>
+                  </a:rPr>
+                  <a:t> </a:t>
+                </a:r>
+              </a:p>
+            </p:txBody>
+          </p:sp>
+        </mc:Choice>
+        <mc:Fallback>
+          <p:sp>
+            <p:nvSpPr>
+              <p:cNvPr id="12" name="テキスト ボックス 11">
+                <a:extLst>
+                  <a:ext uri="{FF2B5EF4-FFF2-40B4-BE49-F238E27FC236}">
+                    <a16:creationId xmlns:a16="http://schemas.microsoft.com/office/drawing/2014/main" id="{5F9C7478-8BE7-40E1-AC23-D3482AE8FC24}"/>
+                  </a:ext>
+                </a:extLst>
+              </p:cNvPr>
+              <p:cNvSpPr txBox="1">
+                <a:spLocks noRot="1" noChangeAspect="1" noMove="1" noResize="1" noEditPoints="1" noAdjustHandles="1" noChangeArrowheads="1" noChangeShapeType="1" noTextEdit="1"/>
+              </p:cNvSpPr>
+              <p:nvPr/>
+            </p:nvSpPr>
+            <p:spPr>
+              <a:xfrm>
+                <a:off x="2660800" y="5860840"/>
+                <a:ext cx="1174376" cy="369332"/>
+              </a:xfrm>
+              <a:prstGeom prst="rect">
+                <a:avLst/>
+              </a:prstGeom>
+              <a:blipFill>
+                <a:blip r:embed="rId4"/>
+                <a:stretch>
+                  <a:fillRect l="-1554" r="-10881" b="-14754"/>
+                </a:stretch>
+              </a:blipFill>
+            </p:spPr>
+            <p:txBody>
+              <a:bodyPr/>
+              <a:lstStyle/>
+              <a:p>
+                <a:r>
+                  <a:rPr lang="ja-JP" altLang="en-US">
+                    <a:noFill/>
+                  </a:rPr>
+                  <a:t> </a:t>
+                </a:r>
+              </a:p>
+            </p:txBody>
+          </p:sp>
+        </mc:Fallback>
+      </mc:AlternateContent>
+      <p:cxnSp>
+        <p:nvCxnSpPr>
+          <p:cNvPr id="5" name="直線矢印コネクタ 4">
+            <a:extLst>
+              <a:ext uri="{FF2B5EF4-FFF2-40B4-BE49-F238E27FC236}">
+                <a16:creationId xmlns:a16="http://schemas.microsoft.com/office/drawing/2014/main" id="{CA53EC50-58D3-40C5-8C2F-BABEE5FA8DD1}"/>
+              </a:ext>
+            </a:extLst>
+          </p:cNvPr>
+          <p:cNvCxnSpPr/>
+          <p:nvPr/>
+        </p:nvCxnSpPr>
+        <p:spPr>
+          <a:xfrm flipV="1">
+            <a:off x="3247988" y="3466938"/>
+            <a:ext cx="880259" cy="1030942"/>
+          </a:xfrm>
+          <a:prstGeom prst="straightConnector1">
+            <a:avLst/>
+          </a:prstGeom>
+          <a:ln w="38100">
+            <a:solidFill>
+              <a:srgbClr val="FFC000"/>
+            </a:solidFill>
+            <a:tailEnd type="triangle"/>
+          </a:ln>
+        </p:spPr>
+        <p:style>
+          <a:lnRef idx="1">
+            <a:schemeClr val="accent1"/>
+          </a:lnRef>
+          <a:fillRef idx="0">
+            <a:schemeClr val="accent1"/>
+          </a:fillRef>
+          <a:effectRef idx="0">
+            <a:schemeClr val="accent1"/>
+          </a:effectRef>
+          <a:fontRef idx="minor">
+            <a:schemeClr val="tx1"/>
+          </a:fontRef>
+        </p:style>
+      </p:cxnSp>
+      <mc:AlternateContent xmlns:mc="http://schemas.openxmlformats.org/markup-compatibility/2006">
+        <mc:Choice xmlns:a14="http://schemas.microsoft.com/office/drawing/2010/main" Requires="a14">
+          <p:sp>
+            <p:nvSpPr>
+              <p:cNvPr id="13" name="テキスト ボックス 12">
+                <a:extLst>
+                  <a:ext uri="{FF2B5EF4-FFF2-40B4-BE49-F238E27FC236}">
+                    <a16:creationId xmlns:a16="http://schemas.microsoft.com/office/drawing/2014/main" id="{E26530F0-EA8A-4C50-8CC5-5C124E0DF2CF}"/>
+                  </a:ext>
+                </a:extLst>
+              </p:cNvPr>
+              <p:cNvSpPr txBox="1"/>
+              <p:nvPr/>
+            </p:nvSpPr>
+            <p:spPr>
+              <a:xfrm>
+                <a:off x="1242010" y="4071911"/>
+                <a:ext cx="6096000" cy="369332"/>
+              </a:xfrm>
+              <a:prstGeom prst="rect">
+                <a:avLst/>
+              </a:prstGeom>
+              <a:noFill/>
+            </p:spPr>
+            <p:txBody>
+              <a:bodyPr wrap="square">
+                <a:spAutoFit/>
+              </a:bodyPr>
+              <a:lstStyle/>
+              <a:p>
+                <a:pPr/>
+                <a14:m>
+                  <m:oMathPara xmlns:m="http://schemas.openxmlformats.org/officeDocument/2006/math">
+                    <m:oMathParaPr>
+                      <m:jc m:val="centerGroup"/>
+                    </m:oMathParaPr>
+                    <m:oMath xmlns:m="http://schemas.openxmlformats.org/officeDocument/2006/math">
+                      <m:r>
+                        <a:rPr lang="en-US" altLang="ja-JP" sz="1800" i="1" smtClean="0">
+                          <a:solidFill>
+                            <a:srgbClr val="FFC000"/>
+                          </a:solidFill>
+                          <a:latin typeface="Cambria Math" panose="02040503050406030204" pitchFamily="18" charset="0"/>
+                        </a:rPr>
+                        <m:t>[</m:t>
+                      </m:r>
+                      <m:r>
+                        <a:rPr lang="en-US" altLang="ja-JP" sz="1800" b="0" i="1" smtClean="0">
+                          <a:solidFill>
+                            <a:srgbClr val="FFC000"/>
+                          </a:solidFill>
+                          <a:latin typeface="Cambria Math" panose="02040503050406030204" pitchFamily="18" charset="0"/>
+                        </a:rPr>
+                        <m:t>50</m:t>
+                      </m:r>
+                      <m:r>
+                        <a:rPr lang="en-US" altLang="ja-JP" sz="1800" b="0" i="1" smtClean="0">
+                          <a:solidFill>
+                            <a:srgbClr val="FFC000"/>
+                          </a:solidFill>
+                          <a:latin typeface="Cambria Math" panose="02040503050406030204" pitchFamily="18" charset="0"/>
+                        </a:rPr>
+                        <m:t>𝑁</m:t>
+                      </m:r>
+                      <m:r>
+                        <a:rPr lang="en-US" altLang="ja-JP" sz="1800" b="0" i="1" smtClean="0">
+                          <a:solidFill>
+                            <a:srgbClr val="FFC000"/>
+                          </a:solidFill>
+                          <a:latin typeface="Cambria Math" panose="02040503050406030204" pitchFamily="18" charset="0"/>
+                        </a:rPr>
+                        <m:t>,86</m:t>
+                      </m:r>
+                      <m:r>
+                        <a:rPr lang="en-US" altLang="ja-JP" sz="1800" b="0" i="1" smtClean="0">
+                          <a:solidFill>
+                            <a:srgbClr val="FFC000"/>
+                          </a:solidFill>
+                          <a:latin typeface="Cambria Math" panose="02040503050406030204" pitchFamily="18" charset="0"/>
+                        </a:rPr>
+                        <m:t>𝑁</m:t>
+                      </m:r>
+                      <m:r>
+                        <a:rPr lang="en-US" altLang="ja-JP" sz="1800" i="1">
+                          <a:solidFill>
+                            <a:srgbClr val="FFC000"/>
+                          </a:solidFill>
+                          <a:latin typeface="Cambria Math" panose="02040503050406030204" pitchFamily="18" charset="0"/>
+                        </a:rPr>
+                        <m:t>]</m:t>
+                      </m:r>
+                    </m:oMath>
+                  </m:oMathPara>
+                </a14:m>
+                <a:endParaRPr lang="ja-JP" altLang="en-US" dirty="0">
+                  <a:solidFill>
+                    <a:srgbClr val="FFC000"/>
+                  </a:solidFill>
+                </a:endParaRPr>
+              </a:p>
+            </p:txBody>
+          </p:sp>
+        </mc:Choice>
+        <mc:Fallback>
+          <p:sp>
+            <p:nvSpPr>
+              <p:cNvPr id="13" name="テキスト ボックス 12">
+                <a:extLst>
+                  <a:ext uri="{FF2B5EF4-FFF2-40B4-BE49-F238E27FC236}">
+                    <a16:creationId xmlns:a16="http://schemas.microsoft.com/office/drawing/2014/main" id="{E26530F0-EA8A-4C50-8CC5-5C124E0DF2CF}"/>
+                  </a:ext>
+                </a:extLst>
+              </p:cNvPr>
+              <p:cNvSpPr txBox="1">
+                <a:spLocks noRot="1" noChangeAspect="1" noMove="1" noResize="1" noEditPoints="1" noAdjustHandles="1" noChangeArrowheads="1" noChangeShapeType="1" noTextEdit="1"/>
+              </p:cNvSpPr>
+              <p:nvPr/>
+            </p:nvSpPr>
+            <p:spPr>
+              <a:xfrm>
+                <a:off x="1242010" y="4071911"/>
+                <a:ext cx="6096000" cy="369332"/>
+              </a:xfrm>
+              <a:prstGeom prst="rect">
+                <a:avLst/>
+              </a:prstGeom>
+              <a:blipFill>
+                <a:blip r:embed="rId5"/>
+                <a:stretch>
+                  <a:fillRect b="-14754"/>
+                </a:stretch>
+              </a:blipFill>
+            </p:spPr>
+            <p:txBody>
+              <a:bodyPr/>
+              <a:lstStyle/>
+              <a:p>
+                <a:r>
+                  <a:rPr lang="ja-JP" altLang="en-US">
+                    <a:noFill/>
+                  </a:rPr>
+                  <a:t> </a:t>
+                </a:r>
+              </a:p>
+            </p:txBody>
+          </p:sp>
+        </mc:Fallback>
+      </mc:AlternateContent>
+      <p:cxnSp>
+        <p:nvCxnSpPr>
+          <p:cNvPr id="10" name="直線矢印コネクタ 9">
+            <a:extLst>
+              <a:ext uri="{FF2B5EF4-FFF2-40B4-BE49-F238E27FC236}">
+                <a16:creationId xmlns:a16="http://schemas.microsoft.com/office/drawing/2014/main" id="{8B65E137-FF19-45DC-B8AB-48CF040F4DA9}"/>
+              </a:ext>
+            </a:extLst>
+          </p:cNvPr>
+          <p:cNvCxnSpPr>
+            <a:cxnSpLocks/>
+          </p:cNvCxnSpPr>
+          <p:nvPr/>
+        </p:nvCxnSpPr>
+        <p:spPr>
+          <a:xfrm flipV="1">
+            <a:off x="2605331" y="3466938"/>
+            <a:ext cx="0" cy="889911"/>
+          </a:xfrm>
+          <a:prstGeom prst="straightConnector1">
+            <a:avLst/>
+          </a:prstGeom>
+          <a:ln w="38100">
+            <a:solidFill>
+              <a:srgbClr val="00B050"/>
+            </a:solidFill>
+            <a:tailEnd type="triangle"/>
+          </a:ln>
+        </p:spPr>
+        <p:style>
+          <a:lnRef idx="1">
+            <a:schemeClr val="accent1"/>
+          </a:lnRef>
+          <a:fillRef idx="0">
+            <a:schemeClr val="accent1"/>
+          </a:fillRef>
+          <a:effectRef idx="0">
+            <a:schemeClr val="accent1"/>
+          </a:effectRef>
+          <a:fontRef idx="minor">
+            <a:schemeClr val="tx1"/>
+          </a:fontRef>
+        </p:style>
+      </p:cxnSp>
+      <mc:AlternateContent xmlns:mc="http://schemas.openxmlformats.org/markup-compatibility/2006">
+        <mc:Choice xmlns:a14="http://schemas.microsoft.com/office/drawing/2010/main" Requires="a14">
+          <p:sp>
+            <p:nvSpPr>
+              <p:cNvPr id="14" name="テキスト ボックス 13">
+                <a:extLst>
+                  <a:ext uri="{FF2B5EF4-FFF2-40B4-BE49-F238E27FC236}">
+                    <a16:creationId xmlns:a16="http://schemas.microsoft.com/office/drawing/2014/main" id="{A59F2E55-2B4C-4A9E-B022-0FA7810E8D75}"/>
+                  </a:ext>
+                </a:extLst>
+              </p:cNvPr>
+              <p:cNvSpPr txBox="1"/>
+              <p:nvPr/>
+            </p:nvSpPr>
+            <p:spPr>
+              <a:xfrm>
+                <a:off x="1486424" y="3772688"/>
+                <a:ext cx="1174376" cy="369332"/>
+              </a:xfrm>
+              <a:prstGeom prst="rect">
+                <a:avLst/>
+              </a:prstGeom>
+              <a:noFill/>
+            </p:spPr>
+            <p:txBody>
+              <a:bodyPr wrap="square">
+                <a:spAutoFit/>
+              </a:bodyPr>
+              <a:lstStyle/>
+              <a:p>
+                <a14:m>
+                  <m:oMath xmlns:m="http://schemas.openxmlformats.org/officeDocument/2006/math">
+                    <m:r>
+                      <a:rPr lang="en-US" altLang="ja-JP" sz="1800" i="1" smtClean="0">
+                        <a:solidFill>
+                          <a:srgbClr val="00B050"/>
+                        </a:solidFill>
+                        <a:latin typeface="Cambria Math" panose="02040503050406030204" pitchFamily="18" charset="0"/>
+                      </a:rPr>
+                      <m:t>[0, </m:t>
+                    </m:r>
+                    <m:r>
+                      <a:rPr lang="en-US" altLang="ja-JP" sz="1800" b="0" i="1" smtClean="0">
+                        <a:solidFill>
+                          <a:srgbClr val="00B050"/>
+                        </a:solidFill>
+                        <a:latin typeface="Cambria Math" panose="02040503050406030204" pitchFamily="18" charset="0"/>
+                      </a:rPr>
+                      <m:t>110</m:t>
+                    </m:r>
+                    <m:r>
+                      <a:rPr lang="en-US" altLang="ja-JP" sz="1800" i="1" smtClean="0">
+                        <a:solidFill>
+                          <a:srgbClr val="00B050"/>
+                        </a:solidFill>
+                        <a:latin typeface="Cambria Math" panose="02040503050406030204" pitchFamily="18" charset="0"/>
+                      </a:rPr>
+                      <m:t>𝑁</m:t>
+                    </m:r>
+                    <m:r>
+                      <a:rPr lang="en-US" altLang="ja-JP" sz="1800" i="1" smtClean="0">
+                        <a:solidFill>
+                          <a:srgbClr val="00B050"/>
+                        </a:solidFill>
+                        <a:latin typeface="Cambria Math" panose="02040503050406030204" pitchFamily="18" charset="0"/>
+                      </a:rPr>
+                      <m:t>]</m:t>
+                    </m:r>
+                  </m:oMath>
+                </a14:m>
+                <a:r>
+                  <a:rPr lang="en-US" altLang="ja-JP" sz="1800" dirty="0">
+                    <a:solidFill>
+                      <a:srgbClr val="00B050"/>
+                    </a:solidFill>
+                  </a:rPr>
+                  <a:t> </a:t>
+                </a:r>
+              </a:p>
+            </p:txBody>
+          </p:sp>
+        </mc:Choice>
+        <mc:Fallback>
+          <p:sp>
+            <p:nvSpPr>
+              <p:cNvPr id="14" name="テキスト ボックス 13">
+                <a:extLst>
+                  <a:ext uri="{FF2B5EF4-FFF2-40B4-BE49-F238E27FC236}">
+                    <a16:creationId xmlns:a16="http://schemas.microsoft.com/office/drawing/2014/main" id="{A59F2E55-2B4C-4A9E-B022-0FA7810E8D75}"/>
+                  </a:ext>
+                </a:extLst>
+              </p:cNvPr>
+              <p:cNvSpPr txBox="1">
+                <a:spLocks noRot="1" noChangeAspect="1" noMove="1" noResize="1" noEditPoints="1" noAdjustHandles="1" noChangeArrowheads="1" noChangeShapeType="1" noTextEdit="1"/>
+              </p:cNvSpPr>
+              <p:nvPr/>
+            </p:nvSpPr>
+            <p:spPr>
+              <a:xfrm>
+                <a:off x="1486424" y="3772688"/>
+                <a:ext cx="1174376" cy="369332"/>
+              </a:xfrm>
+              <a:prstGeom prst="rect">
+                <a:avLst/>
+              </a:prstGeom>
+              <a:blipFill>
+                <a:blip r:embed="rId6"/>
+                <a:stretch>
+                  <a:fillRect l="-2083" b="-16667"/>
+                </a:stretch>
+              </a:blipFill>
+            </p:spPr>
+            <p:txBody>
+              <a:bodyPr/>
+              <a:lstStyle/>
+              <a:p>
+                <a:r>
+                  <a:rPr lang="ja-JP" altLang="en-US">
+                    <a:noFill/>
+                  </a:rPr>
+                  <a:t> </a:t>
+                </a:r>
+              </a:p>
+            </p:txBody>
+          </p:sp>
+        </mc:Fallback>
+      </mc:AlternateContent>
+      <p:cxnSp>
+        <p:nvCxnSpPr>
+          <p:cNvPr id="15" name="直線矢印コネクタ 14">
+            <a:extLst>
+              <a:ext uri="{FF2B5EF4-FFF2-40B4-BE49-F238E27FC236}">
+                <a16:creationId xmlns:a16="http://schemas.microsoft.com/office/drawing/2014/main" id="{E94B9AAC-5287-4FAF-8053-B1E8E393C1A0}"/>
+              </a:ext>
+            </a:extLst>
+          </p:cNvPr>
+          <p:cNvCxnSpPr>
+            <a:cxnSpLocks/>
+          </p:cNvCxnSpPr>
+          <p:nvPr/>
+        </p:nvCxnSpPr>
+        <p:spPr>
+          <a:xfrm flipH="1">
+            <a:off x="1747484" y="4921623"/>
+            <a:ext cx="326128" cy="1"/>
+          </a:xfrm>
+          <a:prstGeom prst="straightConnector1">
+            <a:avLst/>
+          </a:prstGeom>
+          <a:ln w="38100">
+            <a:solidFill>
+              <a:srgbClr val="0070C0"/>
+            </a:solidFill>
+            <a:tailEnd type="triangle"/>
+          </a:ln>
+        </p:spPr>
+        <p:style>
+          <a:lnRef idx="1">
+            <a:schemeClr val="accent1"/>
+          </a:lnRef>
+          <a:fillRef idx="0">
+            <a:schemeClr val="accent1"/>
+          </a:fillRef>
+          <a:effectRef idx="0">
+            <a:schemeClr val="accent1"/>
+          </a:effectRef>
+          <a:fontRef idx="minor">
+            <a:schemeClr val="tx1"/>
+          </a:fontRef>
+        </p:style>
+      </p:cxnSp>
+      <mc:AlternateContent xmlns:mc="http://schemas.openxmlformats.org/markup-compatibility/2006">
+        <mc:Choice xmlns:a14="http://schemas.microsoft.com/office/drawing/2010/main" Requires="a14">
+          <p:sp>
+            <p:nvSpPr>
+              <p:cNvPr id="17" name="テキスト ボックス 16">
+                <a:extLst>
+                  <a:ext uri="{FF2B5EF4-FFF2-40B4-BE49-F238E27FC236}">
+                    <a16:creationId xmlns:a16="http://schemas.microsoft.com/office/drawing/2014/main" id="{0685C82F-52F8-4C79-B1EC-BF6E1AD00595}"/>
+                  </a:ext>
+                </a:extLst>
+              </p:cNvPr>
+              <p:cNvSpPr txBox="1"/>
+              <p:nvPr/>
+            </p:nvSpPr>
+            <p:spPr>
+              <a:xfrm>
+                <a:off x="825145" y="5004722"/>
+                <a:ext cx="1322557" cy="369332"/>
+              </a:xfrm>
+              <a:prstGeom prst="rect">
+                <a:avLst/>
+              </a:prstGeom>
+              <a:noFill/>
+            </p:spPr>
+            <p:txBody>
+              <a:bodyPr wrap="square">
+                <a:spAutoFit/>
+              </a:bodyPr>
+              <a:lstStyle/>
+              <a:p>
+                <a:pPr/>
+                <a14:m>
+                  <m:oMathPara xmlns:m="http://schemas.openxmlformats.org/officeDocument/2006/math">
+                    <m:oMathParaPr>
+                      <m:jc m:val="centerGroup"/>
+                    </m:oMathParaPr>
+                    <m:oMath xmlns:m="http://schemas.openxmlformats.org/officeDocument/2006/math">
+                      <m:r>
+                        <a:rPr lang="en-US" altLang="ja-JP" sz="1800" b="0" i="1" smtClean="0">
+                          <a:solidFill>
+                            <a:srgbClr val="0070C0"/>
+                          </a:solidFill>
+                          <a:latin typeface="Cambria Math" panose="02040503050406030204" pitchFamily="18" charset="0"/>
+                        </a:rPr>
+                        <m:t>[−2.2</m:t>
+                      </m:r>
+                      <m:r>
+                        <a:rPr lang="en-US" altLang="ja-JP" sz="1800" b="0" i="1" smtClean="0">
+                          <a:solidFill>
+                            <a:srgbClr val="0070C0"/>
+                          </a:solidFill>
+                          <a:latin typeface="Cambria Math" panose="02040503050406030204" pitchFamily="18" charset="0"/>
+                        </a:rPr>
+                        <m:t>𝑁</m:t>
+                      </m:r>
+                      <m:r>
+                        <a:rPr lang="en-US" altLang="ja-JP" sz="1800" b="0" i="1" smtClean="0">
+                          <a:solidFill>
+                            <a:srgbClr val="0070C0"/>
+                          </a:solidFill>
+                          <a:latin typeface="Cambria Math" panose="02040503050406030204" pitchFamily="18" charset="0"/>
+                        </a:rPr>
+                        <m:t>, 0]</m:t>
+                      </m:r>
+                    </m:oMath>
+                  </m:oMathPara>
+                </a14:m>
+                <a:endParaRPr lang="ja-JP" altLang="en-US" dirty="0">
+                  <a:solidFill>
+                    <a:srgbClr val="0070C0"/>
+                  </a:solidFill>
+                </a:endParaRPr>
+              </a:p>
+            </p:txBody>
+          </p:sp>
+        </mc:Choice>
+        <mc:Fallback>
+          <p:sp>
+            <p:nvSpPr>
+              <p:cNvPr id="17" name="テキスト ボックス 16">
+                <a:extLst>
+                  <a:ext uri="{FF2B5EF4-FFF2-40B4-BE49-F238E27FC236}">
+                    <a16:creationId xmlns:a16="http://schemas.microsoft.com/office/drawing/2014/main" id="{0685C82F-52F8-4C79-B1EC-BF6E1AD00595}"/>
+                  </a:ext>
+                </a:extLst>
+              </p:cNvPr>
+              <p:cNvSpPr txBox="1">
+                <a:spLocks noRot="1" noChangeAspect="1" noMove="1" noResize="1" noEditPoints="1" noAdjustHandles="1" noChangeArrowheads="1" noChangeShapeType="1" noTextEdit="1"/>
+              </p:cNvSpPr>
+              <p:nvPr/>
+            </p:nvSpPr>
+            <p:spPr>
+              <a:xfrm>
+                <a:off x="825145" y="5004722"/>
+                <a:ext cx="1322557" cy="369332"/>
+              </a:xfrm>
+              <a:prstGeom prst="rect">
+                <a:avLst/>
+              </a:prstGeom>
+              <a:blipFill>
+                <a:blip r:embed="rId7"/>
+                <a:stretch>
+                  <a:fillRect b="-14754"/>
+                </a:stretch>
+              </a:blipFill>
+            </p:spPr>
+            <p:txBody>
+              <a:bodyPr/>
+              <a:lstStyle/>
+              <a:p>
+                <a:r>
+                  <a:rPr lang="ja-JP" altLang="en-US">
+                    <a:noFill/>
+                  </a:rPr>
+                  <a:t> </a:t>
+                </a:r>
+              </a:p>
+            </p:txBody>
+          </p:sp>
+        </mc:Fallback>
+      </mc:AlternateContent>
+      <p:sp>
+        <p:nvSpPr>
+          <p:cNvPr id="18" name="テキスト ボックス 17">
+            <a:extLst>
+              <a:ext uri="{FF2B5EF4-FFF2-40B4-BE49-F238E27FC236}">
+                <a16:creationId xmlns:a16="http://schemas.microsoft.com/office/drawing/2014/main" id="{6A56A348-F5D9-47BE-A50D-300AF878C024}"/>
+              </a:ext>
+            </a:extLst>
+          </p:cNvPr>
+          <p:cNvSpPr txBox="1"/>
+          <p:nvPr/>
+        </p:nvSpPr>
+        <p:spPr>
+          <a:xfrm>
+            <a:off x="5974688" y="5260675"/>
+            <a:ext cx="5724644" cy="1200329"/>
+          </a:xfrm>
+          <a:prstGeom prst="rect">
+            <a:avLst/>
+          </a:prstGeom>
+          <a:noFill/>
+        </p:spPr>
+        <p:txBody>
+          <a:bodyPr wrap="none" rtlCol="0">
+            <a:spAutoFit/>
+          </a:bodyPr>
+          <a:lstStyle/>
+          <a:p>
+            <a:r>
+              <a:rPr lang="en-US" altLang="ja-JP" sz="2400" b="1" dirty="0">
+                <a:solidFill>
+                  <a:srgbClr val="00B050"/>
+                </a:solidFill>
+              </a:rPr>
+              <a:t>MEMO</a:t>
+            </a:r>
+          </a:p>
+          <a:p>
+            <a:r>
+              <a:rPr lang="ja-JP" altLang="en-US" sz="2400" dirty="0"/>
+              <a:t>垂直抗力の計算には気を付けましょう。</a:t>
+            </a:r>
+            <a:endParaRPr lang="en-US" altLang="ja-JP" sz="2400" dirty="0"/>
+          </a:p>
+          <a:p>
+            <a:r>
+              <a:rPr lang="ja-JP" altLang="en-US" sz="2400" dirty="0"/>
+              <a:t>（</a:t>
+            </a:r>
+            <a:r>
+              <a:rPr lang="ja-JP" altLang="en-US" sz="2400" b="1" dirty="0">
+                <a:solidFill>
+                  <a:srgbClr val="FF0000"/>
+                </a:solidFill>
+              </a:rPr>
+              <a:t>安易に重さの反対にしないこと</a:t>
+            </a:r>
+            <a:r>
+              <a:rPr lang="ja-JP" altLang="en-US" sz="2400" dirty="0"/>
+              <a:t>）</a:t>
+            </a:r>
+            <a:endParaRPr lang="en-US" altLang="ja-JP" sz="2400" dirty="0"/>
+          </a:p>
+        </p:txBody>
+      </p:sp>
+    </p:spTree>
+    <p:extLst>
+      <p:ext uri="{BB962C8B-B14F-4D97-AF65-F5344CB8AC3E}">
+        <p14:creationId xmlns:p14="http://schemas.microsoft.com/office/powerpoint/2010/main" val="378215714"/>
+      </p:ext>
+    </p:extLst>
+  </p:cSld>
+  <p:clrMapOvr>
+    <a:masterClrMapping/>
+  </p:clrMapOvr>
+</p:sld>
+</file>
+
+<file path=ppt/slides/slide12.xml><?xml version="1.0" encoding="utf-8"?>
+<p:sld xmlns:a="http://schemas.openxmlformats.org/drawingml/2006/main" xmlns:r="http://schemas.openxmlformats.org/officeDocument/2006/relationships" xmlns:p="http://schemas.openxmlformats.org/presentationml/2006/main">
+  <p:cSld>
+    <p:spTree>
+      <p:nvGrpSpPr>
+        <p:cNvPr id="1" name=""/>
+        <p:cNvGrpSpPr/>
+        <p:nvPr/>
+      </p:nvGrpSpPr>
+      <p:grpSpPr>
+        <a:xfrm>
+          <a:off x="0" y="0"/>
+          <a:ext cx="0" cy="0"/>
+          <a:chOff x="0" y="0"/>
+          <a:chExt cx="0" cy="0"/>
+        </a:xfrm>
+      </p:grpSpPr>
+      <p:sp>
+        <p:nvSpPr>
+          <p:cNvPr id="4" name="テキスト ボックス 3">
+            <a:extLst>
+              <a:ext uri="{FF2B5EF4-FFF2-40B4-BE49-F238E27FC236}">
+                <a16:creationId xmlns:a16="http://schemas.microsoft.com/office/drawing/2014/main" id="{5A13BF46-B8C5-48AA-8308-C9ECFF431A18}"/>
+              </a:ext>
+            </a:extLst>
+          </p:cNvPr>
+          <p:cNvSpPr txBox="1"/>
+          <p:nvPr/>
+        </p:nvSpPr>
+        <p:spPr>
+          <a:xfrm>
+            <a:off x="567542" y="491954"/>
+            <a:ext cx="1943161" cy="584775"/>
+          </a:xfrm>
+          <a:prstGeom prst="rect">
+            <a:avLst/>
+          </a:prstGeom>
+          <a:noFill/>
+        </p:spPr>
+        <p:txBody>
+          <a:bodyPr wrap="none" rtlCol="0">
+            <a:spAutoFit/>
+          </a:bodyPr>
+          <a:lstStyle/>
+          <a:p>
+            <a:r>
+              <a:rPr kumimoji="1" lang="ja-JP" altLang="en-US" sz="3200" b="1" u="sng" dirty="0"/>
+              <a:t>合力 練習</a:t>
+            </a:r>
+            <a:endParaRPr kumimoji="1" lang="en-US" altLang="ja-JP" sz="3200" b="1" u="sng" dirty="0"/>
+          </a:p>
+        </p:txBody>
+      </p:sp>
+      <mc:AlternateContent xmlns:mc="http://schemas.openxmlformats.org/markup-compatibility/2006">
+        <mc:Choice xmlns:a14="http://schemas.microsoft.com/office/drawing/2010/main" Requires="a14">
+          <p:sp>
+            <p:nvSpPr>
+              <p:cNvPr id="6" name="テキスト ボックス 5">
+                <a:extLst>
+                  <a:ext uri="{FF2B5EF4-FFF2-40B4-BE49-F238E27FC236}">
+                    <a16:creationId xmlns:a16="http://schemas.microsoft.com/office/drawing/2014/main" id="{55830AD6-028B-4C4E-80BF-B70DFC1C3A46}"/>
+                  </a:ext>
+                </a:extLst>
+              </p:cNvPr>
+              <p:cNvSpPr txBox="1"/>
+              <p:nvPr/>
+            </p:nvSpPr>
+            <p:spPr>
+              <a:xfrm>
+                <a:off x="567542" y="1216429"/>
+                <a:ext cx="8026556" cy="1200329"/>
+              </a:xfrm>
+              <a:prstGeom prst="rect">
+                <a:avLst/>
+              </a:prstGeom>
+              <a:noFill/>
+            </p:spPr>
+            <p:txBody>
+              <a:bodyPr wrap="none" rtlCol="0">
+                <a:spAutoFit/>
+              </a:bodyPr>
+              <a:lstStyle/>
+              <a:p>
+                <a:r>
+                  <a:rPr lang="ja-JP" altLang="en-US" sz="2400" dirty="0"/>
+                  <a:t>ゲーム中の氷の床の上に</a:t>
+                </a:r>
+                <a:r>
+                  <a:rPr lang="en-US" altLang="ja-JP" sz="2400" dirty="0"/>
+                  <a:t>15kg</a:t>
+                </a:r>
+                <a:r>
+                  <a:rPr lang="ja-JP" altLang="en-US" sz="2400" dirty="0"/>
+                  <a:t>の金属の箱があり、</a:t>
+                </a:r>
+                <a:endParaRPr lang="en-US" altLang="ja-JP" sz="2400" dirty="0"/>
+              </a:p>
+              <a:p>
+                <a:r>
+                  <a:rPr lang="ja-JP" altLang="en-US" sz="2400" dirty="0"/>
+                  <a:t>この箱にロープをつけて</a:t>
+                </a:r>
+                <a:r>
+                  <a:rPr lang="en-US" altLang="ja-JP" sz="2400" dirty="0"/>
+                  <a:t>80N</a:t>
+                </a:r>
+                <a:r>
+                  <a:rPr lang="ja-JP" altLang="en-US" sz="2400" dirty="0"/>
+                  <a:t>の力で引っ張ります。</a:t>
+                </a:r>
+                <a:endParaRPr lang="en-US" altLang="ja-JP" sz="2400" dirty="0"/>
+              </a:p>
+              <a:p>
+                <a:r>
+                  <a:rPr lang="ja-JP" altLang="en-US" sz="2400" dirty="0"/>
+                  <a:t>ロープの角度が</a:t>
+                </a:r>
+                <a14:m>
+                  <m:oMath xmlns:m="http://schemas.openxmlformats.org/officeDocument/2006/math">
+                    <m:r>
+                      <a:rPr lang="en-US" altLang="ja-JP" sz="2400" i="1" dirty="0">
+                        <a:latin typeface="Cambria Math" panose="02040503050406030204" pitchFamily="18" charset="0"/>
+                      </a:rPr>
+                      <m:t>30</m:t>
+                    </m:r>
+                    <m:r>
+                      <a:rPr lang="en-US" altLang="ja-JP" sz="2400" i="1" dirty="0">
+                        <a:latin typeface="Cambria Math" panose="02040503050406030204" pitchFamily="18" charset="0"/>
+                      </a:rPr>
+                      <m:t>°</m:t>
+                    </m:r>
+                  </m:oMath>
+                </a14:m>
+                <a:r>
+                  <a:rPr lang="ja-JP" altLang="en-US" sz="2400" dirty="0"/>
+                  <a:t>のとき、箱に働く合力を求めなさい。</a:t>
+                </a:r>
+                <a:endParaRPr lang="en-US" altLang="ja-JP" sz="2400" dirty="0"/>
+              </a:p>
+            </p:txBody>
+          </p:sp>
+        </mc:Choice>
+        <mc:Fallback>
+          <p:sp>
+            <p:nvSpPr>
+              <p:cNvPr id="6" name="テキスト ボックス 5">
+                <a:extLst>
+                  <a:ext uri="{FF2B5EF4-FFF2-40B4-BE49-F238E27FC236}">
+                    <a16:creationId xmlns:a16="http://schemas.microsoft.com/office/drawing/2014/main" id="{55830AD6-028B-4C4E-80BF-B70DFC1C3A46}"/>
+                  </a:ext>
+                </a:extLst>
+              </p:cNvPr>
+              <p:cNvSpPr txBox="1">
+                <a:spLocks noRot="1" noChangeAspect="1" noMove="1" noResize="1" noEditPoints="1" noAdjustHandles="1" noChangeArrowheads="1" noChangeShapeType="1" noTextEdit="1"/>
+              </p:cNvSpPr>
+              <p:nvPr/>
+            </p:nvSpPr>
+            <p:spPr>
+              <a:xfrm>
+                <a:off x="567542" y="1216429"/>
+                <a:ext cx="8026556" cy="1200329"/>
+              </a:xfrm>
+              <a:prstGeom prst="rect">
+                <a:avLst/>
+              </a:prstGeom>
+              <a:blipFill>
+                <a:blip r:embed="rId2"/>
+                <a:stretch>
+                  <a:fillRect l="-1139" t="-4082" r="-228" b="-11224"/>
+                </a:stretch>
+              </a:blipFill>
+            </p:spPr>
+            <p:txBody>
+              <a:bodyPr/>
+              <a:lstStyle/>
+              <a:p>
+                <a:r>
+                  <a:rPr lang="ja-JP" altLang="en-US">
+                    <a:noFill/>
+                  </a:rPr>
+                  <a:t> </a:t>
+                </a:r>
+              </a:p>
+            </p:txBody>
+          </p:sp>
+        </mc:Fallback>
+      </mc:AlternateContent>
+    </p:spTree>
+    <p:extLst>
+      <p:ext uri="{BB962C8B-B14F-4D97-AF65-F5344CB8AC3E}">
+        <p14:creationId xmlns:p14="http://schemas.microsoft.com/office/powerpoint/2010/main" val="2113048936"/>
       </p:ext>
     </p:extLst>
   </p:cSld>
@@ -3834,8 +6483,2007 @@
           </a:p>
         </p:txBody>
       </p:sp>
-      <mc:AlternateContent xmlns:mc="http://schemas.openxmlformats.org/markup-compatibility/2006">
-        <mc:Choice xmlns:a14="http://schemas.microsoft.com/office/drawing/2010/main" Requires="a14">
+      <p:sp>
+        <p:nvSpPr>
+          <p:cNvPr id="6" name="テキスト ボックス 5">
+            <a:extLst>
+              <a:ext uri="{FF2B5EF4-FFF2-40B4-BE49-F238E27FC236}">
+                <a16:creationId xmlns:a16="http://schemas.microsoft.com/office/drawing/2014/main" id="{55830AD6-028B-4C4E-80BF-B70DFC1C3A46}"/>
+              </a:ext>
+            </a:extLst>
+          </p:cNvPr>
+          <p:cNvSpPr txBox="1"/>
+          <p:nvPr/>
+        </p:nvSpPr>
+        <p:spPr>
+          <a:xfrm>
+            <a:off x="567542" y="1216429"/>
+            <a:ext cx="5724644" cy="461665"/>
+          </a:xfrm>
+          <a:prstGeom prst="rect">
+            <a:avLst/>
+          </a:prstGeom>
+          <a:noFill/>
+        </p:spPr>
+        <p:txBody>
+          <a:bodyPr wrap="none" rtlCol="0">
+            <a:spAutoFit/>
+          </a:bodyPr>
+          <a:lstStyle/>
+          <a:p>
+            <a:r>
+              <a:rPr lang="ja-JP" altLang="en-US" sz="2400" dirty="0"/>
+              <a:t>例えば、このように箱を押すとします。</a:t>
+            </a:r>
+            <a:endParaRPr lang="en-US" altLang="ja-JP" sz="2400" dirty="0"/>
+          </a:p>
+        </p:txBody>
+      </p:sp>
+      <p:pic>
+        <p:nvPicPr>
+          <p:cNvPr id="7" name="Picture 2" descr="押す人デフォルメイラスト｜無料イラスト・フリー素材なら「イラストAC」">
+            <a:extLst>
+              <a:ext uri="{FF2B5EF4-FFF2-40B4-BE49-F238E27FC236}">
+                <a16:creationId xmlns:a16="http://schemas.microsoft.com/office/drawing/2014/main" id="{7B4D26E1-EC1B-481F-9B05-D64E6015E2E6}"/>
+              </a:ext>
+            </a:extLst>
+          </p:cNvPr>
+          <p:cNvPicPr>
+            <a:picLocks noChangeAspect="1" noChangeArrowheads="1"/>
+          </p:cNvPicPr>
+          <p:nvPr/>
+        </p:nvPicPr>
+        <p:blipFill>
+          <a:blip r:embed="rId2">
+            <a:extLst>
+              <a:ext uri="{28A0092B-C50C-407E-A947-70E740481C1C}">
+                <a14:useLocalDpi xmlns:a14="http://schemas.microsoft.com/office/drawing/2010/main" val="0"/>
+              </a:ext>
+            </a:extLst>
+          </a:blip>
+          <a:srcRect/>
+          <a:stretch>
+            <a:fillRect/>
+          </a:stretch>
+        </p:blipFill>
+        <p:spPr bwMode="auto">
+          <a:xfrm flipH="1">
+            <a:off x="3723326" y="2892964"/>
+            <a:ext cx="2900862" cy="2213728"/>
+          </a:xfrm>
+          <a:prstGeom prst="rect">
+            <a:avLst/>
+          </a:prstGeom>
+          <a:noFill/>
+          <a:extLst>
+            <a:ext uri="{909E8E84-426E-40DD-AFC4-6F175D3DCCD1}">
+              <a14:hiddenFill xmlns:a14="http://schemas.microsoft.com/office/drawing/2010/main">
+                <a:solidFill>
+                  <a:srgbClr val="FFFFFF"/>
+                </a:solidFill>
+              </a14:hiddenFill>
+            </a:ext>
+          </a:extLst>
+        </p:spPr>
+      </p:pic>
+      <p:sp>
+        <p:nvSpPr>
+          <p:cNvPr id="8" name="正方形/長方形 7">
+            <a:extLst>
+              <a:ext uri="{FF2B5EF4-FFF2-40B4-BE49-F238E27FC236}">
+                <a16:creationId xmlns:a16="http://schemas.microsoft.com/office/drawing/2014/main" id="{46AA6489-9456-4212-9214-40DE9AAC0960}"/>
+              </a:ext>
+            </a:extLst>
+          </p:cNvPr>
+          <p:cNvSpPr/>
+          <p:nvPr/>
+        </p:nvSpPr>
+        <p:spPr>
+          <a:xfrm>
+            <a:off x="3191434" y="4829976"/>
+            <a:ext cx="5118847" cy="98409"/>
+          </a:xfrm>
+          <a:prstGeom prst="rect">
+            <a:avLst/>
+          </a:prstGeom>
+        </p:spPr>
+        <p:style>
+          <a:lnRef idx="2">
+            <a:schemeClr val="dk1">
+              <a:shade val="50000"/>
+            </a:schemeClr>
+          </a:lnRef>
+          <a:fillRef idx="1">
+            <a:schemeClr val="dk1"/>
+          </a:fillRef>
+          <a:effectRef idx="0">
+            <a:schemeClr val="dk1"/>
+          </a:effectRef>
+          <a:fontRef idx="minor">
+            <a:schemeClr val="lt1"/>
+          </a:fontRef>
+        </p:style>
+        <p:txBody>
+          <a:bodyPr rtlCol="0" anchor="ctr"/>
+          <a:lstStyle/>
+          <a:p>
+            <a:pPr algn="ctr"/>
+            <a:endParaRPr kumimoji="1" lang="ja-JP" altLang="en-US"/>
+          </a:p>
+        </p:txBody>
+      </p:sp>
+    </p:spTree>
+    <p:extLst>
+      <p:ext uri="{BB962C8B-B14F-4D97-AF65-F5344CB8AC3E}">
+        <p14:creationId xmlns:p14="http://schemas.microsoft.com/office/powerpoint/2010/main" val="1616728099"/>
+      </p:ext>
+    </p:extLst>
+  </p:cSld>
+  <p:clrMapOvr>
+    <a:masterClrMapping/>
+  </p:clrMapOvr>
+</p:sld>
+</file>
+
+<file path=ppt/slides/slide3.xml><?xml version="1.0" encoding="utf-8"?>
+<p:sld xmlns:a="http://schemas.openxmlformats.org/drawingml/2006/main" xmlns:r="http://schemas.openxmlformats.org/officeDocument/2006/relationships" xmlns:p="http://schemas.openxmlformats.org/presentationml/2006/main">
+  <p:cSld>
+    <p:spTree>
+      <p:nvGrpSpPr>
+        <p:cNvPr id="1" name=""/>
+        <p:cNvGrpSpPr/>
+        <p:nvPr/>
+      </p:nvGrpSpPr>
+      <p:grpSpPr>
+        <a:xfrm>
+          <a:off x="0" y="0"/>
+          <a:ext cx="0" cy="0"/>
+          <a:chOff x="0" y="0"/>
+          <a:chExt cx="0" cy="0"/>
+        </a:xfrm>
+      </p:grpSpPr>
+      <p:sp>
+        <p:nvSpPr>
+          <p:cNvPr id="4" name="テキスト ボックス 3">
+            <a:extLst>
+              <a:ext uri="{FF2B5EF4-FFF2-40B4-BE49-F238E27FC236}">
+                <a16:creationId xmlns:a16="http://schemas.microsoft.com/office/drawing/2014/main" id="{5A13BF46-B8C5-48AA-8308-C9ECFF431A18}"/>
+              </a:ext>
+            </a:extLst>
+          </p:cNvPr>
+          <p:cNvSpPr txBox="1"/>
+          <p:nvPr/>
+        </p:nvSpPr>
+        <p:spPr>
+          <a:xfrm>
+            <a:off x="567542" y="491954"/>
+            <a:ext cx="1005403" cy="584775"/>
+          </a:xfrm>
+          <a:prstGeom prst="rect">
+            <a:avLst/>
+          </a:prstGeom>
+          <a:noFill/>
+        </p:spPr>
+        <p:txBody>
+          <a:bodyPr wrap="none" rtlCol="0">
+            <a:spAutoFit/>
+          </a:bodyPr>
+          <a:lstStyle/>
+          <a:p>
+            <a:r>
+              <a:rPr kumimoji="1" lang="ja-JP" altLang="en-US" sz="3200" b="1" u="sng" dirty="0"/>
+              <a:t>合力</a:t>
+            </a:r>
+            <a:endParaRPr kumimoji="1" lang="en-US" altLang="ja-JP" sz="3200" b="1" u="sng" dirty="0"/>
+          </a:p>
+        </p:txBody>
+      </p:sp>
+      <p:sp>
+        <p:nvSpPr>
+          <p:cNvPr id="6" name="テキスト ボックス 5">
+            <a:extLst>
+              <a:ext uri="{FF2B5EF4-FFF2-40B4-BE49-F238E27FC236}">
+                <a16:creationId xmlns:a16="http://schemas.microsoft.com/office/drawing/2014/main" id="{55830AD6-028B-4C4E-80BF-B70DFC1C3A46}"/>
+              </a:ext>
+            </a:extLst>
+          </p:cNvPr>
+          <p:cNvSpPr txBox="1"/>
+          <p:nvPr/>
+        </p:nvSpPr>
+        <p:spPr>
+          <a:xfrm>
+            <a:off x="567542" y="1216429"/>
+            <a:ext cx="7263527" cy="461665"/>
+          </a:xfrm>
+          <a:prstGeom prst="rect">
+            <a:avLst/>
+          </a:prstGeom>
+          <a:noFill/>
+        </p:spPr>
+        <p:txBody>
+          <a:bodyPr wrap="none" rtlCol="0">
+            <a:spAutoFit/>
+          </a:bodyPr>
+          <a:lstStyle/>
+          <a:p>
+            <a:r>
+              <a:rPr lang="ja-JP" altLang="en-US" sz="2400" dirty="0"/>
+              <a:t>この場合、箱には以下のような力が与えられます。</a:t>
+            </a:r>
+            <a:endParaRPr lang="en-US" altLang="ja-JP" sz="2400" dirty="0"/>
+          </a:p>
+        </p:txBody>
+      </p:sp>
+      <p:grpSp>
+        <p:nvGrpSpPr>
+          <p:cNvPr id="24" name="グループ化 23">
+            <a:extLst>
+              <a:ext uri="{FF2B5EF4-FFF2-40B4-BE49-F238E27FC236}">
+                <a16:creationId xmlns:a16="http://schemas.microsoft.com/office/drawing/2014/main" id="{F06D004C-863F-4C24-913D-03E56ABD465D}"/>
+              </a:ext>
+            </a:extLst>
+          </p:cNvPr>
+          <p:cNvGrpSpPr/>
+          <p:nvPr/>
+        </p:nvGrpSpPr>
+        <p:grpSpPr>
+          <a:xfrm>
+            <a:off x="3191434" y="2094803"/>
+            <a:ext cx="5118847" cy="3902584"/>
+            <a:chOff x="4294094" y="2417533"/>
+            <a:chExt cx="3239484" cy="2512821"/>
+          </a:xfrm>
+        </p:grpSpPr>
+        <p:pic>
+          <p:nvPicPr>
+            <p:cNvPr id="9" name="Picture 2" descr="押す人デフォルメイラスト｜無料イラスト・フリー素材なら「イラストAC」">
+              <a:extLst>
+                <a:ext uri="{FF2B5EF4-FFF2-40B4-BE49-F238E27FC236}">
+                  <a16:creationId xmlns:a16="http://schemas.microsoft.com/office/drawing/2014/main" id="{36EDE852-A892-452E-87CF-DCE2ECDA519F}"/>
+                </a:ext>
+              </a:extLst>
+            </p:cNvPr>
+            <p:cNvPicPr>
+              <a:picLocks noChangeAspect="1" noChangeArrowheads="1"/>
+            </p:cNvPicPr>
+            <p:nvPr/>
+          </p:nvPicPr>
+          <p:blipFill>
+            <a:blip r:embed="rId2">
+              <a:extLst>
+                <a:ext uri="{28A0092B-C50C-407E-A947-70E740481C1C}">
+                  <a14:useLocalDpi xmlns:a14="http://schemas.microsoft.com/office/drawing/2010/main" val="0"/>
+                </a:ext>
+              </a:extLst>
+            </a:blip>
+            <a:srcRect/>
+            <a:stretch>
+              <a:fillRect/>
+            </a:stretch>
+          </p:blipFill>
+          <p:spPr bwMode="auto">
+            <a:xfrm flipH="1">
+              <a:off x="4630704" y="2931457"/>
+              <a:ext cx="1835823" cy="1425389"/>
+            </a:xfrm>
+            <a:prstGeom prst="rect">
+              <a:avLst/>
+            </a:prstGeom>
+            <a:noFill/>
+            <a:extLst>
+              <a:ext uri="{909E8E84-426E-40DD-AFC4-6F175D3DCCD1}">
+                <a14:hiddenFill xmlns:a14="http://schemas.microsoft.com/office/drawing/2010/main">
+                  <a:solidFill>
+                    <a:srgbClr val="FFFFFF"/>
+                  </a:solidFill>
+                </a14:hiddenFill>
+              </a:ext>
+            </a:extLst>
+          </p:spPr>
+        </p:pic>
+        <p:sp>
+          <p:nvSpPr>
+            <p:cNvPr id="10" name="正方形/長方形 9">
+              <a:extLst>
+                <a:ext uri="{FF2B5EF4-FFF2-40B4-BE49-F238E27FC236}">
+                  <a16:creationId xmlns:a16="http://schemas.microsoft.com/office/drawing/2014/main" id="{A545BD1E-44B3-41BC-A8E9-9C2FFFB09E3B}"/>
+                </a:ext>
+              </a:extLst>
+            </p:cNvPr>
+            <p:cNvSpPr/>
+            <p:nvPr/>
+          </p:nvSpPr>
+          <p:spPr>
+            <a:xfrm>
+              <a:off x="4294094" y="4178673"/>
+              <a:ext cx="3239484" cy="63364"/>
+            </a:xfrm>
+            <a:prstGeom prst="rect">
+              <a:avLst/>
+            </a:prstGeom>
+          </p:spPr>
+          <p:style>
+            <a:lnRef idx="2">
+              <a:schemeClr val="dk1">
+                <a:shade val="50000"/>
+              </a:schemeClr>
+            </a:lnRef>
+            <a:fillRef idx="1">
+              <a:schemeClr val="dk1"/>
+            </a:fillRef>
+            <a:effectRef idx="0">
+              <a:schemeClr val="dk1"/>
+            </a:effectRef>
+            <a:fontRef idx="minor">
+              <a:schemeClr val="lt1"/>
+            </a:fontRef>
+          </p:style>
+          <p:txBody>
+            <a:bodyPr rtlCol="0" anchor="ctr"/>
+            <a:lstStyle/>
+            <a:p>
+              <a:pPr algn="ctr"/>
+              <a:endParaRPr kumimoji="1" lang="ja-JP" altLang="en-US"/>
+            </a:p>
+          </p:txBody>
+        </p:sp>
+        <p:cxnSp>
+          <p:nvCxnSpPr>
+            <p:cNvPr id="11" name="直線矢印コネクタ 10">
+              <a:extLst>
+                <a:ext uri="{FF2B5EF4-FFF2-40B4-BE49-F238E27FC236}">
+                  <a16:creationId xmlns:a16="http://schemas.microsoft.com/office/drawing/2014/main" id="{C053AD29-A9E9-432F-B197-86B2D9209990}"/>
+                </a:ext>
+              </a:extLst>
+            </p:cNvPr>
+            <p:cNvCxnSpPr>
+              <a:cxnSpLocks/>
+            </p:cNvCxnSpPr>
+            <p:nvPr/>
+          </p:nvCxnSpPr>
+          <p:spPr>
+            <a:xfrm>
+              <a:off x="5334000" y="3720353"/>
+              <a:ext cx="878541" cy="0"/>
+            </a:xfrm>
+            <a:prstGeom prst="straightConnector1">
+              <a:avLst/>
+            </a:prstGeom>
+            <a:ln w="38100">
+              <a:solidFill>
+                <a:srgbClr val="FF0000"/>
+              </a:solidFill>
+              <a:tailEnd type="triangle"/>
+            </a:ln>
+          </p:spPr>
+          <p:style>
+            <a:lnRef idx="1">
+              <a:schemeClr val="accent1"/>
+            </a:lnRef>
+            <a:fillRef idx="0">
+              <a:schemeClr val="accent1"/>
+            </a:fillRef>
+            <a:effectRef idx="0">
+              <a:schemeClr val="accent1"/>
+            </a:effectRef>
+            <a:fontRef idx="minor">
+              <a:schemeClr val="tx1"/>
+            </a:fontRef>
+          </p:style>
+        </p:cxnSp>
+        <p:sp>
+          <p:nvSpPr>
+            <p:cNvPr id="15" name="テキスト ボックス 14">
+              <a:extLst>
+                <a:ext uri="{FF2B5EF4-FFF2-40B4-BE49-F238E27FC236}">
+                  <a16:creationId xmlns:a16="http://schemas.microsoft.com/office/drawing/2014/main" id="{0FFDB24D-8055-4416-8EE0-68B7A876CE5A}"/>
+                </a:ext>
+              </a:extLst>
+            </p:cNvPr>
+            <p:cNvSpPr txBox="1"/>
+            <p:nvPr/>
+          </p:nvSpPr>
+          <p:spPr>
+            <a:xfrm>
+              <a:off x="5466786" y="3480681"/>
+              <a:ext cx="800219" cy="338554"/>
+            </a:xfrm>
+            <a:prstGeom prst="rect">
+              <a:avLst/>
+            </a:prstGeom>
+            <a:noFill/>
+          </p:spPr>
+          <p:txBody>
+            <a:bodyPr wrap="none" rtlCol="0">
+              <a:spAutoFit/>
+            </a:bodyPr>
+            <a:lstStyle/>
+            <a:p>
+              <a:r>
+                <a:rPr lang="ja-JP" altLang="en-US" sz="1600" b="1" dirty="0">
+                  <a:solidFill>
+                    <a:srgbClr val="FF0000"/>
+                  </a:solidFill>
+                </a:rPr>
+                <a:t>押す力</a:t>
+              </a:r>
+              <a:endParaRPr lang="en-US" altLang="ja-JP" sz="1600" b="1" dirty="0">
+                <a:solidFill>
+                  <a:srgbClr val="FF0000"/>
+                </a:solidFill>
+              </a:endParaRPr>
+            </a:p>
+          </p:txBody>
+        </p:sp>
+        <p:cxnSp>
+          <p:nvCxnSpPr>
+            <p:cNvPr id="16" name="直線矢印コネクタ 15">
+              <a:extLst>
+                <a:ext uri="{FF2B5EF4-FFF2-40B4-BE49-F238E27FC236}">
+                  <a16:creationId xmlns:a16="http://schemas.microsoft.com/office/drawing/2014/main" id="{76B7FE50-AECD-4964-BF32-250F1416896F}"/>
+                </a:ext>
+              </a:extLst>
+            </p:cNvPr>
+            <p:cNvCxnSpPr>
+              <a:cxnSpLocks/>
+            </p:cNvCxnSpPr>
+            <p:nvPr/>
+          </p:nvCxnSpPr>
+          <p:spPr>
+            <a:xfrm>
+              <a:off x="5773269" y="2417533"/>
+              <a:ext cx="0" cy="720000"/>
+            </a:xfrm>
+            <a:prstGeom prst="straightConnector1">
+              <a:avLst/>
+            </a:prstGeom>
+            <a:ln w="38100">
+              <a:solidFill>
+                <a:srgbClr val="7030A0"/>
+              </a:solidFill>
+              <a:tailEnd type="triangle"/>
+            </a:ln>
+          </p:spPr>
+          <p:style>
+            <a:lnRef idx="1">
+              <a:schemeClr val="accent1"/>
+            </a:lnRef>
+            <a:fillRef idx="0">
+              <a:schemeClr val="accent1"/>
+            </a:fillRef>
+            <a:effectRef idx="0">
+              <a:schemeClr val="accent1"/>
+            </a:effectRef>
+            <a:fontRef idx="minor">
+              <a:schemeClr val="tx1"/>
+            </a:fontRef>
+          </p:style>
+        </p:cxnSp>
+        <p:sp>
+          <p:nvSpPr>
+            <p:cNvPr id="18" name="テキスト ボックス 17">
+              <a:extLst>
+                <a:ext uri="{FF2B5EF4-FFF2-40B4-BE49-F238E27FC236}">
+                  <a16:creationId xmlns:a16="http://schemas.microsoft.com/office/drawing/2014/main" id="{857E510C-366D-4561-BE26-05804E3F7C19}"/>
+                </a:ext>
+              </a:extLst>
+            </p:cNvPr>
+            <p:cNvSpPr txBox="1"/>
+            <p:nvPr/>
+          </p:nvSpPr>
+          <p:spPr>
+            <a:xfrm>
+              <a:off x="5764304" y="2644809"/>
+              <a:ext cx="376570" cy="217990"/>
+            </a:xfrm>
+            <a:prstGeom prst="rect">
+              <a:avLst/>
+            </a:prstGeom>
+            <a:noFill/>
+          </p:spPr>
+          <p:txBody>
+            <a:bodyPr wrap="none" rtlCol="0">
+              <a:spAutoFit/>
+            </a:bodyPr>
+            <a:lstStyle/>
+            <a:p>
+              <a:r>
+                <a:rPr lang="ja-JP" altLang="en-US" sz="1600" b="1" dirty="0">
+                  <a:solidFill>
+                    <a:srgbClr val="7030A0"/>
+                  </a:solidFill>
+                </a:rPr>
+                <a:t>重さ</a:t>
+              </a:r>
+              <a:endParaRPr lang="en-US" altLang="ja-JP" sz="1600" b="1" dirty="0">
+                <a:solidFill>
+                  <a:srgbClr val="7030A0"/>
+                </a:solidFill>
+              </a:endParaRPr>
+            </a:p>
+          </p:txBody>
+        </p:sp>
+        <p:cxnSp>
+          <p:nvCxnSpPr>
+            <p:cNvPr id="19" name="直線矢印コネクタ 18">
+              <a:extLst>
+                <a:ext uri="{FF2B5EF4-FFF2-40B4-BE49-F238E27FC236}">
+                  <a16:creationId xmlns:a16="http://schemas.microsoft.com/office/drawing/2014/main" id="{95C2BC4F-EB7D-4C35-BF86-2A3E98B66B2D}"/>
+                </a:ext>
+              </a:extLst>
+            </p:cNvPr>
+            <p:cNvCxnSpPr>
+              <a:cxnSpLocks/>
+            </p:cNvCxnSpPr>
+            <p:nvPr/>
+          </p:nvCxnSpPr>
+          <p:spPr>
+            <a:xfrm flipV="1">
+              <a:off x="5764304" y="4210354"/>
+              <a:ext cx="1" cy="720000"/>
+            </a:xfrm>
+            <a:prstGeom prst="straightConnector1">
+              <a:avLst/>
+            </a:prstGeom>
+            <a:ln w="38100">
+              <a:solidFill>
+                <a:srgbClr val="00B050"/>
+              </a:solidFill>
+              <a:tailEnd type="triangle"/>
+            </a:ln>
+          </p:spPr>
+          <p:style>
+            <a:lnRef idx="1">
+              <a:schemeClr val="accent1"/>
+            </a:lnRef>
+            <a:fillRef idx="0">
+              <a:schemeClr val="accent1"/>
+            </a:fillRef>
+            <a:effectRef idx="0">
+              <a:schemeClr val="accent1"/>
+            </a:effectRef>
+            <a:fontRef idx="minor">
+              <a:schemeClr val="tx1"/>
+            </a:fontRef>
+          </p:style>
+        </p:cxnSp>
+        <p:sp>
+          <p:nvSpPr>
+            <p:cNvPr id="22" name="テキスト ボックス 21">
+              <a:extLst>
+                <a:ext uri="{FF2B5EF4-FFF2-40B4-BE49-F238E27FC236}">
+                  <a16:creationId xmlns:a16="http://schemas.microsoft.com/office/drawing/2014/main" id="{A932DCF6-B0A6-4B34-B314-671A7249CF6B}"/>
+                </a:ext>
+              </a:extLst>
+            </p:cNvPr>
+            <p:cNvSpPr txBox="1"/>
+            <p:nvPr/>
+          </p:nvSpPr>
+          <p:spPr>
+            <a:xfrm>
+              <a:off x="5764303" y="4463590"/>
+              <a:ext cx="1005403" cy="338554"/>
+            </a:xfrm>
+            <a:prstGeom prst="rect">
+              <a:avLst/>
+            </a:prstGeom>
+            <a:noFill/>
+          </p:spPr>
+          <p:txBody>
+            <a:bodyPr wrap="none" rtlCol="0">
+              <a:spAutoFit/>
+            </a:bodyPr>
+            <a:lstStyle/>
+            <a:p>
+              <a:r>
+                <a:rPr lang="ja-JP" altLang="en-US" sz="1600" b="1" dirty="0">
+                  <a:solidFill>
+                    <a:srgbClr val="00B050"/>
+                  </a:solidFill>
+                </a:rPr>
+                <a:t>垂直抗力</a:t>
+              </a:r>
+              <a:endParaRPr lang="en-US" altLang="ja-JP" sz="1600" b="1" dirty="0">
+                <a:solidFill>
+                  <a:srgbClr val="00B050"/>
+                </a:solidFill>
+              </a:endParaRPr>
+            </a:p>
+          </p:txBody>
+        </p:sp>
+        <p:cxnSp>
+          <p:nvCxnSpPr>
+            <p:cNvPr id="23" name="直線矢印コネクタ 22">
+              <a:extLst>
+                <a:ext uri="{FF2B5EF4-FFF2-40B4-BE49-F238E27FC236}">
+                  <a16:creationId xmlns:a16="http://schemas.microsoft.com/office/drawing/2014/main" id="{F99BC580-850D-4ED5-96CC-7F68D76A5B30}"/>
+                </a:ext>
+              </a:extLst>
+            </p:cNvPr>
+            <p:cNvCxnSpPr>
+              <a:cxnSpLocks/>
+            </p:cNvCxnSpPr>
+            <p:nvPr/>
+          </p:nvCxnSpPr>
+          <p:spPr>
+            <a:xfrm flipH="1">
+              <a:off x="6359339" y="4071929"/>
+              <a:ext cx="453152" cy="234"/>
+            </a:xfrm>
+            <a:prstGeom prst="straightConnector1">
+              <a:avLst/>
+            </a:prstGeom>
+            <a:ln w="38100">
+              <a:solidFill>
+                <a:srgbClr val="0070C0"/>
+              </a:solidFill>
+              <a:tailEnd type="triangle"/>
+            </a:ln>
+          </p:spPr>
+          <p:style>
+            <a:lnRef idx="1">
+              <a:schemeClr val="accent1"/>
+            </a:lnRef>
+            <a:fillRef idx="0">
+              <a:schemeClr val="accent1"/>
+            </a:fillRef>
+            <a:effectRef idx="0">
+              <a:schemeClr val="accent1"/>
+            </a:effectRef>
+            <a:fontRef idx="minor">
+              <a:schemeClr val="tx1"/>
+            </a:fontRef>
+          </p:style>
+        </p:cxnSp>
+        <p:sp>
+          <p:nvSpPr>
+            <p:cNvPr id="25" name="テキスト ボックス 24">
+              <a:extLst>
+                <a:ext uri="{FF2B5EF4-FFF2-40B4-BE49-F238E27FC236}">
+                  <a16:creationId xmlns:a16="http://schemas.microsoft.com/office/drawing/2014/main" id="{13FE4404-033A-4047-A7F8-4CCF2BE2FC14}"/>
+                </a:ext>
+              </a:extLst>
+            </p:cNvPr>
+            <p:cNvSpPr txBox="1"/>
+            <p:nvPr/>
+          </p:nvSpPr>
+          <p:spPr>
+            <a:xfrm>
+              <a:off x="6359339" y="3805181"/>
+              <a:ext cx="800219" cy="338554"/>
+            </a:xfrm>
+            <a:prstGeom prst="rect">
+              <a:avLst/>
+            </a:prstGeom>
+            <a:noFill/>
+          </p:spPr>
+          <p:txBody>
+            <a:bodyPr wrap="none" rtlCol="0">
+              <a:spAutoFit/>
+            </a:bodyPr>
+            <a:lstStyle/>
+            <a:p>
+              <a:r>
+                <a:rPr lang="ja-JP" altLang="en-US" sz="1600" b="1" dirty="0">
+                  <a:solidFill>
+                    <a:srgbClr val="0070C0"/>
+                  </a:solidFill>
+                </a:rPr>
+                <a:t>摩擦力</a:t>
+              </a:r>
+              <a:endParaRPr lang="en-US" altLang="ja-JP" sz="1600" b="1" dirty="0">
+                <a:solidFill>
+                  <a:srgbClr val="0070C0"/>
+                </a:solidFill>
+              </a:endParaRPr>
+            </a:p>
+          </p:txBody>
+        </p:sp>
+      </p:grpSp>
+    </p:spTree>
+    <p:extLst>
+      <p:ext uri="{BB962C8B-B14F-4D97-AF65-F5344CB8AC3E}">
+        <p14:creationId xmlns:p14="http://schemas.microsoft.com/office/powerpoint/2010/main" val="1930043952"/>
+      </p:ext>
+    </p:extLst>
+  </p:cSld>
+  <p:clrMapOvr>
+    <a:masterClrMapping/>
+  </p:clrMapOvr>
+</p:sld>
+</file>
+
+<file path=ppt/slides/slide4.xml><?xml version="1.0" encoding="utf-8"?>
+<p:sld xmlns:a="http://schemas.openxmlformats.org/drawingml/2006/main" xmlns:r="http://schemas.openxmlformats.org/officeDocument/2006/relationships" xmlns:p="http://schemas.openxmlformats.org/presentationml/2006/main">
+  <p:cSld>
+    <p:spTree>
+      <p:nvGrpSpPr>
+        <p:cNvPr id="1" name=""/>
+        <p:cNvGrpSpPr/>
+        <p:nvPr/>
+      </p:nvGrpSpPr>
+      <p:grpSpPr>
+        <a:xfrm>
+          <a:off x="0" y="0"/>
+          <a:ext cx="0" cy="0"/>
+          <a:chOff x="0" y="0"/>
+          <a:chExt cx="0" cy="0"/>
+        </a:xfrm>
+      </p:grpSpPr>
+      <p:sp>
+        <p:nvSpPr>
+          <p:cNvPr id="4" name="テキスト ボックス 3">
+            <a:extLst>
+              <a:ext uri="{FF2B5EF4-FFF2-40B4-BE49-F238E27FC236}">
+                <a16:creationId xmlns:a16="http://schemas.microsoft.com/office/drawing/2014/main" id="{5A13BF46-B8C5-48AA-8308-C9ECFF431A18}"/>
+              </a:ext>
+            </a:extLst>
+          </p:cNvPr>
+          <p:cNvSpPr txBox="1"/>
+          <p:nvPr/>
+        </p:nvSpPr>
+        <p:spPr>
+          <a:xfrm>
+            <a:off x="567542" y="491954"/>
+            <a:ext cx="1005403" cy="584775"/>
+          </a:xfrm>
+          <a:prstGeom prst="rect">
+            <a:avLst/>
+          </a:prstGeom>
+          <a:noFill/>
+        </p:spPr>
+        <p:txBody>
+          <a:bodyPr wrap="none" rtlCol="0">
+            <a:spAutoFit/>
+          </a:bodyPr>
+          <a:lstStyle/>
+          <a:p>
+            <a:r>
+              <a:rPr kumimoji="1" lang="ja-JP" altLang="en-US" sz="3200" b="1" u="sng" dirty="0"/>
+              <a:t>合力</a:t>
+            </a:r>
+            <a:endParaRPr kumimoji="1" lang="en-US" altLang="ja-JP" sz="3200" b="1" u="sng" dirty="0"/>
+          </a:p>
+        </p:txBody>
+      </p:sp>
+      <p:sp>
+        <p:nvSpPr>
+          <p:cNvPr id="6" name="テキスト ボックス 5">
+            <a:extLst>
+              <a:ext uri="{FF2B5EF4-FFF2-40B4-BE49-F238E27FC236}">
+                <a16:creationId xmlns:a16="http://schemas.microsoft.com/office/drawing/2014/main" id="{55830AD6-028B-4C4E-80BF-B70DFC1C3A46}"/>
+              </a:ext>
+            </a:extLst>
+          </p:cNvPr>
+          <p:cNvSpPr txBox="1"/>
+          <p:nvPr/>
+        </p:nvSpPr>
+        <p:spPr>
+          <a:xfrm>
+            <a:off x="567542" y="1216429"/>
+            <a:ext cx="9110186" cy="461665"/>
+          </a:xfrm>
+          <a:prstGeom prst="rect">
+            <a:avLst/>
+          </a:prstGeom>
+          <a:noFill/>
+        </p:spPr>
+        <p:txBody>
+          <a:bodyPr wrap="none" rtlCol="0">
+            <a:spAutoFit/>
+          </a:bodyPr>
+          <a:lstStyle/>
+          <a:p>
+            <a:r>
+              <a:rPr lang="ja-JP" altLang="en-US" sz="2400" dirty="0"/>
+              <a:t>箱はこれらすべての力の合力によって移動することになります。</a:t>
+            </a:r>
+            <a:endParaRPr lang="en-US" altLang="ja-JP" sz="2400" dirty="0"/>
+          </a:p>
+        </p:txBody>
+      </p:sp>
+      <p:grpSp>
+        <p:nvGrpSpPr>
+          <p:cNvPr id="24" name="グループ化 23">
+            <a:extLst>
+              <a:ext uri="{FF2B5EF4-FFF2-40B4-BE49-F238E27FC236}">
+                <a16:creationId xmlns:a16="http://schemas.microsoft.com/office/drawing/2014/main" id="{F06D004C-863F-4C24-913D-03E56ABD465D}"/>
+              </a:ext>
+            </a:extLst>
+          </p:cNvPr>
+          <p:cNvGrpSpPr/>
+          <p:nvPr/>
+        </p:nvGrpSpPr>
+        <p:grpSpPr>
+          <a:xfrm>
+            <a:off x="3191434" y="2094804"/>
+            <a:ext cx="5118847" cy="3902585"/>
+            <a:chOff x="4294094" y="2417533"/>
+            <a:chExt cx="3239484" cy="2512821"/>
+          </a:xfrm>
+        </p:grpSpPr>
+        <p:pic>
+          <p:nvPicPr>
+            <p:cNvPr id="9" name="Picture 2" descr="押す人デフォルメイラスト｜無料イラスト・フリー素材なら「イラストAC」">
+              <a:extLst>
+                <a:ext uri="{FF2B5EF4-FFF2-40B4-BE49-F238E27FC236}">
+                  <a16:creationId xmlns:a16="http://schemas.microsoft.com/office/drawing/2014/main" id="{36EDE852-A892-452E-87CF-DCE2ECDA519F}"/>
+                </a:ext>
+              </a:extLst>
+            </p:cNvPr>
+            <p:cNvPicPr>
+              <a:picLocks noChangeAspect="1" noChangeArrowheads="1"/>
+            </p:cNvPicPr>
+            <p:nvPr/>
+          </p:nvPicPr>
+          <p:blipFill>
+            <a:blip r:embed="rId2">
+              <a:extLst>
+                <a:ext uri="{28A0092B-C50C-407E-A947-70E740481C1C}">
+                  <a14:useLocalDpi xmlns:a14="http://schemas.microsoft.com/office/drawing/2010/main" val="0"/>
+                </a:ext>
+              </a:extLst>
+            </a:blip>
+            <a:srcRect/>
+            <a:stretch>
+              <a:fillRect/>
+            </a:stretch>
+          </p:blipFill>
+          <p:spPr bwMode="auto">
+            <a:xfrm flipH="1">
+              <a:off x="4630704" y="2931457"/>
+              <a:ext cx="1835823" cy="1425389"/>
+            </a:xfrm>
+            <a:prstGeom prst="rect">
+              <a:avLst/>
+            </a:prstGeom>
+            <a:noFill/>
+            <a:extLst>
+              <a:ext uri="{909E8E84-426E-40DD-AFC4-6F175D3DCCD1}">
+                <a14:hiddenFill xmlns:a14="http://schemas.microsoft.com/office/drawing/2010/main">
+                  <a:solidFill>
+                    <a:srgbClr val="FFFFFF"/>
+                  </a:solidFill>
+                </a14:hiddenFill>
+              </a:ext>
+            </a:extLst>
+          </p:spPr>
+        </p:pic>
+        <p:sp>
+          <p:nvSpPr>
+            <p:cNvPr id="10" name="正方形/長方形 9">
+              <a:extLst>
+                <a:ext uri="{FF2B5EF4-FFF2-40B4-BE49-F238E27FC236}">
+                  <a16:creationId xmlns:a16="http://schemas.microsoft.com/office/drawing/2014/main" id="{A545BD1E-44B3-41BC-A8E9-9C2FFFB09E3B}"/>
+                </a:ext>
+              </a:extLst>
+            </p:cNvPr>
+            <p:cNvSpPr/>
+            <p:nvPr/>
+          </p:nvSpPr>
+          <p:spPr>
+            <a:xfrm>
+              <a:off x="4294094" y="4178673"/>
+              <a:ext cx="3239484" cy="63364"/>
+            </a:xfrm>
+            <a:prstGeom prst="rect">
+              <a:avLst/>
+            </a:prstGeom>
+          </p:spPr>
+          <p:style>
+            <a:lnRef idx="2">
+              <a:schemeClr val="dk1">
+                <a:shade val="50000"/>
+              </a:schemeClr>
+            </a:lnRef>
+            <a:fillRef idx="1">
+              <a:schemeClr val="dk1"/>
+            </a:fillRef>
+            <a:effectRef idx="0">
+              <a:schemeClr val="dk1"/>
+            </a:effectRef>
+            <a:fontRef idx="minor">
+              <a:schemeClr val="lt1"/>
+            </a:fontRef>
+          </p:style>
+          <p:txBody>
+            <a:bodyPr rtlCol="0" anchor="ctr"/>
+            <a:lstStyle/>
+            <a:p>
+              <a:pPr algn="ctr"/>
+              <a:endParaRPr kumimoji="1" lang="ja-JP" altLang="en-US"/>
+            </a:p>
+          </p:txBody>
+        </p:sp>
+        <p:cxnSp>
+          <p:nvCxnSpPr>
+            <p:cNvPr id="11" name="直線矢印コネクタ 10">
+              <a:extLst>
+                <a:ext uri="{FF2B5EF4-FFF2-40B4-BE49-F238E27FC236}">
+                  <a16:creationId xmlns:a16="http://schemas.microsoft.com/office/drawing/2014/main" id="{C053AD29-A9E9-432F-B197-86B2D9209990}"/>
+                </a:ext>
+              </a:extLst>
+            </p:cNvPr>
+            <p:cNvCxnSpPr>
+              <a:cxnSpLocks/>
+            </p:cNvCxnSpPr>
+            <p:nvPr/>
+          </p:nvCxnSpPr>
+          <p:spPr>
+            <a:xfrm>
+              <a:off x="5334000" y="3720353"/>
+              <a:ext cx="878541" cy="0"/>
+            </a:xfrm>
+            <a:prstGeom prst="straightConnector1">
+              <a:avLst/>
+            </a:prstGeom>
+            <a:ln w="38100">
+              <a:solidFill>
+                <a:srgbClr val="FF0000"/>
+              </a:solidFill>
+              <a:tailEnd type="triangle"/>
+            </a:ln>
+          </p:spPr>
+          <p:style>
+            <a:lnRef idx="1">
+              <a:schemeClr val="accent1"/>
+            </a:lnRef>
+            <a:fillRef idx="0">
+              <a:schemeClr val="accent1"/>
+            </a:fillRef>
+            <a:effectRef idx="0">
+              <a:schemeClr val="accent1"/>
+            </a:effectRef>
+            <a:fontRef idx="minor">
+              <a:schemeClr val="tx1"/>
+            </a:fontRef>
+          </p:style>
+        </p:cxnSp>
+        <p:sp>
+          <p:nvSpPr>
+            <p:cNvPr id="15" name="テキスト ボックス 14">
+              <a:extLst>
+                <a:ext uri="{FF2B5EF4-FFF2-40B4-BE49-F238E27FC236}">
+                  <a16:creationId xmlns:a16="http://schemas.microsoft.com/office/drawing/2014/main" id="{0FFDB24D-8055-4416-8EE0-68B7A876CE5A}"/>
+                </a:ext>
+              </a:extLst>
+            </p:cNvPr>
+            <p:cNvSpPr txBox="1"/>
+            <p:nvPr/>
+          </p:nvSpPr>
+          <p:spPr>
+            <a:xfrm>
+              <a:off x="5466786" y="3480681"/>
+              <a:ext cx="800219" cy="338554"/>
+            </a:xfrm>
+            <a:prstGeom prst="rect">
+              <a:avLst/>
+            </a:prstGeom>
+            <a:noFill/>
+          </p:spPr>
+          <p:txBody>
+            <a:bodyPr wrap="none" rtlCol="0">
+              <a:spAutoFit/>
+            </a:bodyPr>
+            <a:lstStyle/>
+            <a:p>
+              <a:r>
+                <a:rPr lang="ja-JP" altLang="en-US" sz="1600" b="1" dirty="0">
+                  <a:solidFill>
+                    <a:srgbClr val="FF0000"/>
+                  </a:solidFill>
+                </a:rPr>
+                <a:t>押す力</a:t>
+              </a:r>
+              <a:endParaRPr lang="en-US" altLang="ja-JP" sz="1600" b="1" dirty="0">
+                <a:solidFill>
+                  <a:srgbClr val="FF0000"/>
+                </a:solidFill>
+              </a:endParaRPr>
+            </a:p>
+          </p:txBody>
+        </p:sp>
+        <p:cxnSp>
+          <p:nvCxnSpPr>
+            <p:cNvPr id="16" name="直線矢印コネクタ 15">
+              <a:extLst>
+                <a:ext uri="{FF2B5EF4-FFF2-40B4-BE49-F238E27FC236}">
+                  <a16:creationId xmlns:a16="http://schemas.microsoft.com/office/drawing/2014/main" id="{76B7FE50-AECD-4964-BF32-250F1416896F}"/>
+                </a:ext>
+              </a:extLst>
+            </p:cNvPr>
+            <p:cNvCxnSpPr>
+              <a:cxnSpLocks/>
+            </p:cNvCxnSpPr>
+            <p:nvPr/>
+          </p:nvCxnSpPr>
+          <p:spPr>
+            <a:xfrm>
+              <a:off x="5773269" y="2417533"/>
+              <a:ext cx="0" cy="720000"/>
+            </a:xfrm>
+            <a:prstGeom prst="straightConnector1">
+              <a:avLst/>
+            </a:prstGeom>
+            <a:ln w="38100">
+              <a:solidFill>
+                <a:srgbClr val="7030A0"/>
+              </a:solidFill>
+              <a:tailEnd type="triangle"/>
+            </a:ln>
+          </p:spPr>
+          <p:style>
+            <a:lnRef idx="1">
+              <a:schemeClr val="accent1"/>
+            </a:lnRef>
+            <a:fillRef idx="0">
+              <a:schemeClr val="accent1"/>
+            </a:fillRef>
+            <a:effectRef idx="0">
+              <a:schemeClr val="accent1"/>
+            </a:effectRef>
+            <a:fontRef idx="minor">
+              <a:schemeClr val="tx1"/>
+            </a:fontRef>
+          </p:style>
+        </p:cxnSp>
+        <p:sp>
+          <p:nvSpPr>
+            <p:cNvPr id="18" name="テキスト ボックス 17">
+              <a:extLst>
+                <a:ext uri="{FF2B5EF4-FFF2-40B4-BE49-F238E27FC236}">
+                  <a16:creationId xmlns:a16="http://schemas.microsoft.com/office/drawing/2014/main" id="{857E510C-366D-4561-BE26-05804E3F7C19}"/>
+                </a:ext>
+              </a:extLst>
+            </p:cNvPr>
+            <p:cNvSpPr txBox="1"/>
+            <p:nvPr/>
+          </p:nvSpPr>
+          <p:spPr>
+            <a:xfrm>
+              <a:off x="5764304" y="2644809"/>
+              <a:ext cx="376570" cy="217990"/>
+            </a:xfrm>
+            <a:prstGeom prst="rect">
+              <a:avLst/>
+            </a:prstGeom>
+            <a:noFill/>
+          </p:spPr>
+          <p:txBody>
+            <a:bodyPr wrap="none" rtlCol="0">
+              <a:spAutoFit/>
+            </a:bodyPr>
+            <a:lstStyle/>
+            <a:p>
+              <a:r>
+                <a:rPr lang="ja-JP" altLang="en-US" sz="1600" b="1" dirty="0">
+                  <a:solidFill>
+                    <a:srgbClr val="7030A0"/>
+                  </a:solidFill>
+                </a:rPr>
+                <a:t>重さ</a:t>
+              </a:r>
+              <a:endParaRPr lang="en-US" altLang="ja-JP" sz="1600" b="1" dirty="0">
+                <a:solidFill>
+                  <a:srgbClr val="7030A0"/>
+                </a:solidFill>
+              </a:endParaRPr>
+            </a:p>
+          </p:txBody>
+        </p:sp>
+        <p:cxnSp>
+          <p:nvCxnSpPr>
+            <p:cNvPr id="19" name="直線矢印コネクタ 18">
+              <a:extLst>
+                <a:ext uri="{FF2B5EF4-FFF2-40B4-BE49-F238E27FC236}">
+                  <a16:creationId xmlns:a16="http://schemas.microsoft.com/office/drawing/2014/main" id="{95C2BC4F-EB7D-4C35-BF86-2A3E98B66B2D}"/>
+                </a:ext>
+              </a:extLst>
+            </p:cNvPr>
+            <p:cNvCxnSpPr>
+              <a:cxnSpLocks/>
+            </p:cNvCxnSpPr>
+            <p:nvPr/>
+          </p:nvCxnSpPr>
+          <p:spPr>
+            <a:xfrm flipV="1">
+              <a:off x="5764304" y="4210354"/>
+              <a:ext cx="1" cy="720000"/>
+            </a:xfrm>
+            <a:prstGeom prst="straightConnector1">
+              <a:avLst/>
+            </a:prstGeom>
+            <a:ln w="38100">
+              <a:solidFill>
+                <a:srgbClr val="00B050"/>
+              </a:solidFill>
+              <a:tailEnd type="triangle"/>
+            </a:ln>
+          </p:spPr>
+          <p:style>
+            <a:lnRef idx="1">
+              <a:schemeClr val="accent1"/>
+            </a:lnRef>
+            <a:fillRef idx="0">
+              <a:schemeClr val="accent1"/>
+            </a:fillRef>
+            <a:effectRef idx="0">
+              <a:schemeClr val="accent1"/>
+            </a:effectRef>
+            <a:fontRef idx="minor">
+              <a:schemeClr val="tx1"/>
+            </a:fontRef>
+          </p:style>
+        </p:cxnSp>
+        <p:sp>
+          <p:nvSpPr>
+            <p:cNvPr id="22" name="テキスト ボックス 21">
+              <a:extLst>
+                <a:ext uri="{FF2B5EF4-FFF2-40B4-BE49-F238E27FC236}">
+                  <a16:creationId xmlns:a16="http://schemas.microsoft.com/office/drawing/2014/main" id="{A932DCF6-B0A6-4B34-B314-671A7249CF6B}"/>
+                </a:ext>
+              </a:extLst>
+            </p:cNvPr>
+            <p:cNvSpPr txBox="1"/>
+            <p:nvPr/>
+          </p:nvSpPr>
+          <p:spPr>
+            <a:xfrm>
+              <a:off x="5764303" y="4463590"/>
+              <a:ext cx="1005403" cy="338554"/>
+            </a:xfrm>
+            <a:prstGeom prst="rect">
+              <a:avLst/>
+            </a:prstGeom>
+            <a:noFill/>
+          </p:spPr>
+          <p:txBody>
+            <a:bodyPr wrap="none" rtlCol="0">
+              <a:spAutoFit/>
+            </a:bodyPr>
+            <a:lstStyle/>
+            <a:p>
+              <a:r>
+                <a:rPr lang="ja-JP" altLang="en-US" sz="1600" b="1" dirty="0">
+                  <a:solidFill>
+                    <a:srgbClr val="00B050"/>
+                  </a:solidFill>
+                </a:rPr>
+                <a:t>垂直抗力</a:t>
+              </a:r>
+              <a:endParaRPr lang="en-US" altLang="ja-JP" sz="1600" b="1" dirty="0">
+                <a:solidFill>
+                  <a:srgbClr val="00B050"/>
+                </a:solidFill>
+              </a:endParaRPr>
+            </a:p>
+          </p:txBody>
+        </p:sp>
+        <p:cxnSp>
+          <p:nvCxnSpPr>
+            <p:cNvPr id="23" name="直線矢印コネクタ 22">
+              <a:extLst>
+                <a:ext uri="{FF2B5EF4-FFF2-40B4-BE49-F238E27FC236}">
+                  <a16:creationId xmlns:a16="http://schemas.microsoft.com/office/drawing/2014/main" id="{F99BC580-850D-4ED5-96CC-7F68D76A5B30}"/>
+                </a:ext>
+              </a:extLst>
+            </p:cNvPr>
+            <p:cNvCxnSpPr>
+              <a:cxnSpLocks/>
+            </p:cNvCxnSpPr>
+            <p:nvPr/>
+          </p:nvCxnSpPr>
+          <p:spPr>
+            <a:xfrm flipH="1">
+              <a:off x="6359339" y="4071929"/>
+              <a:ext cx="453152" cy="234"/>
+            </a:xfrm>
+            <a:prstGeom prst="straightConnector1">
+              <a:avLst/>
+            </a:prstGeom>
+            <a:ln w="38100">
+              <a:solidFill>
+                <a:srgbClr val="0070C0"/>
+              </a:solidFill>
+              <a:tailEnd type="triangle"/>
+            </a:ln>
+          </p:spPr>
+          <p:style>
+            <a:lnRef idx="1">
+              <a:schemeClr val="accent1"/>
+            </a:lnRef>
+            <a:fillRef idx="0">
+              <a:schemeClr val="accent1"/>
+            </a:fillRef>
+            <a:effectRef idx="0">
+              <a:schemeClr val="accent1"/>
+            </a:effectRef>
+            <a:fontRef idx="minor">
+              <a:schemeClr val="tx1"/>
+            </a:fontRef>
+          </p:style>
+        </p:cxnSp>
+        <p:sp>
+          <p:nvSpPr>
+            <p:cNvPr id="25" name="テキスト ボックス 24">
+              <a:extLst>
+                <a:ext uri="{FF2B5EF4-FFF2-40B4-BE49-F238E27FC236}">
+                  <a16:creationId xmlns:a16="http://schemas.microsoft.com/office/drawing/2014/main" id="{13FE4404-033A-4047-A7F8-4CCF2BE2FC14}"/>
+                </a:ext>
+              </a:extLst>
+            </p:cNvPr>
+            <p:cNvSpPr txBox="1"/>
+            <p:nvPr/>
+          </p:nvSpPr>
+          <p:spPr>
+            <a:xfrm>
+              <a:off x="6359339" y="3805181"/>
+              <a:ext cx="800219" cy="338554"/>
+            </a:xfrm>
+            <a:prstGeom prst="rect">
+              <a:avLst/>
+            </a:prstGeom>
+            <a:noFill/>
+          </p:spPr>
+          <p:txBody>
+            <a:bodyPr wrap="none" rtlCol="0">
+              <a:spAutoFit/>
+            </a:bodyPr>
+            <a:lstStyle/>
+            <a:p>
+              <a:r>
+                <a:rPr lang="ja-JP" altLang="en-US" sz="1600" b="1" dirty="0">
+                  <a:solidFill>
+                    <a:srgbClr val="0070C0"/>
+                  </a:solidFill>
+                </a:rPr>
+                <a:t>摩擦力</a:t>
+              </a:r>
+              <a:endParaRPr lang="en-US" altLang="ja-JP" sz="1600" b="1" dirty="0">
+                <a:solidFill>
+                  <a:srgbClr val="0070C0"/>
+                </a:solidFill>
+              </a:endParaRPr>
+            </a:p>
+          </p:txBody>
+        </p:sp>
+      </p:grpSp>
+      <p:sp>
+        <p:nvSpPr>
+          <p:cNvPr id="2" name="矢印: 右 1">
+            <a:extLst>
+              <a:ext uri="{FF2B5EF4-FFF2-40B4-BE49-F238E27FC236}">
+                <a16:creationId xmlns:a16="http://schemas.microsoft.com/office/drawing/2014/main" id="{4558DFAE-4389-4FA5-BAC7-C05247B75B10}"/>
+              </a:ext>
+            </a:extLst>
+          </p:cNvPr>
+          <p:cNvSpPr/>
+          <p:nvPr/>
+        </p:nvSpPr>
+        <p:spPr>
+          <a:xfrm>
+            <a:off x="6454816" y="2893289"/>
+            <a:ext cx="1909482" cy="1217899"/>
+          </a:xfrm>
+          <a:prstGeom prst="rightArrow">
+            <a:avLst/>
+          </a:prstGeom>
+        </p:spPr>
+        <p:style>
+          <a:lnRef idx="2">
+            <a:schemeClr val="accent4">
+              <a:shade val="50000"/>
+            </a:schemeClr>
+          </a:lnRef>
+          <a:fillRef idx="1">
+            <a:schemeClr val="accent4"/>
+          </a:fillRef>
+          <a:effectRef idx="0">
+            <a:schemeClr val="accent4"/>
+          </a:effectRef>
+          <a:fontRef idx="minor">
+            <a:schemeClr val="lt1"/>
+          </a:fontRef>
+        </p:style>
+        <p:txBody>
+          <a:bodyPr rtlCol="0" anchor="ctr"/>
+          <a:lstStyle/>
+          <a:p>
+            <a:pPr algn="ctr"/>
+            <a:r>
+              <a:rPr kumimoji="1" lang="ja-JP" altLang="en-US" b="1" dirty="0"/>
+              <a:t>合力</a:t>
+            </a:r>
+          </a:p>
+        </p:txBody>
+      </p:sp>
+    </p:spTree>
+    <p:extLst>
+      <p:ext uri="{BB962C8B-B14F-4D97-AF65-F5344CB8AC3E}">
+        <p14:creationId xmlns:p14="http://schemas.microsoft.com/office/powerpoint/2010/main" val="3380339136"/>
+      </p:ext>
+    </p:extLst>
+  </p:cSld>
+  <p:clrMapOvr>
+    <a:masterClrMapping/>
+  </p:clrMapOvr>
+</p:sld>
+</file>
+
+<file path=ppt/slides/slide5.xml><?xml version="1.0" encoding="utf-8"?>
+<p:sld xmlns:a="http://schemas.openxmlformats.org/drawingml/2006/main" xmlns:r="http://schemas.openxmlformats.org/officeDocument/2006/relationships" xmlns:p="http://schemas.openxmlformats.org/presentationml/2006/main">
+  <p:cSld>
+    <p:spTree>
+      <p:nvGrpSpPr>
+        <p:cNvPr id="1" name=""/>
+        <p:cNvGrpSpPr/>
+        <p:nvPr/>
+      </p:nvGrpSpPr>
+      <p:grpSpPr>
+        <a:xfrm>
+          <a:off x="0" y="0"/>
+          <a:ext cx="0" cy="0"/>
+          <a:chOff x="0" y="0"/>
+          <a:chExt cx="0" cy="0"/>
+        </a:xfrm>
+      </p:grpSpPr>
+      <p:sp>
+        <p:nvSpPr>
+          <p:cNvPr id="4" name="テキスト ボックス 3">
+            <a:extLst>
+              <a:ext uri="{FF2B5EF4-FFF2-40B4-BE49-F238E27FC236}">
+                <a16:creationId xmlns:a16="http://schemas.microsoft.com/office/drawing/2014/main" id="{5A13BF46-B8C5-48AA-8308-C9ECFF431A18}"/>
+              </a:ext>
+            </a:extLst>
+          </p:cNvPr>
+          <p:cNvSpPr txBox="1"/>
+          <p:nvPr/>
+        </p:nvSpPr>
+        <p:spPr>
+          <a:xfrm>
+            <a:off x="567542" y="491954"/>
+            <a:ext cx="1005403" cy="584775"/>
+          </a:xfrm>
+          <a:prstGeom prst="rect">
+            <a:avLst/>
+          </a:prstGeom>
+          <a:noFill/>
+        </p:spPr>
+        <p:txBody>
+          <a:bodyPr wrap="none" rtlCol="0">
+            <a:spAutoFit/>
+          </a:bodyPr>
+          <a:lstStyle/>
+          <a:p>
+            <a:r>
+              <a:rPr kumimoji="1" lang="ja-JP" altLang="en-US" sz="3200" b="1" u="sng" dirty="0"/>
+              <a:t>合力</a:t>
+            </a:r>
+            <a:endParaRPr kumimoji="1" lang="en-US" altLang="ja-JP" sz="3200" b="1" u="sng" dirty="0"/>
+          </a:p>
+        </p:txBody>
+      </p:sp>
+      <p:sp>
+        <p:nvSpPr>
+          <p:cNvPr id="6" name="テキスト ボックス 5">
+            <a:extLst>
+              <a:ext uri="{FF2B5EF4-FFF2-40B4-BE49-F238E27FC236}">
+                <a16:creationId xmlns:a16="http://schemas.microsoft.com/office/drawing/2014/main" id="{55830AD6-028B-4C4E-80BF-B70DFC1C3A46}"/>
+              </a:ext>
+            </a:extLst>
+          </p:cNvPr>
+          <p:cNvSpPr txBox="1"/>
+          <p:nvPr/>
+        </p:nvSpPr>
+        <p:spPr>
+          <a:xfrm>
+            <a:off x="567542" y="1216429"/>
+            <a:ext cx="6647974" cy="461665"/>
+          </a:xfrm>
+          <a:prstGeom prst="rect">
+            <a:avLst/>
+          </a:prstGeom>
+          <a:noFill/>
+        </p:spPr>
+        <p:txBody>
+          <a:bodyPr wrap="none" rtlCol="0">
+            <a:spAutoFit/>
+          </a:bodyPr>
+          <a:lstStyle/>
+          <a:p>
+            <a:r>
+              <a:rPr lang="ja-JP" altLang="en-US" sz="2400" dirty="0"/>
+              <a:t>合力を計算するには</a:t>
+            </a:r>
+            <a:r>
+              <a:rPr lang="ja-JP" altLang="en-US" sz="2400" b="1" dirty="0">
+                <a:solidFill>
+                  <a:srgbClr val="FF0000"/>
+                </a:solidFill>
+              </a:rPr>
+              <a:t>自由物体図</a:t>
+            </a:r>
+            <a:r>
+              <a:rPr lang="ja-JP" altLang="en-US" sz="2400" dirty="0"/>
+              <a:t>を記述します。</a:t>
+            </a:r>
+            <a:endParaRPr lang="en-US" altLang="ja-JP" sz="2400" dirty="0"/>
+          </a:p>
+        </p:txBody>
+      </p:sp>
+      <p:grpSp>
+        <p:nvGrpSpPr>
+          <p:cNvPr id="24" name="グループ化 23">
+            <a:extLst>
+              <a:ext uri="{FF2B5EF4-FFF2-40B4-BE49-F238E27FC236}">
+                <a16:creationId xmlns:a16="http://schemas.microsoft.com/office/drawing/2014/main" id="{F06D004C-863F-4C24-913D-03E56ABD465D}"/>
+              </a:ext>
+            </a:extLst>
+          </p:cNvPr>
+          <p:cNvGrpSpPr/>
+          <p:nvPr/>
+        </p:nvGrpSpPr>
+        <p:grpSpPr>
+          <a:xfrm>
+            <a:off x="4086286" y="2063233"/>
+            <a:ext cx="3833178" cy="3884589"/>
+            <a:chOff x="4860405" y="2397205"/>
+            <a:chExt cx="2425843" cy="2501234"/>
+          </a:xfrm>
+        </p:grpSpPr>
+        <p:cxnSp>
+          <p:nvCxnSpPr>
+            <p:cNvPr id="11" name="直線矢印コネクタ 10">
+              <a:extLst>
+                <a:ext uri="{FF2B5EF4-FFF2-40B4-BE49-F238E27FC236}">
+                  <a16:creationId xmlns:a16="http://schemas.microsoft.com/office/drawing/2014/main" id="{C053AD29-A9E9-432F-B197-86B2D9209990}"/>
+                </a:ext>
+              </a:extLst>
+            </p:cNvPr>
+            <p:cNvCxnSpPr>
+              <a:cxnSpLocks/>
+            </p:cNvCxnSpPr>
+            <p:nvPr/>
+          </p:nvCxnSpPr>
+          <p:spPr>
+            <a:xfrm>
+              <a:off x="6319482" y="3647822"/>
+              <a:ext cx="878541" cy="0"/>
+            </a:xfrm>
+            <a:prstGeom prst="straightConnector1">
+              <a:avLst/>
+            </a:prstGeom>
+            <a:ln w="38100">
+              <a:solidFill>
+                <a:srgbClr val="FF0000"/>
+              </a:solidFill>
+              <a:tailEnd type="triangle"/>
+            </a:ln>
+          </p:spPr>
+          <p:style>
+            <a:lnRef idx="1">
+              <a:schemeClr val="accent1"/>
+            </a:lnRef>
+            <a:fillRef idx="0">
+              <a:schemeClr val="accent1"/>
+            </a:fillRef>
+            <a:effectRef idx="0">
+              <a:schemeClr val="accent1"/>
+            </a:effectRef>
+            <a:fontRef idx="minor">
+              <a:schemeClr val="tx1"/>
+            </a:fontRef>
+          </p:style>
+        </p:cxnSp>
+        <p:sp>
+          <p:nvSpPr>
+            <p:cNvPr id="15" name="テキスト ボックス 14">
+              <a:extLst>
+                <a:ext uri="{FF2B5EF4-FFF2-40B4-BE49-F238E27FC236}">
+                  <a16:creationId xmlns:a16="http://schemas.microsoft.com/office/drawing/2014/main" id="{0FFDB24D-8055-4416-8EE0-68B7A876CE5A}"/>
+                </a:ext>
+              </a:extLst>
+            </p:cNvPr>
+            <p:cNvSpPr txBox="1"/>
+            <p:nvPr/>
+          </p:nvSpPr>
+          <p:spPr>
+            <a:xfrm>
+              <a:off x="6486029" y="3381799"/>
+              <a:ext cx="800219" cy="338554"/>
+            </a:xfrm>
+            <a:prstGeom prst="rect">
+              <a:avLst/>
+            </a:prstGeom>
+            <a:noFill/>
+          </p:spPr>
+          <p:txBody>
+            <a:bodyPr wrap="none" rtlCol="0">
+              <a:spAutoFit/>
+            </a:bodyPr>
+            <a:lstStyle/>
+            <a:p>
+              <a:r>
+                <a:rPr lang="ja-JP" altLang="en-US" sz="1600" b="1" dirty="0">
+                  <a:solidFill>
+                    <a:srgbClr val="FF0000"/>
+                  </a:solidFill>
+                </a:rPr>
+                <a:t>押す力</a:t>
+              </a:r>
+              <a:endParaRPr lang="en-US" altLang="ja-JP" sz="1600" b="1" dirty="0">
+                <a:solidFill>
+                  <a:srgbClr val="FF0000"/>
+                </a:solidFill>
+              </a:endParaRPr>
+            </a:p>
+          </p:txBody>
+        </p:sp>
+        <p:cxnSp>
+          <p:nvCxnSpPr>
+            <p:cNvPr id="16" name="直線矢印コネクタ 15">
+              <a:extLst>
+                <a:ext uri="{FF2B5EF4-FFF2-40B4-BE49-F238E27FC236}">
+                  <a16:creationId xmlns:a16="http://schemas.microsoft.com/office/drawing/2014/main" id="{76B7FE50-AECD-4964-BF32-250F1416896F}"/>
+                </a:ext>
+              </a:extLst>
+            </p:cNvPr>
+            <p:cNvCxnSpPr>
+              <a:cxnSpLocks/>
+            </p:cNvCxnSpPr>
+            <p:nvPr/>
+          </p:nvCxnSpPr>
+          <p:spPr>
+            <a:xfrm>
+              <a:off x="5818076" y="4178439"/>
+              <a:ext cx="0" cy="720000"/>
+            </a:xfrm>
+            <a:prstGeom prst="straightConnector1">
+              <a:avLst/>
+            </a:prstGeom>
+            <a:ln w="38100">
+              <a:solidFill>
+                <a:srgbClr val="7030A0"/>
+              </a:solidFill>
+              <a:tailEnd type="triangle"/>
+            </a:ln>
+          </p:spPr>
+          <p:style>
+            <a:lnRef idx="1">
+              <a:schemeClr val="accent1"/>
+            </a:lnRef>
+            <a:fillRef idx="0">
+              <a:schemeClr val="accent1"/>
+            </a:fillRef>
+            <a:effectRef idx="0">
+              <a:schemeClr val="accent1"/>
+            </a:effectRef>
+            <a:fontRef idx="minor">
+              <a:schemeClr val="tx1"/>
+            </a:fontRef>
+          </p:style>
+        </p:cxnSp>
+        <p:sp>
+          <p:nvSpPr>
+            <p:cNvPr id="18" name="テキスト ボックス 17">
+              <a:extLst>
+                <a:ext uri="{FF2B5EF4-FFF2-40B4-BE49-F238E27FC236}">
+                  <a16:creationId xmlns:a16="http://schemas.microsoft.com/office/drawing/2014/main" id="{857E510C-366D-4561-BE26-05804E3F7C19}"/>
+                </a:ext>
+              </a:extLst>
+            </p:cNvPr>
+            <p:cNvSpPr txBox="1"/>
+            <p:nvPr/>
+          </p:nvSpPr>
+          <p:spPr>
+            <a:xfrm>
+              <a:off x="5851412" y="4437035"/>
+              <a:ext cx="376570" cy="217990"/>
+            </a:xfrm>
+            <a:prstGeom prst="rect">
+              <a:avLst/>
+            </a:prstGeom>
+            <a:noFill/>
+          </p:spPr>
+          <p:txBody>
+            <a:bodyPr wrap="none" rtlCol="0">
+              <a:spAutoFit/>
+            </a:bodyPr>
+            <a:lstStyle/>
+            <a:p>
+              <a:r>
+                <a:rPr lang="ja-JP" altLang="en-US" sz="1600" b="1" dirty="0">
+                  <a:solidFill>
+                    <a:srgbClr val="7030A0"/>
+                  </a:solidFill>
+                </a:rPr>
+                <a:t>重さ</a:t>
+              </a:r>
+              <a:endParaRPr lang="en-US" altLang="ja-JP" sz="1600" b="1" dirty="0">
+                <a:solidFill>
+                  <a:srgbClr val="7030A0"/>
+                </a:solidFill>
+              </a:endParaRPr>
+            </a:p>
+          </p:txBody>
+        </p:sp>
+        <p:cxnSp>
+          <p:nvCxnSpPr>
+            <p:cNvPr id="19" name="直線矢印コネクタ 18">
+              <a:extLst>
+                <a:ext uri="{FF2B5EF4-FFF2-40B4-BE49-F238E27FC236}">
+                  <a16:creationId xmlns:a16="http://schemas.microsoft.com/office/drawing/2014/main" id="{95C2BC4F-EB7D-4C35-BF86-2A3E98B66B2D}"/>
+                </a:ext>
+              </a:extLst>
+            </p:cNvPr>
+            <p:cNvCxnSpPr>
+              <a:cxnSpLocks/>
+            </p:cNvCxnSpPr>
+            <p:nvPr/>
+          </p:nvCxnSpPr>
+          <p:spPr>
+            <a:xfrm flipV="1">
+              <a:off x="5818076" y="2397205"/>
+              <a:ext cx="1" cy="720000"/>
+            </a:xfrm>
+            <a:prstGeom prst="straightConnector1">
+              <a:avLst/>
+            </a:prstGeom>
+            <a:ln w="38100">
+              <a:solidFill>
+                <a:srgbClr val="00B050"/>
+              </a:solidFill>
+              <a:tailEnd type="triangle"/>
+            </a:ln>
+          </p:spPr>
+          <p:style>
+            <a:lnRef idx="1">
+              <a:schemeClr val="accent1"/>
+            </a:lnRef>
+            <a:fillRef idx="0">
+              <a:schemeClr val="accent1"/>
+            </a:fillRef>
+            <a:effectRef idx="0">
+              <a:schemeClr val="accent1"/>
+            </a:effectRef>
+            <a:fontRef idx="minor">
+              <a:schemeClr val="tx1"/>
+            </a:fontRef>
+          </p:style>
+        </p:cxnSp>
+        <p:sp>
+          <p:nvSpPr>
+            <p:cNvPr id="22" name="テキスト ボックス 21">
+              <a:extLst>
+                <a:ext uri="{FF2B5EF4-FFF2-40B4-BE49-F238E27FC236}">
+                  <a16:creationId xmlns:a16="http://schemas.microsoft.com/office/drawing/2014/main" id="{A932DCF6-B0A6-4B34-B314-671A7249CF6B}"/>
+                </a:ext>
+              </a:extLst>
+            </p:cNvPr>
+            <p:cNvSpPr txBox="1"/>
+            <p:nvPr/>
+          </p:nvSpPr>
+          <p:spPr>
+            <a:xfrm>
+              <a:off x="5818076" y="2678871"/>
+              <a:ext cx="1005403" cy="338554"/>
+            </a:xfrm>
+            <a:prstGeom prst="rect">
+              <a:avLst/>
+            </a:prstGeom>
+            <a:noFill/>
+          </p:spPr>
+          <p:txBody>
+            <a:bodyPr wrap="none" rtlCol="0">
+              <a:spAutoFit/>
+            </a:bodyPr>
+            <a:lstStyle/>
+            <a:p>
+              <a:r>
+                <a:rPr lang="ja-JP" altLang="en-US" sz="1600" b="1" dirty="0">
+                  <a:solidFill>
+                    <a:srgbClr val="00B050"/>
+                  </a:solidFill>
+                </a:rPr>
+                <a:t>垂直抗力</a:t>
+              </a:r>
+              <a:endParaRPr lang="en-US" altLang="ja-JP" sz="1600" b="1" dirty="0">
+                <a:solidFill>
+                  <a:srgbClr val="00B050"/>
+                </a:solidFill>
+              </a:endParaRPr>
+            </a:p>
+          </p:txBody>
+        </p:sp>
+        <p:cxnSp>
+          <p:nvCxnSpPr>
+            <p:cNvPr id="23" name="直線矢印コネクタ 22">
+              <a:extLst>
+                <a:ext uri="{FF2B5EF4-FFF2-40B4-BE49-F238E27FC236}">
+                  <a16:creationId xmlns:a16="http://schemas.microsoft.com/office/drawing/2014/main" id="{F99BC580-850D-4ED5-96CC-7F68D76A5B30}"/>
+                </a:ext>
+              </a:extLst>
+            </p:cNvPr>
+            <p:cNvCxnSpPr>
+              <a:cxnSpLocks/>
+            </p:cNvCxnSpPr>
+            <p:nvPr/>
+          </p:nvCxnSpPr>
+          <p:spPr>
+            <a:xfrm flipH="1">
+              <a:off x="4879035" y="3647822"/>
+              <a:ext cx="453152" cy="234"/>
+            </a:xfrm>
+            <a:prstGeom prst="straightConnector1">
+              <a:avLst/>
+            </a:prstGeom>
+            <a:ln w="38100">
+              <a:solidFill>
+                <a:srgbClr val="0070C0"/>
+              </a:solidFill>
+              <a:tailEnd type="triangle"/>
+            </a:ln>
+          </p:spPr>
+          <p:style>
+            <a:lnRef idx="1">
+              <a:schemeClr val="accent1"/>
+            </a:lnRef>
+            <a:fillRef idx="0">
+              <a:schemeClr val="accent1"/>
+            </a:fillRef>
+            <a:effectRef idx="0">
+              <a:schemeClr val="accent1"/>
+            </a:effectRef>
+            <a:fontRef idx="minor">
+              <a:schemeClr val="tx1"/>
+            </a:fontRef>
+          </p:style>
+        </p:cxnSp>
+        <p:sp>
+          <p:nvSpPr>
+            <p:cNvPr id="25" name="テキスト ボックス 24">
+              <a:extLst>
+                <a:ext uri="{FF2B5EF4-FFF2-40B4-BE49-F238E27FC236}">
+                  <a16:creationId xmlns:a16="http://schemas.microsoft.com/office/drawing/2014/main" id="{13FE4404-033A-4047-A7F8-4CCF2BE2FC14}"/>
+                </a:ext>
+              </a:extLst>
+            </p:cNvPr>
+            <p:cNvSpPr txBox="1"/>
+            <p:nvPr/>
+          </p:nvSpPr>
+          <p:spPr>
+            <a:xfrm>
+              <a:off x="4860405" y="3381799"/>
+              <a:ext cx="800219" cy="338554"/>
+            </a:xfrm>
+            <a:prstGeom prst="rect">
+              <a:avLst/>
+            </a:prstGeom>
+            <a:noFill/>
+          </p:spPr>
+          <p:txBody>
+            <a:bodyPr wrap="none" rtlCol="0">
+              <a:spAutoFit/>
+            </a:bodyPr>
+            <a:lstStyle/>
+            <a:p>
+              <a:r>
+                <a:rPr lang="ja-JP" altLang="en-US" sz="1600" b="1" dirty="0">
+                  <a:solidFill>
+                    <a:srgbClr val="0070C0"/>
+                  </a:solidFill>
+                </a:rPr>
+                <a:t>摩擦力</a:t>
+              </a:r>
+              <a:endParaRPr lang="en-US" altLang="ja-JP" sz="1600" b="1" dirty="0">
+                <a:solidFill>
+                  <a:srgbClr val="0070C0"/>
+                </a:solidFill>
+              </a:endParaRPr>
+            </a:p>
+          </p:txBody>
+        </p:sp>
+      </p:grpSp>
+      <p:sp>
+        <p:nvSpPr>
+          <p:cNvPr id="3" name="正方形/長方形 2">
+            <a:extLst>
+              <a:ext uri="{FF2B5EF4-FFF2-40B4-BE49-F238E27FC236}">
+                <a16:creationId xmlns:a16="http://schemas.microsoft.com/office/drawing/2014/main" id="{1CFA6CEB-78B3-47C3-B5E6-90A23A7C63F8}"/>
+              </a:ext>
+            </a:extLst>
+          </p:cNvPr>
+          <p:cNvSpPr/>
+          <p:nvPr/>
+        </p:nvSpPr>
+        <p:spPr>
+          <a:xfrm>
+            <a:off x="4812218" y="3181444"/>
+            <a:ext cx="1579617" cy="1648169"/>
+          </a:xfrm>
+          <a:prstGeom prst="rect">
+            <a:avLst/>
+          </a:prstGeom>
+          <a:noFill/>
+          <a:ln>
+            <a:solidFill>
+              <a:schemeClr val="tx1"/>
+            </a:solidFill>
+          </a:ln>
+        </p:spPr>
+        <p:style>
+          <a:lnRef idx="2">
+            <a:schemeClr val="accent1">
+              <a:shade val="50000"/>
+            </a:schemeClr>
+          </a:lnRef>
+          <a:fillRef idx="1">
+            <a:schemeClr val="accent1"/>
+          </a:fillRef>
+          <a:effectRef idx="0">
+            <a:schemeClr val="accent1"/>
+          </a:effectRef>
+          <a:fontRef idx="minor">
+            <a:schemeClr val="lt1"/>
+          </a:fontRef>
+        </p:style>
+        <p:txBody>
+          <a:bodyPr rtlCol="0" anchor="ctr"/>
+          <a:lstStyle/>
+          <a:p>
+            <a:pPr algn="ctr"/>
+            <a:r>
+              <a:rPr kumimoji="1" lang="ja-JP" altLang="en-US" dirty="0">
+                <a:solidFill>
+                  <a:schemeClr val="tx1"/>
+                </a:solidFill>
+              </a:rPr>
+              <a:t>箱</a:t>
+            </a:r>
+          </a:p>
+        </p:txBody>
+      </p:sp>
+      <p:sp>
+        <p:nvSpPr>
+          <p:cNvPr id="17" name="テキスト ボックス 16">
+            <a:extLst>
+              <a:ext uri="{FF2B5EF4-FFF2-40B4-BE49-F238E27FC236}">
+                <a16:creationId xmlns:a16="http://schemas.microsoft.com/office/drawing/2014/main" id="{A84FDA51-8639-49C8-AA1F-AE178B31291C}"/>
+              </a:ext>
+            </a:extLst>
+          </p:cNvPr>
+          <p:cNvSpPr txBox="1"/>
+          <p:nvPr/>
+        </p:nvSpPr>
+        <p:spPr>
+          <a:xfrm>
+            <a:off x="495531" y="4377604"/>
+            <a:ext cx="4185761" cy="1569660"/>
+          </a:xfrm>
+          <a:prstGeom prst="rect">
+            <a:avLst/>
+          </a:prstGeom>
+          <a:noFill/>
+        </p:spPr>
+        <p:txBody>
+          <a:bodyPr wrap="none" rtlCol="0">
+            <a:spAutoFit/>
+          </a:bodyPr>
+          <a:lstStyle/>
+          <a:p>
+            <a:r>
+              <a:rPr lang="ja-JP" altLang="en-US" sz="2400" dirty="0"/>
+              <a:t>自由物体図は、力を</a:t>
+            </a:r>
+            <a:endParaRPr lang="en-US" altLang="ja-JP" sz="2400" dirty="0"/>
+          </a:p>
+          <a:p>
+            <a:r>
+              <a:rPr lang="ja-JP" altLang="en-US" sz="2400" b="1" dirty="0">
+                <a:solidFill>
+                  <a:srgbClr val="FF0000"/>
+                </a:solidFill>
+              </a:rPr>
+              <a:t>・物体の中心から</a:t>
+            </a:r>
+            <a:endParaRPr lang="en-US" altLang="ja-JP" sz="2400" b="1" dirty="0">
+              <a:solidFill>
+                <a:srgbClr val="FF0000"/>
+              </a:solidFill>
+            </a:endParaRPr>
+          </a:p>
+          <a:p>
+            <a:r>
+              <a:rPr lang="ja-JP" altLang="en-US" sz="2400" b="1" dirty="0">
+                <a:solidFill>
+                  <a:srgbClr val="FF0000"/>
+                </a:solidFill>
+              </a:rPr>
+              <a:t>・力の強さと比例した長さで</a:t>
+            </a:r>
+            <a:endParaRPr lang="en-US" altLang="ja-JP" sz="2400" b="1" dirty="0">
+              <a:solidFill>
+                <a:srgbClr val="FF0000"/>
+              </a:solidFill>
+            </a:endParaRPr>
+          </a:p>
+          <a:p>
+            <a:r>
+              <a:rPr lang="ja-JP" altLang="en-US" sz="2400" dirty="0"/>
+              <a:t>記述した図です。</a:t>
+            </a:r>
+            <a:endParaRPr lang="en-US" altLang="ja-JP" sz="2400" dirty="0"/>
+          </a:p>
+        </p:txBody>
+      </p:sp>
+    </p:spTree>
+    <p:extLst>
+      <p:ext uri="{BB962C8B-B14F-4D97-AF65-F5344CB8AC3E}">
+        <p14:creationId xmlns:p14="http://schemas.microsoft.com/office/powerpoint/2010/main" val="3075618821"/>
+      </p:ext>
+    </p:extLst>
+  </p:cSld>
+  <p:clrMapOvr>
+    <a:masterClrMapping/>
+  </p:clrMapOvr>
+</p:sld>
+</file>
+
+<file path=ppt/slides/slide6.xml><?xml version="1.0" encoding="utf-8"?>
+<p:sld xmlns:a="http://schemas.openxmlformats.org/drawingml/2006/main" xmlns:r="http://schemas.openxmlformats.org/officeDocument/2006/relationships" xmlns:p="http://schemas.openxmlformats.org/presentationml/2006/main">
+  <p:cSld>
+    <p:spTree>
+      <p:nvGrpSpPr>
+        <p:cNvPr id="1" name=""/>
+        <p:cNvGrpSpPr/>
+        <p:nvPr/>
+      </p:nvGrpSpPr>
+      <p:grpSpPr>
+        <a:xfrm>
+          <a:off x="0" y="0"/>
+          <a:ext cx="0" cy="0"/>
+          <a:chOff x="0" y="0"/>
+          <a:chExt cx="0" cy="0"/>
+        </a:xfrm>
+      </p:grpSpPr>
+      <p:sp>
+        <p:nvSpPr>
+          <p:cNvPr id="4" name="テキスト ボックス 3">
+            <a:extLst>
+              <a:ext uri="{FF2B5EF4-FFF2-40B4-BE49-F238E27FC236}">
+                <a16:creationId xmlns:a16="http://schemas.microsoft.com/office/drawing/2014/main" id="{5A13BF46-B8C5-48AA-8308-C9ECFF431A18}"/>
+              </a:ext>
+            </a:extLst>
+          </p:cNvPr>
+          <p:cNvSpPr txBox="1"/>
+          <p:nvPr/>
+        </p:nvSpPr>
+        <p:spPr>
+          <a:xfrm>
+            <a:off x="567542" y="491954"/>
+            <a:ext cx="1943161" cy="584775"/>
+          </a:xfrm>
+          <a:prstGeom prst="rect">
+            <a:avLst/>
+          </a:prstGeom>
+          <a:noFill/>
+        </p:spPr>
+        <p:txBody>
+          <a:bodyPr wrap="none" rtlCol="0">
+            <a:spAutoFit/>
+          </a:bodyPr>
+          <a:lstStyle/>
+          <a:p>
+            <a:r>
+              <a:rPr kumimoji="1" lang="ja-JP" altLang="en-US" sz="3200" b="1" u="sng" dirty="0"/>
+              <a:t>合力 例題</a:t>
+            </a:r>
+            <a:endParaRPr kumimoji="1" lang="en-US" altLang="ja-JP" sz="3200" b="1" u="sng" dirty="0"/>
+          </a:p>
+        </p:txBody>
+      </p:sp>
+      <mc:AlternateContent xmlns:mc="http://schemas.openxmlformats.org/markup-compatibility/2006" xmlns:a14="http://schemas.microsoft.com/office/drawing/2010/main">
+        <mc:Choice Requires="a14">
           <p:sp>
             <p:nvSpPr>
               <p:cNvPr id="6" name="テキスト ボックス 5">
@@ -3923,7 +8571,7 @@
             </p:txBody>
           </p:sp>
         </mc:Choice>
-        <mc:Fallback>
+        <mc:Fallback xmlns="">
           <p:sp>
             <p:nvSpPr>
               <p:cNvPr id="6" name="テキスト ボックス 5">
@@ -3968,10 +8616,2893 @@
           </p:sp>
         </mc:Fallback>
       </mc:AlternateContent>
+      <p:sp>
+        <p:nvSpPr>
+          <p:cNvPr id="2" name="正方形/長方形 1">
+            <a:extLst>
+              <a:ext uri="{FF2B5EF4-FFF2-40B4-BE49-F238E27FC236}">
+                <a16:creationId xmlns:a16="http://schemas.microsoft.com/office/drawing/2014/main" id="{9969F263-444C-403B-A94E-2C8A9B1BB2AB}"/>
+              </a:ext>
+            </a:extLst>
+          </p:cNvPr>
+          <p:cNvSpPr/>
+          <p:nvPr/>
+        </p:nvSpPr>
+        <p:spPr>
+          <a:xfrm>
+            <a:off x="567542" y="5486401"/>
+            <a:ext cx="4894729" cy="73078"/>
+          </a:xfrm>
+          <a:prstGeom prst="rect">
+            <a:avLst/>
+          </a:prstGeom>
+        </p:spPr>
+        <p:style>
+          <a:lnRef idx="2">
+            <a:schemeClr val="accent1">
+              <a:shade val="50000"/>
+            </a:schemeClr>
+          </a:lnRef>
+          <a:fillRef idx="1">
+            <a:schemeClr val="accent1"/>
+          </a:fillRef>
+          <a:effectRef idx="0">
+            <a:schemeClr val="accent1"/>
+          </a:effectRef>
+          <a:fontRef idx="minor">
+            <a:schemeClr val="lt1"/>
+          </a:fontRef>
+        </p:style>
+        <p:txBody>
+          <a:bodyPr rtlCol="0" anchor="ctr"/>
+          <a:lstStyle/>
+          <a:p>
+            <a:pPr algn="ctr"/>
+            <a:endParaRPr kumimoji="1" lang="ja-JP" altLang="en-US"/>
+          </a:p>
+        </p:txBody>
+      </p:sp>
+      <p:sp>
+        <p:nvSpPr>
+          <p:cNvPr id="3" name="正方形/長方形 2">
+            <a:extLst>
+              <a:ext uri="{FF2B5EF4-FFF2-40B4-BE49-F238E27FC236}">
+                <a16:creationId xmlns:a16="http://schemas.microsoft.com/office/drawing/2014/main" id="{5D248159-D1DA-49E7-984D-40C755EC6B3D}"/>
+              </a:ext>
+            </a:extLst>
+          </p:cNvPr>
+          <p:cNvSpPr/>
+          <p:nvPr/>
+        </p:nvSpPr>
+        <p:spPr>
+          <a:xfrm>
+            <a:off x="2073612" y="4356848"/>
+            <a:ext cx="1174376" cy="1129553"/>
+          </a:xfrm>
+          <a:prstGeom prst="rect">
+            <a:avLst/>
+          </a:prstGeom>
+        </p:spPr>
+        <p:style>
+          <a:lnRef idx="2">
+            <a:schemeClr val="accent3">
+              <a:shade val="50000"/>
+            </a:schemeClr>
+          </a:lnRef>
+          <a:fillRef idx="1">
+            <a:schemeClr val="accent3"/>
+          </a:fillRef>
+          <a:effectRef idx="0">
+            <a:schemeClr val="accent3"/>
+          </a:effectRef>
+          <a:fontRef idx="minor">
+            <a:schemeClr val="lt1"/>
+          </a:fontRef>
+        </p:style>
+        <p:txBody>
+          <a:bodyPr rtlCol="0" anchor="ctr"/>
+          <a:lstStyle/>
+          <a:p>
+            <a:pPr algn="ctr"/>
+            <a:r>
+              <a:rPr kumimoji="1" lang="en-US" altLang="ja-JP" b="1" dirty="0"/>
+              <a:t>20kg</a:t>
+            </a:r>
+            <a:endParaRPr kumimoji="1" lang="ja-JP" altLang="en-US" b="1" dirty="0"/>
+          </a:p>
+        </p:txBody>
+      </p:sp>
+      <mc:AlternateContent xmlns:mc="http://schemas.openxmlformats.org/markup-compatibility/2006">
+        <mc:Choice xmlns:a14="http://schemas.microsoft.com/office/drawing/2010/main" Requires="a14">
+          <p:sp>
+            <p:nvSpPr>
+              <p:cNvPr id="8" name="テキスト ボックス 7">
+                <a:extLst>
+                  <a:ext uri="{FF2B5EF4-FFF2-40B4-BE49-F238E27FC236}">
+                    <a16:creationId xmlns:a16="http://schemas.microsoft.com/office/drawing/2014/main" id="{E875718C-F6A2-4FCA-9B38-2922A7FA5964}"/>
+                  </a:ext>
+                </a:extLst>
+              </p:cNvPr>
+              <p:cNvSpPr txBox="1"/>
+              <p:nvPr/>
+            </p:nvSpPr>
+            <p:spPr>
+              <a:xfrm>
+                <a:off x="3403299" y="4614592"/>
+                <a:ext cx="728084" cy="461665"/>
+              </a:xfrm>
+              <a:prstGeom prst="rect">
+                <a:avLst/>
+              </a:prstGeom>
+              <a:noFill/>
+            </p:spPr>
+            <p:txBody>
+              <a:bodyPr wrap="none" rtlCol="0">
+                <a:spAutoFit/>
+              </a:bodyPr>
+              <a:lstStyle/>
+              <a:p>
+                <a14:m>
+                  <m:oMathPara xmlns:m="http://schemas.openxmlformats.org/officeDocument/2006/math">
+                    <m:oMathParaPr>
+                      <m:jc m:val="centerGroup"/>
+                    </m:oMathParaPr>
+                    <m:oMath xmlns:m="http://schemas.openxmlformats.org/officeDocument/2006/math">
+                      <m:r>
+                        <a:rPr lang="en-US" altLang="ja-JP" sz="2400" i="1" dirty="0" smtClean="0">
+                          <a:latin typeface="Cambria Math" panose="02040503050406030204" pitchFamily="18" charset="0"/>
+                        </a:rPr>
+                        <m:t>60</m:t>
+                      </m:r>
+                      <m:r>
+                        <a:rPr lang="en-US" altLang="ja-JP" sz="2400" i="1" dirty="0">
+                          <a:latin typeface="Cambria Math" panose="02040503050406030204" pitchFamily="18" charset="0"/>
+                        </a:rPr>
+                        <m:t>°</m:t>
+                      </m:r>
+                    </m:oMath>
+                  </m:oMathPara>
+                </a14:m>
+                <a:endParaRPr lang="en-US" altLang="ja-JP" sz="2400" dirty="0"/>
+              </a:p>
+            </p:txBody>
+          </p:sp>
+        </mc:Choice>
+        <mc:Fallback>
+          <p:sp>
+            <p:nvSpPr>
+              <p:cNvPr id="8" name="テキスト ボックス 7">
+                <a:extLst>
+                  <a:ext uri="{FF2B5EF4-FFF2-40B4-BE49-F238E27FC236}">
+                    <a16:creationId xmlns:a16="http://schemas.microsoft.com/office/drawing/2014/main" id="{E875718C-F6A2-4FCA-9B38-2922A7FA5964}"/>
+                  </a:ext>
+                </a:extLst>
+              </p:cNvPr>
+              <p:cNvSpPr txBox="1">
+                <a:spLocks noRot="1" noChangeAspect="1" noMove="1" noResize="1" noEditPoints="1" noAdjustHandles="1" noChangeArrowheads="1" noChangeShapeType="1" noTextEdit="1"/>
+              </p:cNvSpPr>
+              <p:nvPr/>
+            </p:nvSpPr>
+            <p:spPr>
+              <a:xfrm>
+                <a:off x="3403299" y="4614592"/>
+                <a:ext cx="728084" cy="461665"/>
+              </a:xfrm>
+              <a:prstGeom prst="rect">
+                <a:avLst/>
+              </a:prstGeom>
+              <a:blipFill>
+                <a:blip r:embed="rId3"/>
+                <a:stretch>
+                  <a:fillRect/>
+                </a:stretch>
+              </a:blipFill>
+            </p:spPr>
+            <p:txBody>
+              <a:bodyPr/>
+              <a:lstStyle/>
+              <a:p>
+                <a:r>
+                  <a:rPr lang="ja-JP" altLang="en-US">
+                    <a:noFill/>
+                  </a:rPr>
+                  <a:t> </a:t>
+                </a:r>
+              </a:p>
+            </p:txBody>
+          </p:sp>
+        </mc:Fallback>
+      </mc:AlternateContent>
+      <p:cxnSp>
+        <p:nvCxnSpPr>
+          <p:cNvPr id="10" name="直線矢印コネクタ 9">
+            <a:extLst>
+              <a:ext uri="{FF2B5EF4-FFF2-40B4-BE49-F238E27FC236}">
+                <a16:creationId xmlns:a16="http://schemas.microsoft.com/office/drawing/2014/main" id="{5077C820-506E-4C68-AD02-1D94E0B9FFE9}"/>
+              </a:ext>
+            </a:extLst>
+          </p:cNvPr>
+          <p:cNvCxnSpPr>
+            <a:cxnSpLocks/>
+            <a:stCxn id="3" idx="3"/>
+          </p:cNvCxnSpPr>
+          <p:nvPr/>
+        </p:nvCxnSpPr>
+        <p:spPr>
+          <a:xfrm flipV="1">
+            <a:off x="3247988" y="3572436"/>
+            <a:ext cx="1332832" cy="1349189"/>
+          </a:xfrm>
+          <a:prstGeom prst="straightConnector1">
+            <a:avLst/>
+          </a:prstGeom>
+          <a:ln w="76200">
+            <a:solidFill>
+              <a:schemeClr val="accent2">
+                <a:lumMod val="75000"/>
+              </a:schemeClr>
+            </a:solidFill>
+            <a:tailEnd type="triangle"/>
+          </a:ln>
+        </p:spPr>
+        <p:style>
+          <a:lnRef idx="1">
+            <a:schemeClr val="accent1"/>
+          </a:lnRef>
+          <a:fillRef idx="0">
+            <a:schemeClr val="accent1"/>
+          </a:fillRef>
+          <a:effectRef idx="0">
+            <a:schemeClr val="accent1"/>
+          </a:effectRef>
+          <a:fontRef idx="minor">
+            <a:schemeClr val="tx1"/>
+          </a:fontRef>
+        </p:style>
+      </p:cxnSp>
+      <p:sp>
+        <p:nvSpPr>
+          <p:cNvPr id="15" name="テキスト ボックス 14">
+            <a:extLst>
+              <a:ext uri="{FF2B5EF4-FFF2-40B4-BE49-F238E27FC236}">
+                <a16:creationId xmlns:a16="http://schemas.microsoft.com/office/drawing/2014/main" id="{7A00EC97-2962-46C1-9297-D5B87EF8F61D}"/>
+              </a:ext>
+            </a:extLst>
+          </p:cNvPr>
+          <p:cNvSpPr txBox="1"/>
+          <p:nvPr/>
+        </p:nvSpPr>
+        <p:spPr>
+          <a:xfrm>
+            <a:off x="3297150" y="3762038"/>
+            <a:ext cx="762000" cy="369332"/>
+          </a:xfrm>
+          <a:prstGeom prst="rect">
+            <a:avLst/>
+          </a:prstGeom>
+          <a:noFill/>
+        </p:spPr>
+        <p:txBody>
+          <a:bodyPr wrap="square">
+            <a:spAutoFit/>
+          </a:bodyPr>
+          <a:lstStyle/>
+          <a:p>
+            <a:r>
+              <a:rPr lang="en-US" altLang="ja-JP" sz="1800" b="1" dirty="0"/>
+              <a:t>100N</a:t>
+            </a:r>
+            <a:endParaRPr lang="ja-JP" altLang="en-US" b="1" dirty="0"/>
+          </a:p>
+        </p:txBody>
+      </p:sp>
+      <p:sp>
+        <p:nvSpPr>
+          <p:cNvPr id="16" name="テキスト ボックス 15">
+            <a:extLst>
+              <a:ext uri="{FF2B5EF4-FFF2-40B4-BE49-F238E27FC236}">
+                <a16:creationId xmlns:a16="http://schemas.microsoft.com/office/drawing/2014/main" id="{87B09C6C-6D01-4872-BA3C-08158207807E}"/>
+              </a:ext>
+            </a:extLst>
+          </p:cNvPr>
+          <p:cNvSpPr txBox="1"/>
+          <p:nvPr/>
+        </p:nvSpPr>
+        <p:spPr>
+          <a:xfrm>
+            <a:off x="5974688" y="2846764"/>
+            <a:ext cx="5724644" cy="830997"/>
+          </a:xfrm>
+          <a:prstGeom prst="rect">
+            <a:avLst/>
+          </a:prstGeom>
+          <a:noFill/>
+        </p:spPr>
+        <p:txBody>
+          <a:bodyPr wrap="none" rtlCol="0">
+            <a:spAutoFit/>
+          </a:bodyPr>
+          <a:lstStyle/>
+          <a:p>
+            <a:r>
+              <a:rPr lang="ja-JP" altLang="en-US" sz="2400" b="1" dirty="0">
+                <a:solidFill>
+                  <a:srgbClr val="FF0000"/>
+                </a:solidFill>
+              </a:rPr>
+              <a:t>■解答</a:t>
+            </a:r>
+            <a:endParaRPr lang="en-US" altLang="ja-JP" sz="2400" b="1" dirty="0">
+              <a:solidFill>
+                <a:srgbClr val="FF0000"/>
+              </a:solidFill>
+            </a:endParaRPr>
+          </a:p>
+          <a:p>
+            <a:r>
+              <a:rPr lang="ja-JP" altLang="en-US" sz="2400" dirty="0"/>
+              <a:t>まずは問題を元に自由物体図を作ります</a:t>
+            </a:r>
+            <a:endParaRPr lang="en-US" altLang="ja-JP" sz="2400" dirty="0"/>
+          </a:p>
+        </p:txBody>
+      </p:sp>
     </p:spTree>
     <p:extLst>
       <p:ext uri="{BB962C8B-B14F-4D97-AF65-F5344CB8AC3E}">
         <p14:creationId xmlns:p14="http://schemas.microsoft.com/office/powerpoint/2010/main" val="1716098606"/>
+      </p:ext>
+    </p:extLst>
+  </p:cSld>
+  <p:clrMapOvr>
+    <a:masterClrMapping/>
+  </p:clrMapOvr>
+</p:sld>
+</file>
+
+<file path=ppt/slides/slide7.xml><?xml version="1.0" encoding="utf-8"?>
+<p:sld xmlns:a="http://schemas.openxmlformats.org/drawingml/2006/main" xmlns:r="http://schemas.openxmlformats.org/officeDocument/2006/relationships" xmlns:p="http://schemas.openxmlformats.org/presentationml/2006/main">
+  <p:cSld>
+    <p:spTree>
+      <p:nvGrpSpPr>
+        <p:cNvPr id="1" name=""/>
+        <p:cNvGrpSpPr/>
+        <p:nvPr/>
+      </p:nvGrpSpPr>
+      <p:grpSpPr>
+        <a:xfrm>
+          <a:off x="0" y="0"/>
+          <a:ext cx="0" cy="0"/>
+          <a:chOff x="0" y="0"/>
+          <a:chExt cx="0" cy="0"/>
+        </a:xfrm>
+      </p:grpSpPr>
+      <p:sp>
+        <p:nvSpPr>
+          <p:cNvPr id="4" name="テキスト ボックス 3">
+            <a:extLst>
+              <a:ext uri="{FF2B5EF4-FFF2-40B4-BE49-F238E27FC236}">
+                <a16:creationId xmlns:a16="http://schemas.microsoft.com/office/drawing/2014/main" id="{5A13BF46-B8C5-48AA-8308-C9ECFF431A18}"/>
+              </a:ext>
+            </a:extLst>
+          </p:cNvPr>
+          <p:cNvSpPr txBox="1"/>
+          <p:nvPr/>
+        </p:nvSpPr>
+        <p:spPr>
+          <a:xfrm>
+            <a:off x="567542" y="491954"/>
+            <a:ext cx="1943161" cy="584775"/>
+          </a:xfrm>
+          <a:prstGeom prst="rect">
+            <a:avLst/>
+          </a:prstGeom>
+          <a:noFill/>
+        </p:spPr>
+        <p:txBody>
+          <a:bodyPr wrap="none" rtlCol="0">
+            <a:spAutoFit/>
+          </a:bodyPr>
+          <a:lstStyle/>
+          <a:p>
+            <a:r>
+              <a:rPr kumimoji="1" lang="ja-JP" altLang="en-US" sz="3200" b="1" u="sng" dirty="0"/>
+              <a:t>合力 例題</a:t>
+            </a:r>
+            <a:endParaRPr kumimoji="1" lang="en-US" altLang="ja-JP" sz="3200" b="1" u="sng" dirty="0"/>
+          </a:p>
+        </p:txBody>
+      </p:sp>
+      <mc:AlternateContent xmlns:mc="http://schemas.openxmlformats.org/markup-compatibility/2006" xmlns:a14="http://schemas.microsoft.com/office/drawing/2010/main">
+        <mc:Choice Requires="a14">
+          <p:sp>
+            <p:nvSpPr>
+              <p:cNvPr id="6" name="テキスト ボックス 5">
+                <a:extLst>
+                  <a:ext uri="{FF2B5EF4-FFF2-40B4-BE49-F238E27FC236}">
+                    <a16:creationId xmlns:a16="http://schemas.microsoft.com/office/drawing/2014/main" id="{55830AD6-028B-4C4E-80BF-B70DFC1C3A46}"/>
+                  </a:ext>
+                </a:extLst>
+              </p:cNvPr>
+              <p:cNvSpPr txBox="1"/>
+              <p:nvPr/>
+            </p:nvSpPr>
+            <p:spPr>
+              <a:xfrm>
+                <a:off x="567542" y="1216429"/>
+                <a:ext cx="8026556" cy="1200329"/>
+              </a:xfrm>
+              <a:prstGeom prst="rect">
+                <a:avLst/>
+              </a:prstGeom>
+              <a:noFill/>
+            </p:spPr>
+            <p:txBody>
+              <a:bodyPr wrap="none" rtlCol="0">
+                <a:spAutoFit/>
+              </a:bodyPr>
+              <a:lstStyle/>
+              <a:p>
+                <a:r>
+                  <a:rPr lang="ja-JP" altLang="en-US" sz="2400" dirty="0"/>
+                  <a:t>ゲーム中の氷の床の上に</a:t>
+                </a:r>
+                <a:r>
+                  <a:rPr lang="en-US" altLang="ja-JP" sz="2400" dirty="0"/>
+                  <a:t>20kg</a:t>
+                </a:r>
+                <a:r>
+                  <a:rPr lang="ja-JP" altLang="en-US" sz="2400" dirty="0"/>
+                  <a:t>の金属の箱があり、</a:t>
+                </a:r>
+                <a:endParaRPr lang="en-US" altLang="ja-JP" sz="2400" dirty="0"/>
+              </a:p>
+              <a:p>
+                <a:r>
+                  <a:rPr lang="ja-JP" altLang="en-US" sz="2400" dirty="0"/>
+                  <a:t>この箱にロープをつけて</a:t>
+                </a:r>
+                <a:r>
+                  <a:rPr lang="en-US" altLang="ja-JP" sz="2400" dirty="0"/>
+                  <a:t>100N</a:t>
+                </a:r>
+                <a:r>
+                  <a:rPr lang="ja-JP" altLang="en-US" sz="2400" dirty="0"/>
+                  <a:t>の力で引っ張ります。</a:t>
+                </a:r>
+                <a:endParaRPr lang="en-US" altLang="ja-JP" sz="2400" dirty="0"/>
+              </a:p>
+              <a:p>
+                <a:r>
+                  <a:rPr lang="ja-JP" altLang="en-US" sz="2400" dirty="0"/>
+                  <a:t>ロープの角度が</a:t>
+                </a:r>
+                <a14:m>
+                  <m:oMath xmlns:m="http://schemas.openxmlformats.org/officeDocument/2006/math">
+                    <m:r>
+                      <a:rPr lang="en-US" altLang="ja-JP" sz="2400" i="1" dirty="0" smtClean="0">
+                        <a:latin typeface="Cambria Math" panose="02040503050406030204" pitchFamily="18" charset="0"/>
+                      </a:rPr>
+                      <m:t>60</m:t>
+                    </m:r>
+                    <m:r>
+                      <a:rPr lang="en-US" altLang="ja-JP" sz="2400" i="1" dirty="0">
+                        <a:latin typeface="Cambria Math" panose="02040503050406030204" pitchFamily="18" charset="0"/>
+                      </a:rPr>
+                      <m:t>°</m:t>
+                    </m:r>
+                  </m:oMath>
+                </a14:m>
+                <a:r>
+                  <a:rPr lang="ja-JP" altLang="en-US" sz="2400" dirty="0"/>
+                  <a:t>のとき、箱に働く合力を求めなさい。</a:t>
+                </a:r>
+                <a:endParaRPr lang="en-US" altLang="ja-JP" sz="2400" dirty="0"/>
+              </a:p>
+            </p:txBody>
+          </p:sp>
+        </mc:Choice>
+        <mc:Fallback xmlns="">
+          <p:sp>
+            <p:nvSpPr>
+              <p:cNvPr id="6" name="テキスト ボックス 5">
+                <a:extLst>
+                  <a:ext uri="{FF2B5EF4-FFF2-40B4-BE49-F238E27FC236}">
+                    <a16:creationId xmlns:a16="http://schemas.microsoft.com/office/drawing/2014/main" id="{55830AD6-028B-4C4E-80BF-B70DFC1C3A46}"/>
+                  </a:ext>
+                </a:extLst>
+              </p:cNvPr>
+              <p:cNvSpPr txBox="1">
+                <a:spLocks noRot="1" noChangeAspect="1" noMove="1" noResize="1" noEditPoints="1" noAdjustHandles="1" noChangeArrowheads="1" noChangeShapeType="1" noTextEdit="1"/>
+              </p:cNvSpPr>
+              <p:nvPr/>
+            </p:nvSpPr>
+            <p:spPr>
+              <a:xfrm>
+                <a:off x="567542" y="1216429"/>
+                <a:ext cx="8026556" cy="1200329"/>
+              </a:xfrm>
+              <a:prstGeom prst="rect">
+                <a:avLst/>
+              </a:prstGeom>
+              <a:blipFill>
+                <a:blip r:embed="rId2"/>
+                <a:stretch>
+                  <a:fillRect l="-1139" t="-4082" r="-228" b="-11224"/>
+                </a:stretch>
+              </a:blipFill>
+            </p:spPr>
+            <p:txBody>
+              <a:bodyPr/>
+              <a:lstStyle/>
+              <a:p>
+                <a:r>
+                  <a:rPr lang="ja-JP" altLang="en-US">
+                    <a:noFill/>
+                  </a:rPr>
+                  <a:t> </a:t>
+                </a:r>
+              </a:p>
+            </p:txBody>
+          </p:sp>
+        </mc:Fallback>
+      </mc:AlternateContent>
+      <p:sp>
+        <p:nvSpPr>
+          <p:cNvPr id="3" name="正方形/長方形 2">
+            <a:extLst>
+              <a:ext uri="{FF2B5EF4-FFF2-40B4-BE49-F238E27FC236}">
+                <a16:creationId xmlns:a16="http://schemas.microsoft.com/office/drawing/2014/main" id="{5D248159-D1DA-49E7-984D-40C755EC6B3D}"/>
+              </a:ext>
+            </a:extLst>
+          </p:cNvPr>
+          <p:cNvSpPr/>
+          <p:nvPr/>
+        </p:nvSpPr>
+        <p:spPr>
+          <a:xfrm>
+            <a:off x="2073612" y="4356848"/>
+            <a:ext cx="1174376" cy="1129553"/>
+          </a:xfrm>
+          <a:prstGeom prst="rect">
+            <a:avLst/>
+          </a:prstGeom>
+        </p:spPr>
+        <p:style>
+          <a:lnRef idx="2">
+            <a:schemeClr val="accent3">
+              <a:shade val="50000"/>
+            </a:schemeClr>
+          </a:lnRef>
+          <a:fillRef idx="1">
+            <a:schemeClr val="accent3"/>
+          </a:fillRef>
+          <a:effectRef idx="0">
+            <a:schemeClr val="accent3"/>
+          </a:effectRef>
+          <a:fontRef idx="minor">
+            <a:schemeClr val="lt1"/>
+          </a:fontRef>
+        </p:style>
+        <p:txBody>
+          <a:bodyPr rtlCol="0" anchor="ctr"/>
+          <a:lstStyle/>
+          <a:p>
+            <a:pPr algn="ctr"/>
+            <a:r>
+              <a:rPr kumimoji="1" lang="en-US" altLang="ja-JP" b="1" dirty="0"/>
+              <a:t>20kg</a:t>
+            </a:r>
+            <a:endParaRPr kumimoji="1" lang="ja-JP" altLang="en-US" b="1" dirty="0"/>
+          </a:p>
+        </p:txBody>
+      </p:sp>
+      <mc:AlternateContent xmlns:mc="http://schemas.openxmlformats.org/markup-compatibility/2006">
+        <mc:Choice xmlns:a14="http://schemas.microsoft.com/office/drawing/2010/main" Requires="a14">
+          <p:sp>
+            <p:nvSpPr>
+              <p:cNvPr id="16" name="テキスト ボックス 15">
+                <a:extLst>
+                  <a:ext uri="{FF2B5EF4-FFF2-40B4-BE49-F238E27FC236}">
+                    <a16:creationId xmlns:a16="http://schemas.microsoft.com/office/drawing/2014/main" id="{87B09C6C-6D01-4872-BA3C-08158207807E}"/>
+                  </a:ext>
+                </a:extLst>
+              </p:cNvPr>
+              <p:cNvSpPr txBox="1"/>
+              <p:nvPr/>
+            </p:nvSpPr>
+            <p:spPr>
+              <a:xfrm>
+                <a:off x="5974688" y="2846764"/>
+                <a:ext cx="4178131" cy="2008370"/>
+              </a:xfrm>
+              <a:prstGeom prst="rect">
+                <a:avLst/>
+              </a:prstGeom>
+              <a:noFill/>
+            </p:spPr>
+            <p:txBody>
+              <a:bodyPr wrap="none" rtlCol="0">
+                <a:spAutoFit/>
+              </a:bodyPr>
+              <a:lstStyle/>
+              <a:p>
+                <a:r>
+                  <a:rPr lang="ja-JP" altLang="en-US" sz="2400" b="1" dirty="0">
+                    <a:solidFill>
+                      <a:srgbClr val="FF0000"/>
+                    </a:solidFill>
+                  </a:rPr>
+                  <a:t>■解答</a:t>
+                </a:r>
+                <a:endParaRPr lang="en-US" altLang="ja-JP" sz="2400" b="1" dirty="0">
+                  <a:solidFill>
+                    <a:srgbClr val="FF0000"/>
+                  </a:solidFill>
+                </a:endParaRPr>
+              </a:p>
+              <a:p>
+                <a:r>
+                  <a:rPr lang="ja-JP" altLang="en-US" sz="2400" dirty="0"/>
+                  <a:t>箱の重さは、</a:t>
+                </a:r>
+                <a:endParaRPr lang="en-US" altLang="ja-JP" sz="2400" dirty="0"/>
+              </a:p>
+              <a:p>
+                <a14:m>
+                  <m:oMath xmlns:m="http://schemas.openxmlformats.org/officeDocument/2006/math">
+                    <m:r>
+                      <a:rPr lang="en-US" altLang="ja-JP" sz="2400" b="0" i="1" smtClean="0">
+                        <a:latin typeface="Cambria Math" panose="02040503050406030204" pitchFamily="18" charset="0"/>
+                      </a:rPr>
+                      <m:t>20</m:t>
+                    </m:r>
+                    <m:r>
+                      <a:rPr lang="en-US" altLang="ja-JP" sz="2400" b="0" i="1" smtClean="0">
+                        <a:latin typeface="Cambria Math" panose="02040503050406030204" pitchFamily="18" charset="0"/>
+                      </a:rPr>
+                      <m:t>𝑘𝑔</m:t>
+                    </m:r>
+                    <m:r>
+                      <a:rPr lang="en-US" altLang="ja-JP" sz="2400" i="1">
+                        <a:latin typeface="Cambria Math" panose="02040503050406030204" pitchFamily="18" charset="0"/>
+                      </a:rPr>
+                      <m:t>×</m:t>
+                    </m:r>
+                    <m:sSup>
+                      <m:sSupPr>
+                        <m:ctrlPr>
+                          <a:rPr lang="en-US" altLang="ja-JP" sz="2400" b="0" i="1" smtClean="0">
+                            <a:latin typeface="Cambria Math" panose="02040503050406030204" pitchFamily="18" charset="0"/>
+                          </a:rPr>
+                        </m:ctrlPr>
+                      </m:sSupPr>
+                      <m:e>
+                        <m:r>
+                          <a:rPr lang="en-US" altLang="ja-JP" sz="2400" b="0" i="1" smtClean="0">
+                            <a:latin typeface="Cambria Math" panose="02040503050406030204" pitchFamily="18" charset="0"/>
+                          </a:rPr>
+                          <m:t>−9.8</m:t>
+                        </m:r>
+                        <m:r>
+                          <a:rPr lang="en-US" altLang="ja-JP" sz="2400" b="0" i="1" smtClean="0">
+                            <a:latin typeface="Cambria Math" panose="02040503050406030204" pitchFamily="18" charset="0"/>
+                          </a:rPr>
+                          <m:t>𝑚</m:t>
+                        </m:r>
+                        <m:r>
+                          <a:rPr lang="en-US" altLang="ja-JP" sz="2400" b="0" i="1" smtClean="0">
+                            <a:latin typeface="Cambria Math" panose="02040503050406030204" pitchFamily="18" charset="0"/>
+                          </a:rPr>
+                          <m:t>/</m:t>
+                        </m:r>
+                        <m:r>
+                          <a:rPr lang="ja-JP" altLang="en-US" sz="2400" i="1">
+                            <a:latin typeface="Cambria Math" panose="02040503050406030204" pitchFamily="18" charset="0"/>
+                          </a:rPr>
+                          <m:t>秒</m:t>
+                        </m:r>
+                      </m:e>
+                      <m:sup>
+                        <m:r>
+                          <a:rPr lang="en-US" altLang="ja-JP" sz="2400" b="0" i="1" smtClean="0">
+                            <a:latin typeface="Cambria Math" panose="02040503050406030204" pitchFamily="18" charset="0"/>
+                          </a:rPr>
+                          <m:t>2</m:t>
+                        </m:r>
+                      </m:sup>
+                    </m:sSup>
+                    <m:r>
+                      <a:rPr lang="en-US" altLang="ja-JP" sz="2400" b="0" i="1" smtClean="0">
+                        <a:latin typeface="Cambria Math" panose="02040503050406030204" pitchFamily="18" charset="0"/>
+                      </a:rPr>
+                      <m:t>=−196</m:t>
+                    </m:r>
+                    <m:r>
+                      <a:rPr lang="en-US" altLang="ja-JP" sz="2400" b="0" i="1" smtClean="0">
+                        <a:latin typeface="Cambria Math" panose="02040503050406030204" pitchFamily="18" charset="0"/>
+                      </a:rPr>
+                      <m:t>𝑁</m:t>
+                    </m:r>
+                  </m:oMath>
+                </a14:m>
+                <a:r>
+                  <a:rPr lang="en-US" altLang="ja-JP" sz="2400" b="0" dirty="0"/>
+                  <a:t> </a:t>
+                </a:r>
+              </a:p>
+              <a:p>
+                <a:r>
+                  <a:rPr lang="ja-JP" altLang="en-US" sz="2400" dirty="0"/>
+                  <a:t>重さは必ず下向きなので、</a:t>
+                </a:r>
+                <a:endParaRPr lang="en-US" altLang="ja-JP" sz="2400" dirty="0"/>
+              </a:p>
+              <a:p>
+                <a14:m>
+                  <m:oMath xmlns:m="http://schemas.openxmlformats.org/officeDocument/2006/math">
+                    <m:r>
+                      <a:rPr lang="en-US" altLang="ja-JP" sz="2400" i="1">
+                        <a:latin typeface="Cambria Math" panose="02040503050406030204" pitchFamily="18" charset="0"/>
+                      </a:rPr>
+                      <m:t>[0, </m:t>
+                    </m:r>
+                    <m:r>
+                      <a:rPr lang="en-US" altLang="ja-JP" sz="2400" b="0" i="1" smtClean="0">
+                        <a:latin typeface="Cambria Math" panose="02040503050406030204" pitchFamily="18" charset="0"/>
+                      </a:rPr>
+                      <m:t>−</m:t>
+                    </m:r>
+                    <m:r>
+                      <a:rPr lang="en-US" altLang="ja-JP" sz="2400" i="1">
+                        <a:latin typeface="Cambria Math" panose="02040503050406030204" pitchFamily="18" charset="0"/>
+                      </a:rPr>
+                      <m:t>196</m:t>
+                    </m:r>
+                    <m:r>
+                      <a:rPr lang="en-US" altLang="ja-JP" sz="2400" i="1">
+                        <a:latin typeface="Cambria Math" panose="02040503050406030204" pitchFamily="18" charset="0"/>
+                      </a:rPr>
+                      <m:t>𝑁</m:t>
+                    </m:r>
+                    <m:r>
+                      <a:rPr lang="en-US" altLang="ja-JP" sz="2400" i="1">
+                        <a:latin typeface="Cambria Math" panose="02040503050406030204" pitchFamily="18" charset="0"/>
+                      </a:rPr>
+                      <m:t>]</m:t>
+                    </m:r>
+                  </m:oMath>
+                </a14:m>
+                <a:r>
+                  <a:rPr lang="en-US" altLang="ja-JP" sz="2400" dirty="0"/>
+                  <a:t> </a:t>
+                </a:r>
+              </a:p>
+            </p:txBody>
+          </p:sp>
+        </mc:Choice>
+        <mc:Fallback>
+          <p:sp>
+            <p:nvSpPr>
+              <p:cNvPr id="16" name="テキスト ボックス 15">
+                <a:extLst>
+                  <a:ext uri="{FF2B5EF4-FFF2-40B4-BE49-F238E27FC236}">
+                    <a16:creationId xmlns:a16="http://schemas.microsoft.com/office/drawing/2014/main" id="{87B09C6C-6D01-4872-BA3C-08158207807E}"/>
+                  </a:ext>
+                </a:extLst>
+              </p:cNvPr>
+              <p:cNvSpPr txBox="1">
+                <a:spLocks noRot="1" noChangeAspect="1" noMove="1" noResize="1" noEditPoints="1" noAdjustHandles="1" noChangeArrowheads="1" noChangeShapeType="1" noTextEdit="1"/>
+              </p:cNvSpPr>
+              <p:nvPr/>
+            </p:nvSpPr>
+            <p:spPr>
+              <a:xfrm>
+                <a:off x="5974688" y="2846764"/>
+                <a:ext cx="4178131" cy="2008370"/>
+              </a:xfrm>
+              <a:prstGeom prst="rect">
+                <a:avLst/>
+              </a:prstGeom>
+              <a:blipFill>
+                <a:blip r:embed="rId3"/>
+                <a:stretch>
+                  <a:fillRect l="-2190" t="-2432" b="-3343"/>
+                </a:stretch>
+              </a:blipFill>
+            </p:spPr>
+            <p:txBody>
+              <a:bodyPr/>
+              <a:lstStyle/>
+              <a:p>
+                <a:r>
+                  <a:rPr lang="ja-JP" altLang="en-US">
+                    <a:noFill/>
+                  </a:rPr>
+                  <a:t> </a:t>
+                </a:r>
+              </a:p>
+            </p:txBody>
+          </p:sp>
+        </mc:Fallback>
+      </mc:AlternateContent>
+      <p:cxnSp>
+        <p:nvCxnSpPr>
+          <p:cNvPr id="11" name="直線矢印コネクタ 10">
+            <a:extLst>
+              <a:ext uri="{FF2B5EF4-FFF2-40B4-BE49-F238E27FC236}">
+                <a16:creationId xmlns:a16="http://schemas.microsoft.com/office/drawing/2014/main" id="{E2AE73B5-EBF3-47A8-BFAA-6C3D70578B76}"/>
+              </a:ext>
+            </a:extLst>
+          </p:cNvPr>
+          <p:cNvCxnSpPr>
+            <a:cxnSpLocks/>
+          </p:cNvCxnSpPr>
+          <p:nvPr/>
+        </p:nvCxnSpPr>
+        <p:spPr>
+          <a:xfrm>
+            <a:off x="2605331" y="5486401"/>
+            <a:ext cx="0" cy="1118210"/>
+          </a:xfrm>
+          <a:prstGeom prst="straightConnector1">
+            <a:avLst/>
+          </a:prstGeom>
+          <a:ln w="38100">
+            <a:solidFill>
+              <a:srgbClr val="7030A0"/>
+            </a:solidFill>
+            <a:tailEnd type="triangle"/>
+          </a:ln>
+        </p:spPr>
+        <p:style>
+          <a:lnRef idx="1">
+            <a:schemeClr val="accent1"/>
+          </a:lnRef>
+          <a:fillRef idx="0">
+            <a:schemeClr val="accent1"/>
+          </a:fillRef>
+          <a:effectRef idx="0">
+            <a:schemeClr val="accent1"/>
+          </a:effectRef>
+          <a:fontRef idx="minor">
+            <a:schemeClr val="tx1"/>
+          </a:fontRef>
+        </p:style>
+      </p:cxnSp>
+      <mc:AlternateContent xmlns:mc="http://schemas.openxmlformats.org/markup-compatibility/2006">
+        <mc:Choice xmlns:a14="http://schemas.microsoft.com/office/drawing/2010/main" Requires="a14">
+          <p:sp>
+            <p:nvSpPr>
+              <p:cNvPr id="12" name="テキスト ボックス 11">
+                <a:extLst>
+                  <a:ext uri="{FF2B5EF4-FFF2-40B4-BE49-F238E27FC236}">
+                    <a16:creationId xmlns:a16="http://schemas.microsoft.com/office/drawing/2014/main" id="{5F9C7478-8BE7-40E1-AC23-D3482AE8FC24}"/>
+                  </a:ext>
+                </a:extLst>
+              </p:cNvPr>
+              <p:cNvSpPr txBox="1"/>
+              <p:nvPr/>
+            </p:nvSpPr>
+            <p:spPr>
+              <a:xfrm>
+                <a:off x="2660800" y="5860840"/>
+                <a:ext cx="1174376" cy="369332"/>
+              </a:xfrm>
+              <a:prstGeom prst="rect">
+                <a:avLst/>
+              </a:prstGeom>
+              <a:noFill/>
+            </p:spPr>
+            <p:txBody>
+              <a:bodyPr wrap="square">
+                <a:spAutoFit/>
+              </a:bodyPr>
+              <a:lstStyle/>
+              <a:p>
+                <a14:m>
+                  <m:oMath xmlns:m="http://schemas.openxmlformats.org/officeDocument/2006/math">
+                    <m:r>
+                      <a:rPr lang="en-US" altLang="ja-JP" sz="1800" i="1" smtClean="0">
+                        <a:solidFill>
+                          <a:srgbClr val="7030A0"/>
+                        </a:solidFill>
+                        <a:latin typeface="Cambria Math" panose="02040503050406030204" pitchFamily="18" charset="0"/>
+                      </a:rPr>
+                      <m:t>[0, </m:t>
+                    </m:r>
+                    <m:r>
+                      <a:rPr lang="en-US" altLang="ja-JP" sz="1800" b="0" i="1" smtClean="0">
+                        <a:solidFill>
+                          <a:srgbClr val="7030A0"/>
+                        </a:solidFill>
+                        <a:latin typeface="Cambria Math" panose="02040503050406030204" pitchFamily="18" charset="0"/>
+                      </a:rPr>
+                      <m:t>−</m:t>
+                    </m:r>
+                    <m:r>
+                      <a:rPr lang="en-US" altLang="ja-JP" sz="1800" i="1" smtClean="0">
+                        <a:solidFill>
+                          <a:srgbClr val="7030A0"/>
+                        </a:solidFill>
+                        <a:latin typeface="Cambria Math" panose="02040503050406030204" pitchFamily="18" charset="0"/>
+                      </a:rPr>
+                      <m:t>196</m:t>
+                    </m:r>
+                    <m:r>
+                      <a:rPr lang="en-US" altLang="ja-JP" sz="1800" i="1" smtClean="0">
+                        <a:solidFill>
+                          <a:srgbClr val="7030A0"/>
+                        </a:solidFill>
+                        <a:latin typeface="Cambria Math" panose="02040503050406030204" pitchFamily="18" charset="0"/>
+                      </a:rPr>
+                      <m:t>𝑁</m:t>
+                    </m:r>
+                    <m:r>
+                      <a:rPr lang="en-US" altLang="ja-JP" sz="1800" i="1" smtClean="0">
+                        <a:solidFill>
+                          <a:srgbClr val="7030A0"/>
+                        </a:solidFill>
+                        <a:latin typeface="Cambria Math" panose="02040503050406030204" pitchFamily="18" charset="0"/>
+                      </a:rPr>
+                      <m:t>]</m:t>
+                    </m:r>
+                  </m:oMath>
+                </a14:m>
+                <a:r>
+                  <a:rPr lang="en-US" altLang="ja-JP" sz="1800" dirty="0">
+                    <a:solidFill>
+                      <a:srgbClr val="7030A0"/>
+                    </a:solidFill>
+                  </a:rPr>
+                  <a:t> </a:t>
+                </a:r>
+              </a:p>
+            </p:txBody>
+          </p:sp>
+        </mc:Choice>
+        <mc:Fallback>
+          <p:sp>
+            <p:nvSpPr>
+              <p:cNvPr id="12" name="テキスト ボックス 11">
+                <a:extLst>
+                  <a:ext uri="{FF2B5EF4-FFF2-40B4-BE49-F238E27FC236}">
+                    <a16:creationId xmlns:a16="http://schemas.microsoft.com/office/drawing/2014/main" id="{5F9C7478-8BE7-40E1-AC23-D3482AE8FC24}"/>
+                  </a:ext>
+                </a:extLst>
+              </p:cNvPr>
+              <p:cNvSpPr txBox="1">
+                <a:spLocks noRot="1" noChangeAspect="1" noMove="1" noResize="1" noEditPoints="1" noAdjustHandles="1" noChangeArrowheads="1" noChangeShapeType="1" noTextEdit="1"/>
+              </p:cNvSpPr>
+              <p:nvPr/>
+            </p:nvSpPr>
+            <p:spPr>
+              <a:xfrm>
+                <a:off x="2660800" y="5860840"/>
+                <a:ext cx="1174376" cy="369332"/>
+              </a:xfrm>
+              <a:prstGeom prst="rect">
+                <a:avLst/>
+              </a:prstGeom>
+              <a:blipFill>
+                <a:blip r:embed="rId4"/>
+                <a:stretch>
+                  <a:fillRect l="-1554" r="-10881" b="-14754"/>
+                </a:stretch>
+              </a:blipFill>
+            </p:spPr>
+            <p:txBody>
+              <a:bodyPr/>
+              <a:lstStyle/>
+              <a:p>
+                <a:r>
+                  <a:rPr lang="ja-JP" altLang="en-US">
+                    <a:noFill/>
+                  </a:rPr>
+                  <a:t> </a:t>
+                </a:r>
+              </a:p>
+            </p:txBody>
+          </p:sp>
+        </mc:Fallback>
+      </mc:AlternateContent>
+      <p:sp>
+        <p:nvSpPr>
+          <p:cNvPr id="13" name="テキスト ボックス 12">
+            <a:extLst>
+              <a:ext uri="{FF2B5EF4-FFF2-40B4-BE49-F238E27FC236}">
+                <a16:creationId xmlns:a16="http://schemas.microsoft.com/office/drawing/2014/main" id="{BF0ACBCE-2D2F-433A-B104-99D2859E34E3}"/>
+              </a:ext>
+            </a:extLst>
+          </p:cNvPr>
+          <p:cNvSpPr txBox="1"/>
+          <p:nvPr/>
+        </p:nvSpPr>
+        <p:spPr>
+          <a:xfrm>
+            <a:off x="5956169" y="5285140"/>
+            <a:ext cx="4801314" cy="1200329"/>
+          </a:xfrm>
+          <a:prstGeom prst="rect">
+            <a:avLst/>
+          </a:prstGeom>
+          <a:noFill/>
+        </p:spPr>
+        <p:txBody>
+          <a:bodyPr wrap="none" rtlCol="0">
+            <a:spAutoFit/>
+          </a:bodyPr>
+          <a:lstStyle/>
+          <a:p>
+            <a:r>
+              <a:rPr lang="en-US" altLang="ja-JP" sz="2400" b="1" dirty="0">
+                <a:solidFill>
+                  <a:srgbClr val="00B050"/>
+                </a:solidFill>
+              </a:rPr>
+              <a:t>MEMO</a:t>
+            </a:r>
+          </a:p>
+          <a:p>
+            <a:r>
+              <a:rPr lang="ja-JP" altLang="en-US" sz="2400" dirty="0"/>
+              <a:t>力には向きもあるので、</a:t>
+            </a:r>
+            <a:endParaRPr lang="en-US" altLang="ja-JP" sz="2400" dirty="0"/>
+          </a:p>
+          <a:p>
+            <a:r>
+              <a:rPr lang="ja-JP" altLang="en-US" sz="2400" dirty="0"/>
+              <a:t>必ず</a:t>
+            </a:r>
+            <a:r>
+              <a:rPr lang="ja-JP" altLang="en-US" sz="2400" b="1" dirty="0">
+                <a:solidFill>
+                  <a:srgbClr val="FF0000"/>
+                </a:solidFill>
+              </a:rPr>
+              <a:t>ベクトルで表記</a:t>
+            </a:r>
+            <a:r>
+              <a:rPr lang="ja-JP" altLang="en-US" sz="2400" dirty="0"/>
+              <a:t>しましょう。</a:t>
+            </a:r>
+            <a:endParaRPr lang="en-US" altLang="ja-JP" sz="2400" dirty="0"/>
+          </a:p>
+        </p:txBody>
+      </p:sp>
+    </p:spTree>
+    <p:extLst>
+      <p:ext uri="{BB962C8B-B14F-4D97-AF65-F5344CB8AC3E}">
+        <p14:creationId xmlns:p14="http://schemas.microsoft.com/office/powerpoint/2010/main" val="3948009318"/>
+      </p:ext>
+    </p:extLst>
+  </p:cSld>
+  <p:clrMapOvr>
+    <a:masterClrMapping/>
+  </p:clrMapOvr>
+</p:sld>
+</file>
+
+<file path=ppt/slides/slide8.xml><?xml version="1.0" encoding="utf-8"?>
+<p:sld xmlns:a="http://schemas.openxmlformats.org/drawingml/2006/main" xmlns:r="http://schemas.openxmlformats.org/officeDocument/2006/relationships" xmlns:p="http://schemas.openxmlformats.org/presentationml/2006/main">
+  <p:cSld>
+    <p:spTree>
+      <p:nvGrpSpPr>
+        <p:cNvPr id="1" name=""/>
+        <p:cNvGrpSpPr/>
+        <p:nvPr/>
+      </p:nvGrpSpPr>
+      <p:grpSpPr>
+        <a:xfrm>
+          <a:off x="0" y="0"/>
+          <a:ext cx="0" cy="0"/>
+          <a:chOff x="0" y="0"/>
+          <a:chExt cx="0" cy="0"/>
+        </a:xfrm>
+      </p:grpSpPr>
+      <p:sp>
+        <p:nvSpPr>
+          <p:cNvPr id="4" name="テキスト ボックス 3">
+            <a:extLst>
+              <a:ext uri="{FF2B5EF4-FFF2-40B4-BE49-F238E27FC236}">
+                <a16:creationId xmlns:a16="http://schemas.microsoft.com/office/drawing/2014/main" id="{5A13BF46-B8C5-48AA-8308-C9ECFF431A18}"/>
+              </a:ext>
+            </a:extLst>
+          </p:cNvPr>
+          <p:cNvSpPr txBox="1"/>
+          <p:nvPr/>
+        </p:nvSpPr>
+        <p:spPr>
+          <a:xfrm>
+            <a:off x="567542" y="491954"/>
+            <a:ext cx="1943161" cy="584775"/>
+          </a:xfrm>
+          <a:prstGeom prst="rect">
+            <a:avLst/>
+          </a:prstGeom>
+          <a:noFill/>
+        </p:spPr>
+        <p:txBody>
+          <a:bodyPr wrap="none" rtlCol="0">
+            <a:spAutoFit/>
+          </a:bodyPr>
+          <a:lstStyle/>
+          <a:p>
+            <a:r>
+              <a:rPr kumimoji="1" lang="ja-JP" altLang="en-US" sz="3200" b="1" u="sng" dirty="0"/>
+              <a:t>合力 例題</a:t>
+            </a:r>
+            <a:endParaRPr kumimoji="1" lang="en-US" altLang="ja-JP" sz="3200" b="1" u="sng" dirty="0"/>
+          </a:p>
+        </p:txBody>
+      </p:sp>
+      <mc:AlternateContent xmlns:mc="http://schemas.openxmlformats.org/markup-compatibility/2006" xmlns:a14="http://schemas.microsoft.com/office/drawing/2010/main">
+        <mc:Choice Requires="a14">
+          <p:sp>
+            <p:nvSpPr>
+              <p:cNvPr id="6" name="テキスト ボックス 5">
+                <a:extLst>
+                  <a:ext uri="{FF2B5EF4-FFF2-40B4-BE49-F238E27FC236}">
+                    <a16:creationId xmlns:a16="http://schemas.microsoft.com/office/drawing/2014/main" id="{55830AD6-028B-4C4E-80BF-B70DFC1C3A46}"/>
+                  </a:ext>
+                </a:extLst>
+              </p:cNvPr>
+              <p:cNvSpPr txBox="1"/>
+              <p:nvPr/>
+            </p:nvSpPr>
+            <p:spPr>
+              <a:xfrm>
+                <a:off x="567542" y="1216429"/>
+                <a:ext cx="8026556" cy="1200329"/>
+              </a:xfrm>
+              <a:prstGeom prst="rect">
+                <a:avLst/>
+              </a:prstGeom>
+              <a:noFill/>
+            </p:spPr>
+            <p:txBody>
+              <a:bodyPr wrap="none" rtlCol="0">
+                <a:spAutoFit/>
+              </a:bodyPr>
+              <a:lstStyle/>
+              <a:p>
+                <a:r>
+                  <a:rPr lang="ja-JP" altLang="en-US" sz="2400" dirty="0"/>
+                  <a:t>ゲーム中の氷の床の上に</a:t>
+                </a:r>
+                <a:r>
+                  <a:rPr lang="en-US" altLang="ja-JP" sz="2400" dirty="0"/>
+                  <a:t>20kg</a:t>
+                </a:r>
+                <a:r>
+                  <a:rPr lang="ja-JP" altLang="en-US" sz="2400" dirty="0"/>
+                  <a:t>の金属の箱があり、</a:t>
+                </a:r>
+                <a:endParaRPr lang="en-US" altLang="ja-JP" sz="2400" dirty="0"/>
+              </a:p>
+              <a:p>
+                <a:r>
+                  <a:rPr lang="ja-JP" altLang="en-US" sz="2400" dirty="0"/>
+                  <a:t>この箱にロープをつけて</a:t>
+                </a:r>
+                <a:r>
+                  <a:rPr lang="en-US" altLang="ja-JP" sz="2400" dirty="0"/>
+                  <a:t>100N</a:t>
+                </a:r>
+                <a:r>
+                  <a:rPr lang="ja-JP" altLang="en-US" sz="2400" dirty="0"/>
+                  <a:t>の力で引っ張ります。</a:t>
+                </a:r>
+                <a:endParaRPr lang="en-US" altLang="ja-JP" sz="2400" dirty="0"/>
+              </a:p>
+              <a:p>
+                <a:r>
+                  <a:rPr lang="ja-JP" altLang="en-US" sz="2400" dirty="0"/>
+                  <a:t>ロープの角度が</a:t>
+                </a:r>
+                <a14:m>
+                  <m:oMath xmlns:m="http://schemas.openxmlformats.org/officeDocument/2006/math">
+                    <m:r>
+                      <a:rPr lang="en-US" altLang="ja-JP" sz="2400" i="1" dirty="0" smtClean="0">
+                        <a:latin typeface="Cambria Math" panose="02040503050406030204" pitchFamily="18" charset="0"/>
+                      </a:rPr>
+                      <m:t>60</m:t>
+                    </m:r>
+                    <m:r>
+                      <a:rPr lang="en-US" altLang="ja-JP" sz="2400" i="1" dirty="0">
+                        <a:latin typeface="Cambria Math" panose="02040503050406030204" pitchFamily="18" charset="0"/>
+                      </a:rPr>
+                      <m:t>°</m:t>
+                    </m:r>
+                  </m:oMath>
+                </a14:m>
+                <a:r>
+                  <a:rPr lang="ja-JP" altLang="en-US" sz="2400" dirty="0"/>
+                  <a:t>のとき、箱に働く合力を求めなさい。</a:t>
+                </a:r>
+                <a:endParaRPr lang="en-US" altLang="ja-JP" sz="2400" dirty="0"/>
+              </a:p>
+            </p:txBody>
+          </p:sp>
+        </mc:Choice>
+        <mc:Fallback xmlns="">
+          <p:sp>
+            <p:nvSpPr>
+              <p:cNvPr id="6" name="テキスト ボックス 5">
+                <a:extLst>
+                  <a:ext uri="{FF2B5EF4-FFF2-40B4-BE49-F238E27FC236}">
+                    <a16:creationId xmlns:a16="http://schemas.microsoft.com/office/drawing/2014/main" id="{55830AD6-028B-4C4E-80BF-B70DFC1C3A46}"/>
+                  </a:ext>
+                </a:extLst>
+              </p:cNvPr>
+              <p:cNvSpPr txBox="1">
+                <a:spLocks noRot="1" noChangeAspect="1" noMove="1" noResize="1" noEditPoints="1" noAdjustHandles="1" noChangeArrowheads="1" noChangeShapeType="1" noTextEdit="1"/>
+              </p:cNvSpPr>
+              <p:nvPr/>
+            </p:nvSpPr>
+            <p:spPr>
+              <a:xfrm>
+                <a:off x="567542" y="1216429"/>
+                <a:ext cx="8026556" cy="1200329"/>
+              </a:xfrm>
+              <a:prstGeom prst="rect">
+                <a:avLst/>
+              </a:prstGeom>
+              <a:blipFill>
+                <a:blip r:embed="rId2"/>
+                <a:stretch>
+                  <a:fillRect l="-1139" t="-4082" r="-228" b="-11224"/>
+                </a:stretch>
+              </a:blipFill>
+            </p:spPr>
+            <p:txBody>
+              <a:bodyPr/>
+              <a:lstStyle/>
+              <a:p>
+                <a:r>
+                  <a:rPr lang="ja-JP" altLang="en-US">
+                    <a:noFill/>
+                  </a:rPr>
+                  <a:t> </a:t>
+                </a:r>
+              </a:p>
+            </p:txBody>
+          </p:sp>
+        </mc:Fallback>
+      </mc:AlternateContent>
+      <p:sp>
+        <p:nvSpPr>
+          <p:cNvPr id="3" name="正方形/長方形 2">
+            <a:extLst>
+              <a:ext uri="{FF2B5EF4-FFF2-40B4-BE49-F238E27FC236}">
+                <a16:creationId xmlns:a16="http://schemas.microsoft.com/office/drawing/2014/main" id="{5D248159-D1DA-49E7-984D-40C755EC6B3D}"/>
+              </a:ext>
+            </a:extLst>
+          </p:cNvPr>
+          <p:cNvSpPr/>
+          <p:nvPr/>
+        </p:nvSpPr>
+        <p:spPr>
+          <a:xfrm>
+            <a:off x="2073612" y="4356848"/>
+            <a:ext cx="1174376" cy="1129553"/>
+          </a:xfrm>
+          <a:prstGeom prst="rect">
+            <a:avLst/>
+          </a:prstGeom>
+        </p:spPr>
+        <p:style>
+          <a:lnRef idx="2">
+            <a:schemeClr val="accent3">
+              <a:shade val="50000"/>
+            </a:schemeClr>
+          </a:lnRef>
+          <a:fillRef idx="1">
+            <a:schemeClr val="accent3"/>
+          </a:fillRef>
+          <a:effectRef idx="0">
+            <a:schemeClr val="accent3"/>
+          </a:effectRef>
+          <a:fontRef idx="minor">
+            <a:schemeClr val="lt1"/>
+          </a:fontRef>
+        </p:style>
+        <p:txBody>
+          <a:bodyPr rtlCol="0" anchor="ctr"/>
+          <a:lstStyle/>
+          <a:p>
+            <a:pPr algn="ctr"/>
+            <a:r>
+              <a:rPr kumimoji="1" lang="en-US" altLang="ja-JP" b="1" dirty="0"/>
+              <a:t>20kg</a:t>
+            </a:r>
+            <a:endParaRPr kumimoji="1" lang="ja-JP" altLang="en-US" b="1" dirty="0"/>
+          </a:p>
+        </p:txBody>
+      </p:sp>
+      <mc:AlternateContent xmlns:mc="http://schemas.openxmlformats.org/markup-compatibility/2006">
+        <mc:Choice xmlns:a14="http://schemas.microsoft.com/office/drawing/2010/main" Requires="a14">
+          <p:sp>
+            <p:nvSpPr>
+              <p:cNvPr id="16" name="テキスト ボックス 15">
+                <a:extLst>
+                  <a:ext uri="{FF2B5EF4-FFF2-40B4-BE49-F238E27FC236}">
+                    <a16:creationId xmlns:a16="http://schemas.microsoft.com/office/drawing/2014/main" id="{87B09C6C-6D01-4872-BA3C-08158207807E}"/>
+                  </a:ext>
+                </a:extLst>
+              </p:cNvPr>
+              <p:cNvSpPr txBox="1"/>
+              <p:nvPr/>
+            </p:nvSpPr>
+            <p:spPr>
+              <a:xfrm>
+                <a:off x="5974688" y="2846764"/>
+                <a:ext cx="5341527" cy="1938992"/>
+              </a:xfrm>
+              <a:prstGeom prst="rect">
+                <a:avLst/>
+              </a:prstGeom>
+              <a:noFill/>
+            </p:spPr>
+            <p:txBody>
+              <a:bodyPr wrap="none" rtlCol="0">
+                <a:spAutoFit/>
+              </a:bodyPr>
+              <a:lstStyle/>
+              <a:p>
+                <a:r>
+                  <a:rPr lang="ja-JP" altLang="en-US" sz="2400" b="1" dirty="0">
+                    <a:solidFill>
+                      <a:srgbClr val="FF0000"/>
+                    </a:solidFill>
+                  </a:rPr>
+                  <a:t>■解答</a:t>
+                </a:r>
+              </a:p>
+              <a:p>
+                <a:r>
+                  <a:rPr lang="ja-JP" altLang="en-US" sz="2400" dirty="0"/>
+                  <a:t>ロープで引く力は</a:t>
+                </a:r>
+                <a14:m>
+                  <m:oMath xmlns:m="http://schemas.openxmlformats.org/officeDocument/2006/math">
+                    <m:r>
+                      <a:rPr lang="en-US" altLang="ja-JP" sz="2400" i="1" dirty="0" smtClean="0">
+                        <a:latin typeface="Cambria Math" panose="02040503050406030204" pitchFamily="18" charset="0"/>
+                      </a:rPr>
+                      <m:t>100</m:t>
+                    </m:r>
+                    <m:r>
+                      <a:rPr lang="en-US" altLang="ja-JP" sz="2400" i="1" dirty="0" smtClean="0">
+                        <a:latin typeface="Cambria Math" panose="02040503050406030204" pitchFamily="18" charset="0"/>
+                      </a:rPr>
+                      <m:t>𝑁</m:t>
+                    </m:r>
+                    <m:r>
+                      <a:rPr lang="en-US" altLang="ja-JP" sz="2400" i="1" dirty="0" smtClean="0">
+                        <a:latin typeface="Cambria Math" panose="02040503050406030204" pitchFamily="18" charset="0"/>
+                      </a:rPr>
+                      <m:t>@60°</m:t>
+                    </m:r>
+                  </m:oMath>
+                </a14:m>
+                <a:r>
+                  <a:rPr lang="ja-JP" altLang="en-US" sz="2400" dirty="0"/>
+                  <a:t>なので、</a:t>
+                </a:r>
+                <a:endParaRPr lang="en-US" altLang="ja-JP" sz="2400" dirty="0"/>
+              </a:p>
+              <a:p>
+                <a14:m>
+                  <m:oMath xmlns:m="http://schemas.openxmlformats.org/officeDocument/2006/math">
+                    <m:r>
+                      <a:rPr lang="en-US" altLang="ja-JP" sz="2400" i="1" smtClean="0">
+                        <a:latin typeface="Cambria Math" panose="02040503050406030204" pitchFamily="18" charset="0"/>
+                      </a:rPr>
+                      <m:t>[</m:t>
+                    </m:r>
+                    <m:r>
+                      <a:rPr lang="en-US" altLang="ja-JP" sz="2400" b="0" i="1" smtClean="0">
+                        <a:latin typeface="Cambria Math" panose="02040503050406030204" pitchFamily="18" charset="0"/>
+                      </a:rPr>
+                      <m:t>100</m:t>
+                    </m:r>
+                    <m:r>
+                      <a:rPr lang="en-US" altLang="ja-JP" sz="2400" b="0" i="1" smtClean="0">
+                        <a:latin typeface="Cambria Math" panose="02040503050406030204" pitchFamily="18" charset="0"/>
+                      </a:rPr>
+                      <m:t>𝑁𝑐𝑜𝑠</m:t>
+                    </m:r>
+                    <m:r>
+                      <a:rPr lang="en-US" altLang="ja-JP" sz="2400" b="0" i="1" smtClean="0">
+                        <a:latin typeface="Cambria Math" panose="02040503050406030204" pitchFamily="18" charset="0"/>
+                      </a:rPr>
+                      <m:t>60°,100</m:t>
+                    </m:r>
+                    <m:r>
+                      <a:rPr lang="en-US" altLang="ja-JP" sz="2400" i="1">
+                        <a:latin typeface="Cambria Math" panose="02040503050406030204" pitchFamily="18" charset="0"/>
+                      </a:rPr>
+                      <m:t>𝑁𝑠𝑖𝑛</m:t>
+                    </m:r>
+                    <m:r>
+                      <a:rPr lang="en-US" altLang="ja-JP" sz="2400" i="1">
+                        <a:latin typeface="Cambria Math" panose="02040503050406030204" pitchFamily="18" charset="0"/>
+                      </a:rPr>
+                      <m:t>60°</m:t>
+                    </m:r>
+                    <m:r>
+                      <a:rPr lang="en-US" altLang="ja-JP" sz="2400" i="1">
+                        <a:latin typeface="Cambria Math" panose="02040503050406030204" pitchFamily="18" charset="0"/>
+                      </a:rPr>
+                      <m:t>]</m:t>
+                    </m:r>
+                  </m:oMath>
+                </a14:m>
+                <a:r>
+                  <a:rPr lang="en-US" altLang="ja-JP" sz="2400" dirty="0"/>
+                  <a:t> </a:t>
+                </a:r>
+              </a:p>
+              <a:p>
+                <a14:m>
+                  <m:oMath xmlns:m="http://schemas.openxmlformats.org/officeDocument/2006/math">
+                    <m:r>
+                      <a:rPr lang="en-US" altLang="ja-JP" sz="2400" b="0" i="1" smtClean="0">
+                        <a:latin typeface="Cambria Math" panose="02040503050406030204" pitchFamily="18" charset="0"/>
+                      </a:rPr>
+                      <m:t>=</m:t>
+                    </m:r>
+                    <m:r>
+                      <a:rPr lang="en-US" altLang="ja-JP" sz="2400" i="1" smtClean="0">
+                        <a:latin typeface="Cambria Math" panose="02040503050406030204" pitchFamily="18" charset="0"/>
+                      </a:rPr>
+                      <m:t>[</m:t>
+                    </m:r>
+                    <m:r>
+                      <a:rPr lang="en-US" altLang="ja-JP" sz="2400" b="0" i="1" smtClean="0">
+                        <a:latin typeface="Cambria Math" panose="02040503050406030204" pitchFamily="18" charset="0"/>
+                      </a:rPr>
+                      <m:t>50</m:t>
+                    </m:r>
+                    <m:r>
+                      <a:rPr lang="en-US" altLang="ja-JP" sz="2400" b="0" i="1" smtClean="0">
+                        <a:latin typeface="Cambria Math" panose="02040503050406030204" pitchFamily="18" charset="0"/>
+                      </a:rPr>
+                      <m:t>,</m:t>
+                    </m:r>
+                    <m:r>
+                      <a:rPr lang="en-US" altLang="ja-JP" sz="2400" b="0" i="1" smtClean="0">
+                        <a:latin typeface="Cambria Math" panose="02040503050406030204" pitchFamily="18" charset="0"/>
+                      </a:rPr>
+                      <m:t>86</m:t>
+                    </m:r>
+                    <m:r>
+                      <a:rPr lang="en-US" altLang="ja-JP" sz="2400" i="1">
+                        <a:latin typeface="Cambria Math" panose="02040503050406030204" pitchFamily="18" charset="0"/>
+                      </a:rPr>
+                      <m:t>]</m:t>
+                    </m:r>
+                  </m:oMath>
+                </a14:m>
+                <a:r>
+                  <a:rPr lang="en-US" altLang="ja-JP" sz="2400" dirty="0"/>
+                  <a:t> </a:t>
+                </a:r>
+              </a:p>
+              <a:p>
+                <a:endParaRPr lang="en-US" altLang="ja-JP" sz="2400" dirty="0"/>
+              </a:p>
+            </p:txBody>
+          </p:sp>
+        </mc:Choice>
+        <mc:Fallback>
+          <p:sp>
+            <p:nvSpPr>
+              <p:cNvPr id="16" name="テキスト ボックス 15">
+                <a:extLst>
+                  <a:ext uri="{FF2B5EF4-FFF2-40B4-BE49-F238E27FC236}">
+                    <a16:creationId xmlns:a16="http://schemas.microsoft.com/office/drawing/2014/main" id="{87B09C6C-6D01-4872-BA3C-08158207807E}"/>
+                  </a:ext>
+                </a:extLst>
+              </p:cNvPr>
+              <p:cNvSpPr txBox="1">
+                <a:spLocks noRot="1" noChangeAspect="1" noMove="1" noResize="1" noEditPoints="1" noAdjustHandles="1" noChangeArrowheads="1" noChangeShapeType="1" noTextEdit="1"/>
+              </p:cNvSpPr>
+              <p:nvPr/>
+            </p:nvSpPr>
+            <p:spPr>
+              <a:xfrm>
+                <a:off x="5974688" y="2846764"/>
+                <a:ext cx="5341527" cy="1938992"/>
+              </a:xfrm>
+              <a:prstGeom prst="rect">
+                <a:avLst/>
+              </a:prstGeom>
+              <a:blipFill>
+                <a:blip r:embed="rId3"/>
+                <a:stretch>
+                  <a:fillRect l="-1712" t="-2516" r="-913"/>
+                </a:stretch>
+              </a:blipFill>
+            </p:spPr>
+            <p:txBody>
+              <a:bodyPr/>
+              <a:lstStyle/>
+              <a:p>
+                <a:r>
+                  <a:rPr lang="ja-JP" altLang="en-US">
+                    <a:noFill/>
+                  </a:rPr>
+                  <a:t> </a:t>
+                </a:r>
+              </a:p>
+            </p:txBody>
+          </p:sp>
+        </mc:Fallback>
+      </mc:AlternateContent>
+      <p:cxnSp>
+        <p:nvCxnSpPr>
+          <p:cNvPr id="11" name="直線矢印コネクタ 10">
+            <a:extLst>
+              <a:ext uri="{FF2B5EF4-FFF2-40B4-BE49-F238E27FC236}">
+                <a16:creationId xmlns:a16="http://schemas.microsoft.com/office/drawing/2014/main" id="{E2AE73B5-EBF3-47A8-BFAA-6C3D70578B76}"/>
+              </a:ext>
+            </a:extLst>
+          </p:cNvPr>
+          <p:cNvCxnSpPr>
+            <a:cxnSpLocks/>
+          </p:cNvCxnSpPr>
+          <p:nvPr/>
+        </p:nvCxnSpPr>
+        <p:spPr>
+          <a:xfrm>
+            <a:off x="2605331" y="5486401"/>
+            <a:ext cx="0" cy="1118210"/>
+          </a:xfrm>
+          <a:prstGeom prst="straightConnector1">
+            <a:avLst/>
+          </a:prstGeom>
+          <a:ln w="38100">
+            <a:solidFill>
+              <a:srgbClr val="7030A0"/>
+            </a:solidFill>
+            <a:tailEnd type="triangle"/>
+          </a:ln>
+        </p:spPr>
+        <p:style>
+          <a:lnRef idx="1">
+            <a:schemeClr val="accent1"/>
+          </a:lnRef>
+          <a:fillRef idx="0">
+            <a:schemeClr val="accent1"/>
+          </a:fillRef>
+          <a:effectRef idx="0">
+            <a:schemeClr val="accent1"/>
+          </a:effectRef>
+          <a:fontRef idx="minor">
+            <a:schemeClr val="tx1"/>
+          </a:fontRef>
+        </p:style>
+      </p:cxnSp>
+      <mc:AlternateContent xmlns:mc="http://schemas.openxmlformats.org/markup-compatibility/2006">
+        <mc:Choice xmlns:a14="http://schemas.microsoft.com/office/drawing/2010/main" Requires="a14">
+          <p:sp>
+            <p:nvSpPr>
+              <p:cNvPr id="12" name="テキスト ボックス 11">
+                <a:extLst>
+                  <a:ext uri="{FF2B5EF4-FFF2-40B4-BE49-F238E27FC236}">
+                    <a16:creationId xmlns:a16="http://schemas.microsoft.com/office/drawing/2014/main" id="{5F9C7478-8BE7-40E1-AC23-D3482AE8FC24}"/>
+                  </a:ext>
+                </a:extLst>
+              </p:cNvPr>
+              <p:cNvSpPr txBox="1"/>
+              <p:nvPr/>
+            </p:nvSpPr>
+            <p:spPr>
+              <a:xfrm>
+                <a:off x="2660800" y="5860840"/>
+                <a:ext cx="1174376" cy="369332"/>
+              </a:xfrm>
+              <a:prstGeom prst="rect">
+                <a:avLst/>
+              </a:prstGeom>
+              <a:noFill/>
+            </p:spPr>
+            <p:txBody>
+              <a:bodyPr wrap="square">
+                <a:spAutoFit/>
+              </a:bodyPr>
+              <a:lstStyle/>
+              <a:p>
+                <a14:m>
+                  <m:oMath xmlns:m="http://schemas.openxmlformats.org/officeDocument/2006/math">
+                    <m:r>
+                      <a:rPr lang="en-US" altLang="ja-JP" sz="1800" i="1" smtClean="0">
+                        <a:solidFill>
+                          <a:srgbClr val="7030A0"/>
+                        </a:solidFill>
+                        <a:latin typeface="Cambria Math" panose="02040503050406030204" pitchFamily="18" charset="0"/>
+                      </a:rPr>
+                      <m:t>[0, </m:t>
+                    </m:r>
+                    <m:r>
+                      <a:rPr lang="en-US" altLang="ja-JP" sz="1800" b="0" i="1" smtClean="0">
+                        <a:solidFill>
+                          <a:srgbClr val="7030A0"/>
+                        </a:solidFill>
+                        <a:latin typeface="Cambria Math" panose="02040503050406030204" pitchFamily="18" charset="0"/>
+                      </a:rPr>
+                      <m:t>−</m:t>
+                    </m:r>
+                    <m:r>
+                      <a:rPr lang="en-US" altLang="ja-JP" sz="1800" i="1" smtClean="0">
+                        <a:solidFill>
+                          <a:srgbClr val="7030A0"/>
+                        </a:solidFill>
+                        <a:latin typeface="Cambria Math" panose="02040503050406030204" pitchFamily="18" charset="0"/>
+                      </a:rPr>
+                      <m:t>196</m:t>
+                    </m:r>
+                    <m:r>
+                      <a:rPr lang="en-US" altLang="ja-JP" sz="1800" i="1" smtClean="0">
+                        <a:solidFill>
+                          <a:srgbClr val="7030A0"/>
+                        </a:solidFill>
+                        <a:latin typeface="Cambria Math" panose="02040503050406030204" pitchFamily="18" charset="0"/>
+                      </a:rPr>
+                      <m:t>𝑁</m:t>
+                    </m:r>
+                    <m:r>
+                      <a:rPr lang="en-US" altLang="ja-JP" sz="1800" i="1" smtClean="0">
+                        <a:solidFill>
+                          <a:srgbClr val="7030A0"/>
+                        </a:solidFill>
+                        <a:latin typeface="Cambria Math" panose="02040503050406030204" pitchFamily="18" charset="0"/>
+                      </a:rPr>
+                      <m:t>]</m:t>
+                    </m:r>
+                  </m:oMath>
+                </a14:m>
+                <a:r>
+                  <a:rPr lang="en-US" altLang="ja-JP" sz="1800" dirty="0">
+                    <a:solidFill>
+                      <a:srgbClr val="7030A0"/>
+                    </a:solidFill>
+                  </a:rPr>
+                  <a:t> </a:t>
+                </a:r>
+              </a:p>
+            </p:txBody>
+          </p:sp>
+        </mc:Choice>
+        <mc:Fallback>
+          <p:sp>
+            <p:nvSpPr>
+              <p:cNvPr id="12" name="テキスト ボックス 11">
+                <a:extLst>
+                  <a:ext uri="{FF2B5EF4-FFF2-40B4-BE49-F238E27FC236}">
+                    <a16:creationId xmlns:a16="http://schemas.microsoft.com/office/drawing/2014/main" id="{5F9C7478-8BE7-40E1-AC23-D3482AE8FC24}"/>
+                  </a:ext>
+                </a:extLst>
+              </p:cNvPr>
+              <p:cNvSpPr txBox="1">
+                <a:spLocks noRot="1" noChangeAspect="1" noMove="1" noResize="1" noEditPoints="1" noAdjustHandles="1" noChangeArrowheads="1" noChangeShapeType="1" noTextEdit="1"/>
+              </p:cNvSpPr>
+              <p:nvPr/>
+            </p:nvSpPr>
+            <p:spPr>
+              <a:xfrm>
+                <a:off x="2660800" y="5860840"/>
+                <a:ext cx="1174376" cy="369332"/>
+              </a:xfrm>
+              <a:prstGeom prst="rect">
+                <a:avLst/>
+              </a:prstGeom>
+              <a:blipFill>
+                <a:blip r:embed="rId4"/>
+                <a:stretch>
+                  <a:fillRect l="-1554" r="-10881" b="-14754"/>
+                </a:stretch>
+              </a:blipFill>
+            </p:spPr>
+            <p:txBody>
+              <a:bodyPr/>
+              <a:lstStyle/>
+              <a:p>
+                <a:r>
+                  <a:rPr lang="ja-JP" altLang="en-US">
+                    <a:noFill/>
+                  </a:rPr>
+                  <a:t> </a:t>
+                </a:r>
+              </a:p>
+            </p:txBody>
+          </p:sp>
+        </mc:Fallback>
+      </mc:AlternateContent>
+      <p:cxnSp>
+        <p:nvCxnSpPr>
+          <p:cNvPr id="5" name="直線矢印コネクタ 4">
+            <a:extLst>
+              <a:ext uri="{FF2B5EF4-FFF2-40B4-BE49-F238E27FC236}">
+                <a16:creationId xmlns:a16="http://schemas.microsoft.com/office/drawing/2014/main" id="{CA53EC50-58D3-40C5-8C2F-BABEE5FA8DD1}"/>
+              </a:ext>
+            </a:extLst>
+          </p:cNvPr>
+          <p:cNvCxnSpPr/>
+          <p:nvPr/>
+        </p:nvCxnSpPr>
+        <p:spPr>
+          <a:xfrm flipV="1">
+            <a:off x="3247988" y="3466938"/>
+            <a:ext cx="880259" cy="1030942"/>
+          </a:xfrm>
+          <a:prstGeom prst="straightConnector1">
+            <a:avLst/>
+          </a:prstGeom>
+          <a:ln w="38100">
+            <a:solidFill>
+              <a:srgbClr val="FFC000"/>
+            </a:solidFill>
+            <a:tailEnd type="triangle"/>
+          </a:ln>
+        </p:spPr>
+        <p:style>
+          <a:lnRef idx="1">
+            <a:schemeClr val="accent1"/>
+          </a:lnRef>
+          <a:fillRef idx="0">
+            <a:schemeClr val="accent1"/>
+          </a:fillRef>
+          <a:effectRef idx="0">
+            <a:schemeClr val="accent1"/>
+          </a:effectRef>
+          <a:fontRef idx="minor">
+            <a:schemeClr val="tx1"/>
+          </a:fontRef>
+        </p:style>
+      </p:cxnSp>
+      <mc:AlternateContent xmlns:mc="http://schemas.openxmlformats.org/markup-compatibility/2006">
+        <mc:Choice xmlns:a14="http://schemas.microsoft.com/office/drawing/2010/main" Requires="a14">
+          <p:sp>
+            <p:nvSpPr>
+              <p:cNvPr id="14" name="テキスト ボックス 13">
+                <a:extLst>
+                  <a:ext uri="{FF2B5EF4-FFF2-40B4-BE49-F238E27FC236}">
+                    <a16:creationId xmlns:a16="http://schemas.microsoft.com/office/drawing/2014/main" id="{7FBF351D-41A1-44E3-83E6-35918AEF404E}"/>
+                  </a:ext>
+                </a:extLst>
+              </p:cNvPr>
+              <p:cNvSpPr txBox="1"/>
+              <p:nvPr/>
+            </p:nvSpPr>
+            <p:spPr>
+              <a:xfrm>
+                <a:off x="1242010" y="4071911"/>
+                <a:ext cx="6096000" cy="369332"/>
+              </a:xfrm>
+              <a:prstGeom prst="rect">
+                <a:avLst/>
+              </a:prstGeom>
+              <a:noFill/>
+            </p:spPr>
+            <p:txBody>
+              <a:bodyPr wrap="square">
+                <a:spAutoFit/>
+              </a:bodyPr>
+              <a:lstStyle/>
+              <a:p>
+                <a:pPr/>
+                <a14:m>
+                  <m:oMathPara xmlns:m="http://schemas.openxmlformats.org/officeDocument/2006/math">
+                    <m:oMathParaPr>
+                      <m:jc m:val="centerGroup"/>
+                    </m:oMathParaPr>
+                    <m:oMath xmlns:m="http://schemas.openxmlformats.org/officeDocument/2006/math">
+                      <m:r>
+                        <a:rPr lang="en-US" altLang="ja-JP" sz="1800" i="1" smtClean="0">
+                          <a:solidFill>
+                            <a:srgbClr val="FFC000"/>
+                          </a:solidFill>
+                          <a:latin typeface="Cambria Math" panose="02040503050406030204" pitchFamily="18" charset="0"/>
+                        </a:rPr>
+                        <m:t>[</m:t>
+                      </m:r>
+                      <m:r>
+                        <a:rPr lang="en-US" altLang="ja-JP" sz="1800" b="0" i="1" smtClean="0">
+                          <a:solidFill>
+                            <a:srgbClr val="FFC000"/>
+                          </a:solidFill>
+                          <a:latin typeface="Cambria Math" panose="02040503050406030204" pitchFamily="18" charset="0"/>
+                        </a:rPr>
+                        <m:t>50</m:t>
+                      </m:r>
+                      <m:r>
+                        <a:rPr lang="en-US" altLang="ja-JP" sz="1800" b="0" i="1" smtClean="0">
+                          <a:solidFill>
+                            <a:srgbClr val="FFC000"/>
+                          </a:solidFill>
+                          <a:latin typeface="Cambria Math" panose="02040503050406030204" pitchFamily="18" charset="0"/>
+                        </a:rPr>
+                        <m:t>𝑁</m:t>
+                      </m:r>
+                      <m:r>
+                        <a:rPr lang="en-US" altLang="ja-JP" sz="1800" b="0" i="1" smtClean="0">
+                          <a:solidFill>
+                            <a:srgbClr val="FFC000"/>
+                          </a:solidFill>
+                          <a:latin typeface="Cambria Math" panose="02040503050406030204" pitchFamily="18" charset="0"/>
+                        </a:rPr>
+                        <m:t>,86</m:t>
+                      </m:r>
+                      <m:r>
+                        <a:rPr lang="en-US" altLang="ja-JP" sz="1800" b="0" i="1" smtClean="0">
+                          <a:solidFill>
+                            <a:srgbClr val="FFC000"/>
+                          </a:solidFill>
+                          <a:latin typeface="Cambria Math" panose="02040503050406030204" pitchFamily="18" charset="0"/>
+                        </a:rPr>
+                        <m:t>𝑁</m:t>
+                      </m:r>
+                      <m:r>
+                        <a:rPr lang="en-US" altLang="ja-JP" sz="1800" i="1">
+                          <a:solidFill>
+                            <a:srgbClr val="FFC000"/>
+                          </a:solidFill>
+                          <a:latin typeface="Cambria Math" panose="02040503050406030204" pitchFamily="18" charset="0"/>
+                        </a:rPr>
+                        <m:t>]</m:t>
+                      </m:r>
+                    </m:oMath>
+                  </m:oMathPara>
+                </a14:m>
+                <a:endParaRPr lang="ja-JP" altLang="en-US" dirty="0">
+                  <a:solidFill>
+                    <a:srgbClr val="FFC000"/>
+                  </a:solidFill>
+                </a:endParaRPr>
+              </a:p>
+            </p:txBody>
+          </p:sp>
+        </mc:Choice>
+        <mc:Fallback>
+          <p:sp>
+            <p:nvSpPr>
+              <p:cNvPr id="14" name="テキスト ボックス 13">
+                <a:extLst>
+                  <a:ext uri="{FF2B5EF4-FFF2-40B4-BE49-F238E27FC236}">
+                    <a16:creationId xmlns:a16="http://schemas.microsoft.com/office/drawing/2014/main" id="{7FBF351D-41A1-44E3-83E6-35918AEF404E}"/>
+                  </a:ext>
+                </a:extLst>
+              </p:cNvPr>
+              <p:cNvSpPr txBox="1">
+                <a:spLocks noRot="1" noChangeAspect="1" noMove="1" noResize="1" noEditPoints="1" noAdjustHandles="1" noChangeArrowheads="1" noChangeShapeType="1" noTextEdit="1"/>
+              </p:cNvSpPr>
+              <p:nvPr/>
+            </p:nvSpPr>
+            <p:spPr>
+              <a:xfrm>
+                <a:off x="1242010" y="4071911"/>
+                <a:ext cx="6096000" cy="369332"/>
+              </a:xfrm>
+              <a:prstGeom prst="rect">
+                <a:avLst/>
+              </a:prstGeom>
+              <a:blipFill>
+                <a:blip r:embed="rId5"/>
+                <a:stretch>
+                  <a:fillRect b="-14754"/>
+                </a:stretch>
+              </a:blipFill>
+            </p:spPr>
+            <p:txBody>
+              <a:bodyPr/>
+              <a:lstStyle/>
+              <a:p>
+                <a:r>
+                  <a:rPr lang="ja-JP" altLang="en-US">
+                    <a:noFill/>
+                  </a:rPr>
+                  <a:t> </a:t>
+                </a:r>
+              </a:p>
+            </p:txBody>
+          </p:sp>
+        </mc:Fallback>
+      </mc:AlternateContent>
+    </p:spTree>
+    <p:extLst>
+      <p:ext uri="{BB962C8B-B14F-4D97-AF65-F5344CB8AC3E}">
+        <p14:creationId xmlns:p14="http://schemas.microsoft.com/office/powerpoint/2010/main" val="1782167875"/>
+      </p:ext>
+    </p:extLst>
+  </p:cSld>
+  <p:clrMapOvr>
+    <a:masterClrMapping/>
+  </p:clrMapOvr>
+</p:sld>
+</file>
+
+<file path=ppt/slides/slide9.xml><?xml version="1.0" encoding="utf-8"?>
+<p:sld xmlns:a="http://schemas.openxmlformats.org/drawingml/2006/main" xmlns:r="http://schemas.openxmlformats.org/officeDocument/2006/relationships" xmlns:p="http://schemas.openxmlformats.org/presentationml/2006/main">
+  <p:cSld>
+    <p:spTree>
+      <p:nvGrpSpPr>
+        <p:cNvPr id="1" name=""/>
+        <p:cNvGrpSpPr/>
+        <p:nvPr/>
+      </p:nvGrpSpPr>
+      <p:grpSpPr>
+        <a:xfrm>
+          <a:off x="0" y="0"/>
+          <a:ext cx="0" cy="0"/>
+          <a:chOff x="0" y="0"/>
+          <a:chExt cx="0" cy="0"/>
+        </a:xfrm>
+      </p:grpSpPr>
+      <p:sp>
+        <p:nvSpPr>
+          <p:cNvPr id="4" name="テキスト ボックス 3">
+            <a:extLst>
+              <a:ext uri="{FF2B5EF4-FFF2-40B4-BE49-F238E27FC236}">
+                <a16:creationId xmlns:a16="http://schemas.microsoft.com/office/drawing/2014/main" id="{5A13BF46-B8C5-48AA-8308-C9ECFF431A18}"/>
+              </a:ext>
+            </a:extLst>
+          </p:cNvPr>
+          <p:cNvSpPr txBox="1"/>
+          <p:nvPr/>
+        </p:nvSpPr>
+        <p:spPr>
+          <a:xfrm>
+            <a:off x="567542" y="491954"/>
+            <a:ext cx="1943161" cy="584775"/>
+          </a:xfrm>
+          <a:prstGeom prst="rect">
+            <a:avLst/>
+          </a:prstGeom>
+          <a:noFill/>
+        </p:spPr>
+        <p:txBody>
+          <a:bodyPr wrap="none" rtlCol="0">
+            <a:spAutoFit/>
+          </a:bodyPr>
+          <a:lstStyle/>
+          <a:p>
+            <a:r>
+              <a:rPr kumimoji="1" lang="ja-JP" altLang="en-US" sz="3200" b="1" u="sng" dirty="0"/>
+              <a:t>合力 例題</a:t>
+            </a:r>
+            <a:endParaRPr kumimoji="1" lang="en-US" altLang="ja-JP" sz="3200" b="1" u="sng" dirty="0"/>
+          </a:p>
+        </p:txBody>
+      </p:sp>
+      <mc:AlternateContent xmlns:mc="http://schemas.openxmlformats.org/markup-compatibility/2006" xmlns:a14="http://schemas.microsoft.com/office/drawing/2010/main">
+        <mc:Choice Requires="a14">
+          <p:sp>
+            <p:nvSpPr>
+              <p:cNvPr id="6" name="テキスト ボックス 5">
+                <a:extLst>
+                  <a:ext uri="{FF2B5EF4-FFF2-40B4-BE49-F238E27FC236}">
+                    <a16:creationId xmlns:a16="http://schemas.microsoft.com/office/drawing/2014/main" id="{55830AD6-028B-4C4E-80BF-B70DFC1C3A46}"/>
+                  </a:ext>
+                </a:extLst>
+              </p:cNvPr>
+              <p:cNvSpPr txBox="1"/>
+              <p:nvPr/>
+            </p:nvSpPr>
+            <p:spPr>
+              <a:xfrm>
+                <a:off x="567542" y="1216429"/>
+                <a:ext cx="8026556" cy="1200329"/>
+              </a:xfrm>
+              <a:prstGeom prst="rect">
+                <a:avLst/>
+              </a:prstGeom>
+              <a:noFill/>
+            </p:spPr>
+            <p:txBody>
+              <a:bodyPr wrap="none" rtlCol="0">
+                <a:spAutoFit/>
+              </a:bodyPr>
+              <a:lstStyle/>
+              <a:p>
+                <a:r>
+                  <a:rPr lang="ja-JP" altLang="en-US" sz="2400" dirty="0"/>
+                  <a:t>ゲーム中の氷の床の上に</a:t>
+                </a:r>
+                <a:r>
+                  <a:rPr lang="en-US" altLang="ja-JP" sz="2400" dirty="0"/>
+                  <a:t>20kg</a:t>
+                </a:r>
+                <a:r>
+                  <a:rPr lang="ja-JP" altLang="en-US" sz="2400" dirty="0"/>
+                  <a:t>の金属の箱があり、</a:t>
+                </a:r>
+                <a:endParaRPr lang="en-US" altLang="ja-JP" sz="2400" dirty="0"/>
+              </a:p>
+              <a:p>
+                <a:r>
+                  <a:rPr lang="ja-JP" altLang="en-US" sz="2400" dirty="0"/>
+                  <a:t>この箱にロープをつけて</a:t>
+                </a:r>
+                <a:r>
+                  <a:rPr lang="en-US" altLang="ja-JP" sz="2400" dirty="0"/>
+                  <a:t>100N</a:t>
+                </a:r>
+                <a:r>
+                  <a:rPr lang="ja-JP" altLang="en-US" sz="2400" dirty="0"/>
+                  <a:t>の力で引っ張ります。</a:t>
+                </a:r>
+                <a:endParaRPr lang="en-US" altLang="ja-JP" sz="2400" dirty="0"/>
+              </a:p>
+              <a:p>
+                <a:r>
+                  <a:rPr lang="ja-JP" altLang="en-US" sz="2400" dirty="0"/>
+                  <a:t>ロープの角度が</a:t>
+                </a:r>
+                <a14:m>
+                  <m:oMath xmlns:m="http://schemas.openxmlformats.org/officeDocument/2006/math">
+                    <m:r>
+                      <a:rPr lang="en-US" altLang="ja-JP" sz="2400" i="1" dirty="0" smtClean="0">
+                        <a:latin typeface="Cambria Math" panose="02040503050406030204" pitchFamily="18" charset="0"/>
+                      </a:rPr>
+                      <m:t>60</m:t>
+                    </m:r>
+                    <m:r>
+                      <a:rPr lang="en-US" altLang="ja-JP" sz="2400" i="1" dirty="0">
+                        <a:latin typeface="Cambria Math" panose="02040503050406030204" pitchFamily="18" charset="0"/>
+                      </a:rPr>
+                      <m:t>°</m:t>
+                    </m:r>
+                  </m:oMath>
+                </a14:m>
+                <a:r>
+                  <a:rPr lang="ja-JP" altLang="en-US" sz="2400" dirty="0"/>
+                  <a:t>のとき、箱に働く合力を求めなさい。</a:t>
+                </a:r>
+                <a:endParaRPr lang="en-US" altLang="ja-JP" sz="2400" dirty="0"/>
+              </a:p>
+            </p:txBody>
+          </p:sp>
+        </mc:Choice>
+        <mc:Fallback xmlns="">
+          <p:sp>
+            <p:nvSpPr>
+              <p:cNvPr id="6" name="テキスト ボックス 5">
+                <a:extLst>
+                  <a:ext uri="{FF2B5EF4-FFF2-40B4-BE49-F238E27FC236}">
+                    <a16:creationId xmlns:a16="http://schemas.microsoft.com/office/drawing/2014/main" id="{55830AD6-028B-4C4E-80BF-B70DFC1C3A46}"/>
+                  </a:ext>
+                </a:extLst>
+              </p:cNvPr>
+              <p:cNvSpPr txBox="1">
+                <a:spLocks noRot="1" noChangeAspect="1" noMove="1" noResize="1" noEditPoints="1" noAdjustHandles="1" noChangeArrowheads="1" noChangeShapeType="1" noTextEdit="1"/>
+              </p:cNvSpPr>
+              <p:nvPr/>
+            </p:nvSpPr>
+            <p:spPr>
+              <a:xfrm>
+                <a:off x="567542" y="1216429"/>
+                <a:ext cx="8026556" cy="1200329"/>
+              </a:xfrm>
+              <a:prstGeom prst="rect">
+                <a:avLst/>
+              </a:prstGeom>
+              <a:blipFill>
+                <a:blip r:embed="rId2"/>
+                <a:stretch>
+                  <a:fillRect l="-1139" t="-4082" r="-228" b="-11224"/>
+                </a:stretch>
+              </a:blipFill>
+            </p:spPr>
+            <p:txBody>
+              <a:bodyPr/>
+              <a:lstStyle/>
+              <a:p>
+                <a:r>
+                  <a:rPr lang="ja-JP" altLang="en-US">
+                    <a:noFill/>
+                  </a:rPr>
+                  <a:t> </a:t>
+                </a:r>
+              </a:p>
+            </p:txBody>
+          </p:sp>
+        </mc:Fallback>
+      </mc:AlternateContent>
+      <p:sp>
+        <p:nvSpPr>
+          <p:cNvPr id="3" name="正方形/長方形 2">
+            <a:extLst>
+              <a:ext uri="{FF2B5EF4-FFF2-40B4-BE49-F238E27FC236}">
+                <a16:creationId xmlns:a16="http://schemas.microsoft.com/office/drawing/2014/main" id="{5D248159-D1DA-49E7-984D-40C755EC6B3D}"/>
+              </a:ext>
+            </a:extLst>
+          </p:cNvPr>
+          <p:cNvSpPr/>
+          <p:nvPr/>
+        </p:nvSpPr>
+        <p:spPr>
+          <a:xfrm>
+            <a:off x="2073612" y="4356848"/>
+            <a:ext cx="1174376" cy="1129553"/>
+          </a:xfrm>
+          <a:prstGeom prst="rect">
+            <a:avLst/>
+          </a:prstGeom>
+        </p:spPr>
+        <p:style>
+          <a:lnRef idx="2">
+            <a:schemeClr val="accent3">
+              <a:shade val="50000"/>
+            </a:schemeClr>
+          </a:lnRef>
+          <a:fillRef idx="1">
+            <a:schemeClr val="accent3"/>
+          </a:fillRef>
+          <a:effectRef idx="0">
+            <a:schemeClr val="accent3"/>
+          </a:effectRef>
+          <a:fontRef idx="minor">
+            <a:schemeClr val="lt1"/>
+          </a:fontRef>
+        </p:style>
+        <p:txBody>
+          <a:bodyPr rtlCol="0" anchor="ctr"/>
+          <a:lstStyle/>
+          <a:p>
+            <a:pPr algn="ctr"/>
+            <a:r>
+              <a:rPr kumimoji="1" lang="en-US" altLang="ja-JP" b="1" dirty="0"/>
+              <a:t>20kg</a:t>
+            </a:r>
+            <a:endParaRPr kumimoji="1" lang="ja-JP" altLang="en-US" b="1" dirty="0"/>
+          </a:p>
+        </p:txBody>
+      </p:sp>
+      <mc:AlternateContent xmlns:mc="http://schemas.openxmlformats.org/markup-compatibility/2006">
+        <mc:Choice xmlns:a14="http://schemas.microsoft.com/office/drawing/2010/main" Requires="a14">
+          <p:sp>
+            <p:nvSpPr>
+              <p:cNvPr id="16" name="テキスト ボックス 15">
+                <a:extLst>
+                  <a:ext uri="{FF2B5EF4-FFF2-40B4-BE49-F238E27FC236}">
+                    <a16:creationId xmlns:a16="http://schemas.microsoft.com/office/drawing/2014/main" id="{87B09C6C-6D01-4872-BA3C-08158207807E}"/>
+                  </a:ext>
+                </a:extLst>
+              </p:cNvPr>
+              <p:cNvSpPr txBox="1"/>
+              <p:nvPr/>
+            </p:nvSpPr>
+            <p:spPr>
+              <a:xfrm>
+                <a:off x="5974688" y="2846764"/>
+                <a:ext cx="6475940" cy="2308324"/>
+              </a:xfrm>
+              <a:prstGeom prst="rect">
+                <a:avLst/>
+              </a:prstGeom>
+              <a:noFill/>
+            </p:spPr>
+            <p:txBody>
+              <a:bodyPr wrap="none" rtlCol="0">
+                <a:spAutoFit/>
+              </a:bodyPr>
+              <a:lstStyle/>
+              <a:p>
+                <a:r>
+                  <a:rPr lang="ja-JP" altLang="en-US" sz="2400" b="1" dirty="0">
+                    <a:solidFill>
+                      <a:srgbClr val="FF0000"/>
+                    </a:solidFill>
+                  </a:rPr>
+                  <a:t>■解答</a:t>
+                </a:r>
+              </a:p>
+              <a:p>
+                <a:r>
+                  <a:rPr lang="ja-JP" altLang="en-US" sz="2400" dirty="0"/>
+                  <a:t>箱にかかる鉛直の力は、</a:t>
+                </a:r>
+                <a:endParaRPr lang="en-US" altLang="ja-JP" sz="2400" dirty="0"/>
+              </a:p>
+              <a:p>
+                <a14:m>
+                  <m:oMath xmlns:m="http://schemas.openxmlformats.org/officeDocument/2006/math">
+                    <m:r>
+                      <a:rPr lang="en-US" altLang="ja-JP" sz="2400" b="0" i="1" smtClean="0">
+                        <a:latin typeface="Cambria Math" panose="02040503050406030204" pitchFamily="18" charset="0"/>
+                      </a:rPr>
+                      <m:t>−196</m:t>
+                    </m:r>
+                    <m:r>
+                      <a:rPr lang="en-US" altLang="ja-JP" sz="2400" b="0" i="1" smtClean="0">
+                        <a:latin typeface="Cambria Math" panose="02040503050406030204" pitchFamily="18" charset="0"/>
+                      </a:rPr>
+                      <m:t>𝑁</m:t>
+                    </m:r>
+                    <m:r>
+                      <a:rPr lang="en-US" altLang="ja-JP" sz="2400" b="0" i="1" smtClean="0">
+                        <a:latin typeface="Cambria Math" panose="02040503050406030204" pitchFamily="18" charset="0"/>
+                      </a:rPr>
+                      <m:t>+86</m:t>
+                    </m:r>
+                    <m:r>
+                      <a:rPr lang="en-US" altLang="ja-JP" sz="2400" b="0" i="1" smtClean="0">
+                        <a:latin typeface="Cambria Math" panose="02040503050406030204" pitchFamily="18" charset="0"/>
+                      </a:rPr>
+                      <m:t>𝑁</m:t>
+                    </m:r>
+                    <m:r>
+                      <a:rPr lang="en-US" altLang="ja-JP" sz="2400" b="0" i="1" smtClean="0">
+                        <a:latin typeface="Cambria Math" panose="02040503050406030204" pitchFamily="18" charset="0"/>
+                      </a:rPr>
+                      <m:t>=−110</m:t>
+                    </m:r>
+                    <m:r>
+                      <a:rPr lang="en-US" altLang="ja-JP" sz="2400" b="0" i="1" smtClean="0">
+                        <a:latin typeface="Cambria Math" panose="02040503050406030204" pitchFamily="18" charset="0"/>
+                      </a:rPr>
+                      <m:t>𝑁</m:t>
+                    </m:r>
+                  </m:oMath>
+                </a14:m>
+                <a:r>
+                  <a:rPr lang="en-US" altLang="ja-JP" sz="2400" dirty="0"/>
+                  <a:t> </a:t>
+                </a:r>
+              </a:p>
+              <a:p>
+                <a:endParaRPr lang="en-US" altLang="ja-JP" sz="2400" dirty="0"/>
+              </a:p>
+              <a:p>
+                <a:r>
+                  <a:rPr lang="ja-JP" altLang="en-US" sz="2400" dirty="0"/>
+                  <a:t>地面からの垂直抗力は、</a:t>
+                </a:r>
+                <a:endParaRPr lang="en-US" altLang="ja-JP" sz="2400" dirty="0"/>
+              </a:p>
+              <a:p>
+                <a:r>
+                  <a:rPr lang="ja-JP" altLang="en-US" sz="2400" dirty="0"/>
+                  <a:t>下向きの力に釣り合うので、</a:t>
+                </a:r>
+                <a14:m>
+                  <m:oMath xmlns:m="http://schemas.openxmlformats.org/officeDocument/2006/math">
+                    <m:r>
+                      <a:rPr lang="en-US" altLang="ja-JP" sz="2400" b="0" i="0" smtClean="0">
+                        <a:latin typeface="Cambria Math" panose="02040503050406030204" pitchFamily="18" charset="0"/>
+                      </a:rPr>
+                      <m:t>[0,</m:t>
+                    </m:r>
+                    <m:r>
+                      <a:rPr lang="en-US" altLang="ja-JP" sz="2400" i="1">
+                        <a:latin typeface="Cambria Math" panose="02040503050406030204" pitchFamily="18" charset="0"/>
+                      </a:rPr>
+                      <m:t>110</m:t>
+                    </m:r>
+                    <m:r>
+                      <a:rPr lang="en-US" altLang="ja-JP" sz="2400" i="1">
+                        <a:latin typeface="Cambria Math" panose="02040503050406030204" pitchFamily="18" charset="0"/>
+                      </a:rPr>
+                      <m:t>𝑁</m:t>
+                    </m:r>
+                    <m:r>
+                      <a:rPr lang="en-US" altLang="ja-JP" sz="2400" b="0" i="0" smtClean="0">
+                        <a:latin typeface="Cambria Math" panose="02040503050406030204" pitchFamily="18" charset="0"/>
+                      </a:rPr>
+                      <m:t>]</m:t>
+                    </m:r>
+                  </m:oMath>
+                </a14:m>
+                <a:r>
+                  <a:rPr lang="en-US" altLang="ja-JP" sz="2400" dirty="0"/>
+                  <a:t> </a:t>
+                </a:r>
+                <a:r>
+                  <a:rPr lang="ja-JP" altLang="en-US" sz="2400" dirty="0"/>
+                  <a:t>となる</a:t>
+                </a:r>
+                <a:r>
+                  <a:rPr lang="en-US" altLang="ja-JP" sz="2400" dirty="0"/>
+                  <a:t> </a:t>
+                </a:r>
+              </a:p>
+            </p:txBody>
+          </p:sp>
+        </mc:Choice>
+        <mc:Fallback>
+          <p:sp>
+            <p:nvSpPr>
+              <p:cNvPr id="16" name="テキスト ボックス 15">
+                <a:extLst>
+                  <a:ext uri="{FF2B5EF4-FFF2-40B4-BE49-F238E27FC236}">
+                    <a16:creationId xmlns:a16="http://schemas.microsoft.com/office/drawing/2014/main" id="{87B09C6C-6D01-4872-BA3C-08158207807E}"/>
+                  </a:ext>
+                </a:extLst>
+              </p:cNvPr>
+              <p:cNvSpPr txBox="1">
+                <a:spLocks noRot="1" noChangeAspect="1" noMove="1" noResize="1" noEditPoints="1" noAdjustHandles="1" noChangeArrowheads="1" noChangeShapeType="1" noTextEdit="1"/>
+              </p:cNvSpPr>
+              <p:nvPr/>
+            </p:nvSpPr>
+            <p:spPr>
+              <a:xfrm>
+                <a:off x="5974688" y="2846764"/>
+                <a:ext cx="6475940" cy="2308324"/>
+              </a:xfrm>
+              <a:prstGeom prst="rect">
+                <a:avLst/>
+              </a:prstGeom>
+              <a:blipFill>
+                <a:blip r:embed="rId3"/>
+                <a:stretch>
+                  <a:fillRect l="-1412" t="-2111" b="-5013"/>
+                </a:stretch>
+              </a:blipFill>
+            </p:spPr>
+            <p:txBody>
+              <a:bodyPr/>
+              <a:lstStyle/>
+              <a:p>
+                <a:r>
+                  <a:rPr lang="ja-JP" altLang="en-US">
+                    <a:noFill/>
+                  </a:rPr>
+                  <a:t> </a:t>
+                </a:r>
+              </a:p>
+            </p:txBody>
+          </p:sp>
+        </mc:Fallback>
+      </mc:AlternateContent>
+      <p:cxnSp>
+        <p:nvCxnSpPr>
+          <p:cNvPr id="11" name="直線矢印コネクタ 10">
+            <a:extLst>
+              <a:ext uri="{FF2B5EF4-FFF2-40B4-BE49-F238E27FC236}">
+                <a16:creationId xmlns:a16="http://schemas.microsoft.com/office/drawing/2014/main" id="{E2AE73B5-EBF3-47A8-BFAA-6C3D70578B76}"/>
+              </a:ext>
+            </a:extLst>
+          </p:cNvPr>
+          <p:cNvCxnSpPr>
+            <a:cxnSpLocks/>
+          </p:cNvCxnSpPr>
+          <p:nvPr/>
+        </p:nvCxnSpPr>
+        <p:spPr>
+          <a:xfrm>
+            <a:off x="2605331" y="5486401"/>
+            <a:ext cx="0" cy="1118210"/>
+          </a:xfrm>
+          <a:prstGeom prst="straightConnector1">
+            <a:avLst/>
+          </a:prstGeom>
+          <a:ln w="38100">
+            <a:solidFill>
+              <a:srgbClr val="7030A0"/>
+            </a:solidFill>
+            <a:tailEnd type="triangle"/>
+          </a:ln>
+        </p:spPr>
+        <p:style>
+          <a:lnRef idx="1">
+            <a:schemeClr val="accent1"/>
+          </a:lnRef>
+          <a:fillRef idx="0">
+            <a:schemeClr val="accent1"/>
+          </a:fillRef>
+          <a:effectRef idx="0">
+            <a:schemeClr val="accent1"/>
+          </a:effectRef>
+          <a:fontRef idx="minor">
+            <a:schemeClr val="tx1"/>
+          </a:fontRef>
+        </p:style>
+      </p:cxnSp>
+      <mc:AlternateContent xmlns:mc="http://schemas.openxmlformats.org/markup-compatibility/2006">
+        <mc:Choice xmlns:a14="http://schemas.microsoft.com/office/drawing/2010/main" Requires="a14">
+          <p:sp>
+            <p:nvSpPr>
+              <p:cNvPr id="12" name="テキスト ボックス 11">
+                <a:extLst>
+                  <a:ext uri="{FF2B5EF4-FFF2-40B4-BE49-F238E27FC236}">
+                    <a16:creationId xmlns:a16="http://schemas.microsoft.com/office/drawing/2014/main" id="{5F9C7478-8BE7-40E1-AC23-D3482AE8FC24}"/>
+                  </a:ext>
+                </a:extLst>
+              </p:cNvPr>
+              <p:cNvSpPr txBox="1"/>
+              <p:nvPr/>
+            </p:nvSpPr>
+            <p:spPr>
+              <a:xfrm>
+                <a:off x="2660800" y="5860840"/>
+                <a:ext cx="1174376" cy="369332"/>
+              </a:xfrm>
+              <a:prstGeom prst="rect">
+                <a:avLst/>
+              </a:prstGeom>
+              <a:noFill/>
+            </p:spPr>
+            <p:txBody>
+              <a:bodyPr wrap="square">
+                <a:spAutoFit/>
+              </a:bodyPr>
+              <a:lstStyle/>
+              <a:p>
+                <a14:m>
+                  <m:oMath xmlns:m="http://schemas.openxmlformats.org/officeDocument/2006/math">
+                    <m:r>
+                      <a:rPr lang="en-US" altLang="ja-JP" sz="1800" i="1" smtClean="0">
+                        <a:solidFill>
+                          <a:srgbClr val="7030A0"/>
+                        </a:solidFill>
+                        <a:latin typeface="Cambria Math" panose="02040503050406030204" pitchFamily="18" charset="0"/>
+                      </a:rPr>
+                      <m:t>[0, </m:t>
+                    </m:r>
+                    <m:r>
+                      <a:rPr lang="en-US" altLang="ja-JP" sz="1800" b="0" i="1" smtClean="0">
+                        <a:solidFill>
+                          <a:srgbClr val="7030A0"/>
+                        </a:solidFill>
+                        <a:latin typeface="Cambria Math" panose="02040503050406030204" pitchFamily="18" charset="0"/>
+                      </a:rPr>
+                      <m:t>−</m:t>
+                    </m:r>
+                    <m:r>
+                      <a:rPr lang="en-US" altLang="ja-JP" sz="1800" i="1" smtClean="0">
+                        <a:solidFill>
+                          <a:srgbClr val="7030A0"/>
+                        </a:solidFill>
+                        <a:latin typeface="Cambria Math" panose="02040503050406030204" pitchFamily="18" charset="0"/>
+                      </a:rPr>
+                      <m:t>196</m:t>
+                    </m:r>
+                    <m:r>
+                      <a:rPr lang="en-US" altLang="ja-JP" sz="1800" i="1" smtClean="0">
+                        <a:solidFill>
+                          <a:srgbClr val="7030A0"/>
+                        </a:solidFill>
+                        <a:latin typeface="Cambria Math" panose="02040503050406030204" pitchFamily="18" charset="0"/>
+                      </a:rPr>
+                      <m:t>𝑁</m:t>
+                    </m:r>
+                    <m:r>
+                      <a:rPr lang="en-US" altLang="ja-JP" sz="1800" i="1" smtClean="0">
+                        <a:solidFill>
+                          <a:srgbClr val="7030A0"/>
+                        </a:solidFill>
+                        <a:latin typeface="Cambria Math" panose="02040503050406030204" pitchFamily="18" charset="0"/>
+                      </a:rPr>
+                      <m:t>]</m:t>
+                    </m:r>
+                  </m:oMath>
+                </a14:m>
+                <a:r>
+                  <a:rPr lang="en-US" altLang="ja-JP" sz="1800" dirty="0">
+                    <a:solidFill>
+                      <a:srgbClr val="7030A0"/>
+                    </a:solidFill>
+                  </a:rPr>
+                  <a:t> </a:t>
+                </a:r>
+              </a:p>
+            </p:txBody>
+          </p:sp>
+        </mc:Choice>
+        <mc:Fallback>
+          <p:sp>
+            <p:nvSpPr>
+              <p:cNvPr id="12" name="テキスト ボックス 11">
+                <a:extLst>
+                  <a:ext uri="{FF2B5EF4-FFF2-40B4-BE49-F238E27FC236}">
+                    <a16:creationId xmlns:a16="http://schemas.microsoft.com/office/drawing/2014/main" id="{5F9C7478-8BE7-40E1-AC23-D3482AE8FC24}"/>
+                  </a:ext>
+                </a:extLst>
+              </p:cNvPr>
+              <p:cNvSpPr txBox="1">
+                <a:spLocks noRot="1" noChangeAspect="1" noMove="1" noResize="1" noEditPoints="1" noAdjustHandles="1" noChangeArrowheads="1" noChangeShapeType="1" noTextEdit="1"/>
+              </p:cNvSpPr>
+              <p:nvPr/>
+            </p:nvSpPr>
+            <p:spPr>
+              <a:xfrm>
+                <a:off x="2660800" y="5860840"/>
+                <a:ext cx="1174376" cy="369332"/>
+              </a:xfrm>
+              <a:prstGeom prst="rect">
+                <a:avLst/>
+              </a:prstGeom>
+              <a:blipFill>
+                <a:blip r:embed="rId4"/>
+                <a:stretch>
+                  <a:fillRect l="-1554" r="-10881" b="-14754"/>
+                </a:stretch>
+              </a:blipFill>
+            </p:spPr>
+            <p:txBody>
+              <a:bodyPr/>
+              <a:lstStyle/>
+              <a:p>
+                <a:r>
+                  <a:rPr lang="ja-JP" altLang="en-US">
+                    <a:noFill/>
+                  </a:rPr>
+                  <a:t> </a:t>
+                </a:r>
+              </a:p>
+            </p:txBody>
+          </p:sp>
+        </mc:Fallback>
+      </mc:AlternateContent>
+      <p:cxnSp>
+        <p:nvCxnSpPr>
+          <p:cNvPr id="5" name="直線矢印コネクタ 4">
+            <a:extLst>
+              <a:ext uri="{FF2B5EF4-FFF2-40B4-BE49-F238E27FC236}">
+                <a16:creationId xmlns:a16="http://schemas.microsoft.com/office/drawing/2014/main" id="{CA53EC50-58D3-40C5-8C2F-BABEE5FA8DD1}"/>
+              </a:ext>
+            </a:extLst>
+          </p:cNvPr>
+          <p:cNvCxnSpPr/>
+          <p:nvPr/>
+        </p:nvCxnSpPr>
+        <p:spPr>
+          <a:xfrm flipV="1">
+            <a:off x="3247988" y="3466938"/>
+            <a:ext cx="880259" cy="1030942"/>
+          </a:xfrm>
+          <a:prstGeom prst="straightConnector1">
+            <a:avLst/>
+          </a:prstGeom>
+          <a:ln w="38100">
+            <a:solidFill>
+              <a:srgbClr val="FFC000"/>
+            </a:solidFill>
+            <a:tailEnd type="triangle"/>
+          </a:ln>
+        </p:spPr>
+        <p:style>
+          <a:lnRef idx="1">
+            <a:schemeClr val="accent1"/>
+          </a:lnRef>
+          <a:fillRef idx="0">
+            <a:schemeClr val="accent1"/>
+          </a:fillRef>
+          <a:effectRef idx="0">
+            <a:schemeClr val="accent1"/>
+          </a:effectRef>
+          <a:fontRef idx="minor">
+            <a:schemeClr val="tx1"/>
+          </a:fontRef>
+        </p:style>
+      </p:cxnSp>
+      <mc:AlternateContent xmlns:mc="http://schemas.openxmlformats.org/markup-compatibility/2006">
+        <mc:Choice xmlns:a14="http://schemas.microsoft.com/office/drawing/2010/main" Requires="a14">
+          <p:sp>
+            <p:nvSpPr>
+              <p:cNvPr id="13" name="テキスト ボックス 12">
+                <a:extLst>
+                  <a:ext uri="{FF2B5EF4-FFF2-40B4-BE49-F238E27FC236}">
+                    <a16:creationId xmlns:a16="http://schemas.microsoft.com/office/drawing/2014/main" id="{E26530F0-EA8A-4C50-8CC5-5C124E0DF2CF}"/>
+                  </a:ext>
+                </a:extLst>
+              </p:cNvPr>
+              <p:cNvSpPr txBox="1"/>
+              <p:nvPr/>
+            </p:nvSpPr>
+            <p:spPr>
+              <a:xfrm>
+                <a:off x="1242010" y="4071911"/>
+                <a:ext cx="6096000" cy="369332"/>
+              </a:xfrm>
+              <a:prstGeom prst="rect">
+                <a:avLst/>
+              </a:prstGeom>
+              <a:noFill/>
+            </p:spPr>
+            <p:txBody>
+              <a:bodyPr wrap="square">
+                <a:spAutoFit/>
+              </a:bodyPr>
+              <a:lstStyle/>
+              <a:p>
+                <a:pPr/>
+                <a14:m>
+                  <m:oMathPara xmlns:m="http://schemas.openxmlformats.org/officeDocument/2006/math">
+                    <m:oMathParaPr>
+                      <m:jc m:val="centerGroup"/>
+                    </m:oMathParaPr>
+                    <m:oMath xmlns:m="http://schemas.openxmlformats.org/officeDocument/2006/math">
+                      <m:r>
+                        <a:rPr lang="en-US" altLang="ja-JP" sz="1800" i="1" smtClean="0">
+                          <a:solidFill>
+                            <a:srgbClr val="FFC000"/>
+                          </a:solidFill>
+                          <a:latin typeface="Cambria Math" panose="02040503050406030204" pitchFamily="18" charset="0"/>
+                        </a:rPr>
+                        <m:t>[</m:t>
+                      </m:r>
+                      <m:r>
+                        <a:rPr lang="en-US" altLang="ja-JP" sz="1800" b="0" i="1" smtClean="0">
+                          <a:solidFill>
+                            <a:srgbClr val="FFC000"/>
+                          </a:solidFill>
+                          <a:latin typeface="Cambria Math" panose="02040503050406030204" pitchFamily="18" charset="0"/>
+                        </a:rPr>
+                        <m:t>50</m:t>
+                      </m:r>
+                      <m:r>
+                        <a:rPr lang="en-US" altLang="ja-JP" sz="1800" b="0" i="1" smtClean="0">
+                          <a:solidFill>
+                            <a:srgbClr val="FFC000"/>
+                          </a:solidFill>
+                          <a:latin typeface="Cambria Math" panose="02040503050406030204" pitchFamily="18" charset="0"/>
+                        </a:rPr>
+                        <m:t>𝑁</m:t>
+                      </m:r>
+                      <m:r>
+                        <a:rPr lang="en-US" altLang="ja-JP" sz="1800" b="0" i="1" smtClean="0">
+                          <a:solidFill>
+                            <a:srgbClr val="FFC000"/>
+                          </a:solidFill>
+                          <a:latin typeface="Cambria Math" panose="02040503050406030204" pitchFamily="18" charset="0"/>
+                        </a:rPr>
+                        <m:t>,86</m:t>
+                      </m:r>
+                      <m:r>
+                        <a:rPr lang="en-US" altLang="ja-JP" sz="1800" b="0" i="1" smtClean="0">
+                          <a:solidFill>
+                            <a:srgbClr val="FFC000"/>
+                          </a:solidFill>
+                          <a:latin typeface="Cambria Math" panose="02040503050406030204" pitchFamily="18" charset="0"/>
+                        </a:rPr>
+                        <m:t>𝑁</m:t>
+                      </m:r>
+                      <m:r>
+                        <a:rPr lang="en-US" altLang="ja-JP" sz="1800" i="1">
+                          <a:solidFill>
+                            <a:srgbClr val="FFC000"/>
+                          </a:solidFill>
+                          <a:latin typeface="Cambria Math" panose="02040503050406030204" pitchFamily="18" charset="0"/>
+                        </a:rPr>
+                        <m:t>]</m:t>
+                      </m:r>
+                    </m:oMath>
+                  </m:oMathPara>
+                </a14:m>
+                <a:endParaRPr lang="ja-JP" altLang="en-US" dirty="0">
+                  <a:solidFill>
+                    <a:srgbClr val="FFC000"/>
+                  </a:solidFill>
+                </a:endParaRPr>
+              </a:p>
+            </p:txBody>
+          </p:sp>
+        </mc:Choice>
+        <mc:Fallback>
+          <p:sp>
+            <p:nvSpPr>
+              <p:cNvPr id="13" name="テキスト ボックス 12">
+                <a:extLst>
+                  <a:ext uri="{FF2B5EF4-FFF2-40B4-BE49-F238E27FC236}">
+                    <a16:creationId xmlns:a16="http://schemas.microsoft.com/office/drawing/2014/main" id="{E26530F0-EA8A-4C50-8CC5-5C124E0DF2CF}"/>
+                  </a:ext>
+                </a:extLst>
+              </p:cNvPr>
+              <p:cNvSpPr txBox="1">
+                <a:spLocks noRot="1" noChangeAspect="1" noMove="1" noResize="1" noEditPoints="1" noAdjustHandles="1" noChangeArrowheads="1" noChangeShapeType="1" noTextEdit="1"/>
+              </p:cNvSpPr>
+              <p:nvPr/>
+            </p:nvSpPr>
+            <p:spPr>
+              <a:xfrm>
+                <a:off x="1242010" y="4071911"/>
+                <a:ext cx="6096000" cy="369332"/>
+              </a:xfrm>
+              <a:prstGeom prst="rect">
+                <a:avLst/>
+              </a:prstGeom>
+              <a:blipFill>
+                <a:blip r:embed="rId5"/>
+                <a:stretch>
+                  <a:fillRect b="-14754"/>
+                </a:stretch>
+              </a:blipFill>
+            </p:spPr>
+            <p:txBody>
+              <a:bodyPr/>
+              <a:lstStyle/>
+              <a:p>
+                <a:r>
+                  <a:rPr lang="ja-JP" altLang="en-US">
+                    <a:noFill/>
+                  </a:rPr>
+                  <a:t> </a:t>
+                </a:r>
+              </a:p>
+            </p:txBody>
+          </p:sp>
+        </mc:Fallback>
+      </mc:AlternateContent>
+      <p:cxnSp>
+        <p:nvCxnSpPr>
+          <p:cNvPr id="10" name="直線矢印コネクタ 9">
+            <a:extLst>
+              <a:ext uri="{FF2B5EF4-FFF2-40B4-BE49-F238E27FC236}">
+                <a16:creationId xmlns:a16="http://schemas.microsoft.com/office/drawing/2014/main" id="{8B65E137-FF19-45DC-B8AB-48CF040F4DA9}"/>
+              </a:ext>
+            </a:extLst>
+          </p:cNvPr>
+          <p:cNvCxnSpPr>
+            <a:cxnSpLocks/>
+          </p:cNvCxnSpPr>
+          <p:nvPr/>
+        </p:nvCxnSpPr>
+        <p:spPr>
+          <a:xfrm flipV="1">
+            <a:off x="2605331" y="3466938"/>
+            <a:ext cx="0" cy="889911"/>
+          </a:xfrm>
+          <a:prstGeom prst="straightConnector1">
+            <a:avLst/>
+          </a:prstGeom>
+          <a:ln w="38100">
+            <a:solidFill>
+              <a:srgbClr val="00B050"/>
+            </a:solidFill>
+            <a:tailEnd type="triangle"/>
+          </a:ln>
+        </p:spPr>
+        <p:style>
+          <a:lnRef idx="1">
+            <a:schemeClr val="accent1"/>
+          </a:lnRef>
+          <a:fillRef idx="0">
+            <a:schemeClr val="accent1"/>
+          </a:fillRef>
+          <a:effectRef idx="0">
+            <a:schemeClr val="accent1"/>
+          </a:effectRef>
+          <a:fontRef idx="minor">
+            <a:schemeClr val="tx1"/>
+          </a:fontRef>
+        </p:style>
+      </p:cxnSp>
+      <mc:AlternateContent xmlns:mc="http://schemas.openxmlformats.org/markup-compatibility/2006">
+        <mc:Choice xmlns:a14="http://schemas.microsoft.com/office/drawing/2010/main" Requires="a14">
+          <p:sp>
+            <p:nvSpPr>
+              <p:cNvPr id="14" name="テキスト ボックス 13">
+                <a:extLst>
+                  <a:ext uri="{FF2B5EF4-FFF2-40B4-BE49-F238E27FC236}">
+                    <a16:creationId xmlns:a16="http://schemas.microsoft.com/office/drawing/2014/main" id="{A59F2E55-2B4C-4A9E-B022-0FA7810E8D75}"/>
+                  </a:ext>
+                </a:extLst>
+              </p:cNvPr>
+              <p:cNvSpPr txBox="1"/>
+              <p:nvPr/>
+            </p:nvSpPr>
+            <p:spPr>
+              <a:xfrm>
+                <a:off x="1486424" y="3772688"/>
+                <a:ext cx="1174376" cy="369332"/>
+              </a:xfrm>
+              <a:prstGeom prst="rect">
+                <a:avLst/>
+              </a:prstGeom>
+              <a:noFill/>
+            </p:spPr>
+            <p:txBody>
+              <a:bodyPr wrap="square">
+                <a:spAutoFit/>
+              </a:bodyPr>
+              <a:lstStyle/>
+              <a:p>
+                <a14:m>
+                  <m:oMath xmlns:m="http://schemas.openxmlformats.org/officeDocument/2006/math">
+                    <m:r>
+                      <a:rPr lang="en-US" altLang="ja-JP" sz="1800" i="1" smtClean="0">
+                        <a:solidFill>
+                          <a:srgbClr val="00B050"/>
+                        </a:solidFill>
+                        <a:latin typeface="Cambria Math" panose="02040503050406030204" pitchFamily="18" charset="0"/>
+                      </a:rPr>
+                      <m:t>[0, </m:t>
+                    </m:r>
+                    <m:r>
+                      <a:rPr lang="en-US" altLang="ja-JP" sz="1800" b="0" i="1" smtClean="0">
+                        <a:solidFill>
+                          <a:srgbClr val="00B050"/>
+                        </a:solidFill>
+                        <a:latin typeface="Cambria Math" panose="02040503050406030204" pitchFamily="18" charset="0"/>
+                      </a:rPr>
+                      <m:t>110</m:t>
+                    </m:r>
+                    <m:r>
+                      <a:rPr lang="en-US" altLang="ja-JP" sz="1800" i="1" smtClean="0">
+                        <a:solidFill>
+                          <a:srgbClr val="00B050"/>
+                        </a:solidFill>
+                        <a:latin typeface="Cambria Math" panose="02040503050406030204" pitchFamily="18" charset="0"/>
+                      </a:rPr>
+                      <m:t>𝑁</m:t>
+                    </m:r>
+                    <m:r>
+                      <a:rPr lang="en-US" altLang="ja-JP" sz="1800" i="1" smtClean="0">
+                        <a:solidFill>
+                          <a:srgbClr val="00B050"/>
+                        </a:solidFill>
+                        <a:latin typeface="Cambria Math" panose="02040503050406030204" pitchFamily="18" charset="0"/>
+                      </a:rPr>
+                      <m:t>]</m:t>
+                    </m:r>
+                  </m:oMath>
+                </a14:m>
+                <a:r>
+                  <a:rPr lang="en-US" altLang="ja-JP" sz="1800" dirty="0">
+                    <a:solidFill>
+                      <a:srgbClr val="00B050"/>
+                    </a:solidFill>
+                  </a:rPr>
+                  <a:t> </a:t>
+                </a:r>
+              </a:p>
+            </p:txBody>
+          </p:sp>
+        </mc:Choice>
+        <mc:Fallback>
+          <p:sp>
+            <p:nvSpPr>
+              <p:cNvPr id="14" name="テキスト ボックス 13">
+                <a:extLst>
+                  <a:ext uri="{FF2B5EF4-FFF2-40B4-BE49-F238E27FC236}">
+                    <a16:creationId xmlns:a16="http://schemas.microsoft.com/office/drawing/2014/main" id="{A59F2E55-2B4C-4A9E-B022-0FA7810E8D75}"/>
+                  </a:ext>
+                </a:extLst>
+              </p:cNvPr>
+              <p:cNvSpPr txBox="1">
+                <a:spLocks noRot="1" noChangeAspect="1" noMove="1" noResize="1" noEditPoints="1" noAdjustHandles="1" noChangeArrowheads="1" noChangeShapeType="1" noTextEdit="1"/>
+              </p:cNvSpPr>
+              <p:nvPr/>
+            </p:nvSpPr>
+            <p:spPr>
+              <a:xfrm>
+                <a:off x="1486424" y="3772688"/>
+                <a:ext cx="1174376" cy="369332"/>
+              </a:xfrm>
+              <a:prstGeom prst="rect">
+                <a:avLst/>
+              </a:prstGeom>
+              <a:blipFill>
+                <a:blip r:embed="rId6"/>
+                <a:stretch>
+                  <a:fillRect l="-2083" b="-16667"/>
+                </a:stretch>
+              </a:blipFill>
+            </p:spPr>
+            <p:txBody>
+              <a:bodyPr/>
+              <a:lstStyle/>
+              <a:p>
+                <a:r>
+                  <a:rPr lang="ja-JP" altLang="en-US">
+                    <a:noFill/>
+                  </a:rPr>
+                  <a:t> </a:t>
+                </a:r>
+              </a:p>
+            </p:txBody>
+          </p:sp>
+        </mc:Fallback>
+      </mc:AlternateContent>
+    </p:spTree>
+    <p:extLst>
+      <p:ext uri="{BB962C8B-B14F-4D97-AF65-F5344CB8AC3E}">
+        <p14:creationId xmlns:p14="http://schemas.microsoft.com/office/powerpoint/2010/main" val="2380648597"/>
       </p:ext>
     </p:extLst>
   </p:cSld>

--- a/ゲーム科2年/00_前期/ゲーム開発Ⅰ/ゲーム物理学/座学/18_合力.pptx
+++ b/ゲーム科2年/00_前期/ゲーム開発Ⅰ/ゲーム物理学/座学/18_合力.pptx
@@ -270,7 +270,7 @@
           <a:p>
             <a:fld id="{E9CC885B-4903-4D54-9A93-00025F12DED9}" type="datetimeFigureOut">
               <a:rPr kumimoji="1" lang="ja-JP" altLang="en-US" smtClean="0"/>
-              <a:t>2025/9/29</a:t>
+              <a:t>2025/9/30</a:t>
             </a:fld>
             <a:endParaRPr kumimoji="1" lang="ja-JP" altLang="en-US"/>
           </a:p>
@@ -500,7 +500,7 @@
           <a:p>
             <a:fld id="{E9CC885B-4903-4D54-9A93-00025F12DED9}" type="datetimeFigureOut">
               <a:rPr kumimoji="1" lang="ja-JP" altLang="en-US" smtClean="0"/>
-              <a:t>2025/9/29</a:t>
+              <a:t>2025/9/30</a:t>
             </a:fld>
             <a:endParaRPr kumimoji="1" lang="ja-JP" altLang="en-US"/>
           </a:p>
@@ -740,7 +740,7 @@
           <a:p>
             <a:fld id="{E9CC885B-4903-4D54-9A93-00025F12DED9}" type="datetimeFigureOut">
               <a:rPr kumimoji="1" lang="ja-JP" altLang="en-US" smtClean="0"/>
-              <a:t>2025/9/29</a:t>
+              <a:t>2025/9/30</a:t>
             </a:fld>
             <a:endParaRPr kumimoji="1" lang="ja-JP" altLang="en-US"/>
           </a:p>
@@ -970,7 +970,7 @@
           <a:p>
             <a:fld id="{E9CC885B-4903-4D54-9A93-00025F12DED9}" type="datetimeFigureOut">
               <a:rPr kumimoji="1" lang="ja-JP" altLang="en-US" smtClean="0"/>
-              <a:t>2025/9/29</a:t>
+              <a:t>2025/9/30</a:t>
             </a:fld>
             <a:endParaRPr kumimoji="1" lang="ja-JP" altLang="en-US"/>
           </a:p>
@@ -1245,7 +1245,7 @@
           <a:p>
             <a:fld id="{E9CC885B-4903-4D54-9A93-00025F12DED9}" type="datetimeFigureOut">
               <a:rPr kumimoji="1" lang="ja-JP" altLang="en-US" smtClean="0"/>
-              <a:t>2025/9/29</a:t>
+              <a:t>2025/9/30</a:t>
             </a:fld>
             <a:endParaRPr kumimoji="1" lang="ja-JP" altLang="en-US"/>
           </a:p>
@@ -1574,7 +1574,7 @@
           <a:p>
             <a:fld id="{E9CC885B-4903-4D54-9A93-00025F12DED9}" type="datetimeFigureOut">
               <a:rPr kumimoji="1" lang="ja-JP" altLang="en-US" smtClean="0"/>
-              <a:t>2025/9/29</a:t>
+              <a:t>2025/9/30</a:t>
             </a:fld>
             <a:endParaRPr kumimoji="1" lang="ja-JP" altLang="en-US"/>
           </a:p>
@@ -2050,7 +2050,7 @@
           <a:p>
             <a:fld id="{E9CC885B-4903-4D54-9A93-00025F12DED9}" type="datetimeFigureOut">
               <a:rPr kumimoji="1" lang="ja-JP" altLang="en-US" smtClean="0"/>
-              <a:t>2025/9/29</a:t>
+              <a:t>2025/9/30</a:t>
             </a:fld>
             <a:endParaRPr kumimoji="1" lang="ja-JP" altLang="en-US"/>
           </a:p>
@@ -2191,7 +2191,7 @@
           <a:p>
             <a:fld id="{E9CC885B-4903-4D54-9A93-00025F12DED9}" type="datetimeFigureOut">
               <a:rPr kumimoji="1" lang="ja-JP" altLang="en-US" smtClean="0"/>
-              <a:t>2025/9/29</a:t>
+              <a:t>2025/9/30</a:t>
             </a:fld>
             <a:endParaRPr kumimoji="1" lang="ja-JP" altLang="en-US"/>
           </a:p>
@@ -2304,7 +2304,7 @@
           <a:p>
             <a:fld id="{E9CC885B-4903-4D54-9A93-00025F12DED9}" type="datetimeFigureOut">
               <a:rPr kumimoji="1" lang="ja-JP" altLang="en-US" smtClean="0"/>
-              <a:t>2025/9/29</a:t>
+              <a:t>2025/9/30</a:t>
             </a:fld>
             <a:endParaRPr kumimoji="1" lang="ja-JP" altLang="en-US"/>
           </a:p>
@@ -2647,7 +2647,7 @@
           <a:p>
             <a:fld id="{E9CC885B-4903-4D54-9A93-00025F12DED9}" type="datetimeFigureOut">
               <a:rPr kumimoji="1" lang="ja-JP" altLang="en-US" smtClean="0"/>
-              <a:t>2025/9/29</a:t>
+              <a:t>2025/9/30</a:t>
             </a:fld>
             <a:endParaRPr kumimoji="1" lang="ja-JP" altLang="en-US"/>
           </a:p>
@@ -2935,7 +2935,7 @@
           <a:p>
             <a:fld id="{E9CC885B-4903-4D54-9A93-00025F12DED9}" type="datetimeFigureOut">
               <a:rPr kumimoji="1" lang="ja-JP" altLang="en-US" smtClean="0"/>
-              <a:t>2025/9/29</a:t>
+              <a:t>2025/9/30</a:t>
             </a:fld>
             <a:endParaRPr kumimoji="1" lang="ja-JP" altLang="en-US"/>
           </a:p>
@@ -3208,7 +3208,7 @@
           <a:p>
             <a:fld id="{E9CC885B-4903-4D54-9A93-00025F12DED9}" type="datetimeFigureOut">
               <a:rPr kumimoji="1" lang="ja-JP" altLang="en-US" smtClean="0"/>
-              <a:t>2025/9/29</a:t>
+              <a:t>2025/9/30</a:t>
             </a:fld>
             <a:endParaRPr kumimoji="1" lang="ja-JP" altLang="en-US"/>
           </a:p>
@@ -4017,8 +4017,8 @@
           </a:p>
         </p:txBody>
       </p:sp>
-      <mc:AlternateContent xmlns:mc="http://schemas.openxmlformats.org/markup-compatibility/2006">
-        <mc:Choice xmlns:a14="http://schemas.microsoft.com/office/drawing/2010/main" Requires="a14">
+      <mc:AlternateContent xmlns:mc="http://schemas.openxmlformats.org/markup-compatibility/2006" xmlns:a14="http://schemas.microsoft.com/office/drawing/2010/main">
+        <mc:Choice Requires="a14">
           <p:sp>
             <p:nvSpPr>
               <p:cNvPr id="16" name="テキスト ボックス 15">
@@ -4173,7 +4173,7 @@
             </p:txBody>
           </p:sp>
         </mc:Choice>
-        <mc:Fallback>
+        <mc:Fallback xmlns="">
           <p:sp>
             <p:nvSpPr>
               <p:cNvPr id="16" name="テキスト ボックス 15">
@@ -4262,8 +4262,8 @@
           </a:fontRef>
         </p:style>
       </p:cxnSp>
-      <mc:AlternateContent xmlns:mc="http://schemas.openxmlformats.org/markup-compatibility/2006">
-        <mc:Choice xmlns:a14="http://schemas.microsoft.com/office/drawing/2010/main" Requires="a14">
+      <mc:AlternateContent xmlns:mc="http://schemas.openxmlformats.org/markup-compatibility/2006" xmlns:a14="http://schemas.microsoft.com/office/drawing/2010/main">
+        <mc:Choice Requires="a14">
           <p:sp>
             <p:nvSpPr>
               <p:cNvPr id="12" name="テキスト ボックス 11">
@@ -4353,7 +4353,7 @@
             </p:txBody>
           </p:sp>
         </mc:Choice>
-        <mc:Fallback>
+        <mc:Fallback xmlns="">
           <p:sp>
             <p:nvSpPr>
               <p:cNvPr id="12" name="テキスト ボックス 11">
@@ -4440,8 +4440,8 @@
           </a:fontRef>
         </p:style>
       </p:cxnSp>
-      <mc:AlternateContent xmlns:mc="http://schemas.openxmlformats.org/markup-compatibility/2006">
-        <mc:Choice xmlns:a14="http://schemas.microsoft.com/office/drawing/2010/main" Requires="a14">
+      <mc:AlternateContent xmlns:mc="http://schemas.openxmlformats.org/markup-compatibility/2006" xmlns:a14="http://schemas.microsoft.com/office/drawing/2010/main">
+        <mc:Choice Requires="a14">
           <p:sp>
             <p:nvSpPr>
               <p:cNvPr id="13" name="テキスト ボックス 12">
@@ -4543,7 +4543,7 @@
             </p:txBody>
           </p:sp>
         </mc:Choice>
-        <mc:Fallback>
+        <mc:Fallback xmlns="">
           <p:sp>
             <p:nvSpPr>
               <p:cNvPr id="13" name="テキスト ボックス 12">
@@ -4632,8 +4632,8 @@
           </a:fontRef>
         </p:style>
       </p:cxnSp>
-      <mc:AlternateContent xmlns:mc="http://schemas.openxmlformats.org/markup-compatibility/2006">
-        <mc:Choice xmlns:a14="http://schemas.microsoft.com/office/drawing/2010/main" Requires="a14">
+      <mc:AlternateContent xmlns:mc="http://schemas.openxmlformats.org/markup-compatibility/2006" xmlns:a14="http://schemas.microsoft.com/office/drawing/2010/main">
+        <mc:Choice Requires="a14">
           <p:sp>
             <p:nvSpPr>
               <p:cNvPr id="14" name="テキスト ボックス 13">
@@ -4714,7 +4714,7 @@
             </p:txBody>
           </p:sp>
         </mc:Choice>
-        <mc:Fallback>
+        <mc:Fallback xmlns="">
           <p:sp>
             <p:nvSpPr>
               <p:cNvPr id="14" name="テキスト ボックス 13">
@@ -4803,8 +4803,8 @@
           </a:fontRef>
         </p:style>
       </p:cxnSp>
-      <mc:AlternateContent xmlns:mc="http://schemas.openxmlformats.org/markup-compatibility/2006">
-        <mc:Choice xmlns:a14="http://schemas.microsoft.com/office/drawing/2010/main" Requires="a14">
+      <mc:AlternateContent xmlns:mc="http://schemas.openxmlformats.org/markup-compatibility/2006" xmlns:a14="http://schemas.microsoft.com/office/drawing/2010/main">
+        <mc:Choice Requires="a14">
           <p:sp>
             <p:nvSpPr>
               <p:cNvPr id="17" name="テキスト ボックス 16">
@@ -4879,7 +4879,7 @@
             </p:txBody>
           </p:sp>
         </mc:Choice>
-        <mc:Fallback>
+        <mc:Fallback xmlns="">
           <p:sp>
             <p:nvSpPr>
               <p:cNvPr id="17" name="テキスト ボックス 16">
@@ -5174,8 +5174,8 @@
           </a:p>
         </p:txBody>
       </p:sp>
-      <mc:AlternateContent xmlns:mc="http://schemas.openxmlformats.org/markup-compatibility/2006">
-        <mc:Choice xmlns:a14="http://schemas.microsoft.com/office/drawing/2010/main" Requires="a14">
+      <mc:AlternateContent xmlns:mc="http://schemas.openxmlformats.org/markup-compatibility/2006" xmlns:a14="http://schemas.microsoft.com/office/drawing/2010/main">
+        <mc:Choice Requires="a14">
           <p:sp>
             <p:nvSpPr>
               <p:cNvPr id="16" name="テキスト ボックス 15">
@@ -5401,7 +5401,7 @@
             </p:txBody>
           </p:sp>
         </mc:Choice>
-        <mc:Fallback>
+        <mc:Fallback xmlns="">
           <p:sp>
             <p:nvSpPr>
               <p:cNvPr id="16" name="テキスト ボックス 15">
@@ -5490,8 +5490,8 @@
           </a:fontRef>
         </p:style>
       </p:cxnSp>
-      <mc:AlternateContent xmlns:mc="http://schemas.openxmlformats.org/markup-compatibility/2006">
-        <mc:Choice xmlns:a14="http://schemas.microsoft.com/office/drawing/2010/main" Requires="a14">
+      <mc:AlternateContent xmlns:mc="http://schemas.openxmlformats.org/markup-compatibility/2006" xmlns:a14="http://schemas.microsoft.com/office/drawing/2010/main">
+        <mc:Choice Requires="a14">
           <p:sp>
             <p:nvSpPr>
               <p:cNvPr id="12" name="テキスト ボックス 11">
@@ -5581,7 +5581,7 @@
             </p:txBody>
           </p:sp>
         </mc:Choice>
-        <mc:Fallback>
+        <mc:Fallback xmlns="">
           <p:sp>
             <p:nvSpPr>
               <p:cNvPr id="12" name="テキスト ボックス 11">
@@ -5668,8 +5668,8 @@
           </a:fontRef>
         </p:style>
       </p:cxnSp>
-      <mc:AlternateContent xmlns:mc="http://schemas.openxmlformats.org/markup-compatibility/2006">
-        <mc:Choice xmlns:a14="http://schemas.microsoft.com/office/drawing/2010/main" Requires="a14">
+      <mc:AlternateContent xmlns:mc="http://schemas.openxmlformats.org/markup-compatibility/2006" xmlns:a14="http://schemas.microsoft.com/office/drawing/2010/main">
+        <mc:Choice Requires="a14">
           <p:sp>
             <p:nvSpPr>
               <p:cNvPr id="13" name="テキスト ボックス 12">
@@ -5771,7 +5771,7 @@
             </p:txBody>
           </p:sp>
         </mc:Choice>
-        <mc:Fallback>
+        <mc:Fallback xmlns="">
           <p:sp>
             <p:nvSpPr>
               <p:cNvPr id="13" name="テキスト ボックス 12">
@@ -5860,8 +5860,8 @@
           </a:fontRef>
         </p:style>
       </p:cxnSp>
-      <mc:AlternateContent xmlns:mc="http://schemas.openxmlformats.org/markup-compatibility/2006">
-        <mc:Choice xmlns:a14="http://schemas.microsoft.com/office/drawing/2010/main" Requires="a14">
+      <mc:AlternateContent xmlns:mc="http://schemas.openxmlformats.org/markup-compatibility/2006" xmlns:a14="http://schemas.microsoft.com/office/drawing/2010/main">
+        <mc:Choice Requires="a14">
           <p:sp>
             <p:nvSpPr>
               <p:cNvPr id="14" name="テキスト ボックス 13">
@@ -5942,7 +5942,7 @@
             </p:txBody>
           </p:sp>
         </mc:Choice>
-        <mc:Fallback>
+        <mc:Fallback xmlns="">
           <p:sp>
             <p:nvSpPr>
               <p:cNvPr id="14" name="テキスト ボックス 13">
@@ -6031,8 +6031,8 @@
           </a:fontRef>
         </p:style>
       </p:cxnSp>
-      <mc:AlternateContent xmlns:mc="http://schemas.openxmlformats.org/markup-compatibility/2006">
-        <mc:Choice xmlns:a14="http://schemas.microsoft.com/office/drawing/2010/main" Requires="a14">
+      <mc:AlternateContent xmlns:mc="http://schemas.openxmlformats.org/markup-compatibility/2006" xmlns:a14="http://schemas.microsoft.com/office/drawing/2010/main">
+        <mc:Choice Requires="a14">
           <p:sp>
             <p:nvSpPr>
               <p:cNvPr id="17" name="テキスト ボックス 16">
@@ -6107,7 +6107,7 @@
             </p:txBody>
           </p:sp>
         </mc:Choice>
-        <mc:Fallback>
+        <mc:Fallback xmlns="">
           <p:sp>
             <p:nvSpPr>
               <p:cNvPr id="17" name="テキスト ボックス 16">
@@ -6300,7 +6300,7 @@
             <p:spPr>
               <a:xfrm>
                 <a:off x="567542" y="1216429"/>
-                <a:ext cx="8026556" cy="1200329"/>
+                <a:ext cx="8026556" cy="1569660"/>
               </a:xfrm>
               <a:prstGeom prst="rect">
                 <a:avLst/>
@@ -6353,19 +6353,58 @@
                       <a:rPr lang="en-US" altLang="ja-JP" sz="2400" i="1" dirty="0">
                         <a:latin typeface="Cambria Math" panose="02040503050406030204" pitchFamily="18" charset="0"/>
                       </a:rPr>
-                      <m:t>30</m:t>
-                    </m:r>
-                    <m:r>
-                      <a:rPr lang="en-US" altLang="ja-JP" sz="2400" i="1" dirty="0">
-                        <a:latin typeface="Cambria Math" panose="02040503050406030204" pitchFamily="18" charset="0"/>
-                      </a:rPr>
-                      <m:t>°</m:t>
+                      <m:t>30°</m:t>
                     </m:r>
                   </m:oMath>
                 </a14:m>
                 <a:r>
                   <a:rPr lang="ja-JP" altLang="en-US" sz="2400" dirty="0"/>
                   <a:t>のとき、箱に働く合力を求めなさい。</a:t>
+                </a:r>
+                <a:endParaRPr lang="en-US" altLang="ja-JP" sz="2400" dirty="0"/>
+              </a:p>
+              <a:p>
+                <a:r>
+                  <a:rPr lang="ja-JP" altLang="en-US" sz="2400" dirty="0"/>
+                  <a:t>ただし、</a:t>
+                </a:r>
+                <a14:m>
+                  <m:oMath xmlns:m="http://schemas.openxmlformats.org/officeDocument/2006/math">
+                    <m:r>
+                      <a:rPr lang="en-US" altLang="ja-JP" sz="2400" b="0" i="1" smtClean="0">
+                        <a:latin typeface="Cambria Math" panose="02040503050406030204" pitchFamily="18" charset="0"/>
+                      </a:rPr>
+                      <m:t>𝑠𝑖𝑛</m:t>
+                    </m:r>
+                    <m:r>
+                      <a:rPr lang="en-US" altLang="ja-JP" sz="2400" b="0" i="1" smtClean="0">
+                        <a:latin typeface="Cambria Math" panose="02040503050406030204" pitchFamily="18" charset="0"/>
+                      </a:rPr>
+                      <m:t>30°=0.5,</m:t>
+                    </m:r>
+                    <m:r>
+                      <a:rPr lang="en-US" altLang="ja-JP" sz="2400" b="0" i="1" smtClean="0">
+                        <a:latin typeface="Cambria Math" panose="02040503050406030204" pitchFamily="18" charset="0"/>
+                      </a:rPr>
+                      <m:t>𝑐𝑜𝑠</m:t>
+                    </m:r>
+                    <m:r>
+                      <a:rPr lang="en-US" altLang="ja-JP" sz="2400" i="1">
+                        <a:latin typeface="Cambria Math" panose="02040503050406030204" pitchFamily="18" charset="0"/>
+                      </a:rPr>
+                      <m:t>30°=0.</m:t>
+                    </m:r>
+                    <m:r>
+                      <a:rPr lang="en-US" altLang="ja-JP" sz="2400" b="0" i="1" smtClean="0">
+                        <a:latin typeface="Cambria Math" panose="02040503050406030204" pitchFamily="18" charset="0"/>
+                      </a:rPr>
+                      <m:t>86</m:t>
+                    </m:r>
+                  </m:oMath>
+                </a14:m>
+                <a:r>
+                  <a:rPr lang="ja-JP" altLang="en-US" sz="2400"/>
+                  <a:t>で計算すること。</a:t>
                 </a:r>
                 <a:endParaRPr lang="en-US" altLang="ja-JP" sz="2400" dirty="0"/>
               </a:p>
@@ -6390,7 +6429,7 @@
             <p:spPr>
               <a:xfrm>
                 <a:off x="567542" y="1216429"/>
-                <a:ext cx="8026556" cy="1200329"/>
+                <a:ext cx="8026556" cy="1569660"/>
               </a:xfrm>
               <a:prstGeom prst="rect">
                 <a:avLst/>
@@ -6398,7 +6437,7 @@
               <a:blipFill>
                 <a:blip r:embed="rId2"/>
                 <a:stretch>
-                  <a:fillRect l="-1139" t="-4082" r="-228" b="-11224"/>
+                  <a:fillRect l="-1139" t="-3113" r="-228" b="-8171"/>
                 </a:stretch>
               </a:blipFill>
             </p:spPr>
@@ -8712,8 +8751,8 @@
           </a:p>
         </p:txBody>
       </p:sp>
-      <mc:AlternateContent xmlns:mc="http://schemas.openxmlformats.org/markup-compatibility/2006">
-        <mc:Choice xmlns:a14="http://schemas.microsoft.com/office/drawing/2010/main" Requires="a14">
+      <mc:AlternateContent xmlns:mc="http://schemas.openxmlformats.org/markup-compatibility/2006" xmlns:a14="http://schemas.microsoft.com/office/drawing/2010/main">
+        <mc:Choice Requires="a14">
           <p:sp>
             <p:nvSpPr>
               <p:cNvPr id="8" name="テキスト ボックス 7">
@@ -8742,6 +8781,7 @@
               </a:bodyPr>
               <a:lstStyle/>
               <a:p>
+                <a:pPr/>
                 <a14:m>
                   <m:oMathPara xmlns:m="http://schemas.openxmlformats.org/officeDocument/2006/math">
                     <m:oMathParaPr>
@@ -8768,7 +8808,7 @@
             </p:txBody>
           </p:sp>
         </mc:Choice>
-        <mc:Fallback>
+        <mc:Fallback xmlns="">
           <p:sp>
             <p:nvSpPr>
               <p:cNvPr id="8" name="テキスト ボックス 7">
@@ -9197,8 +9237,8 @@
           </a:p>
         </p:txBody>
       </p:sp>
-      <mc:AlternateContent xmlns:mc="http://schemas.openxmlformats.org/markup-compatibility/2006">
-        <mc:Choice xmlns:a14="http://schemas.microsoft.com/office/drawing/2010/main" Requires="a14">
+      <mc:AlternateContent xmlns:mc="http://schemas.openxmlformats.org/markup-compatibility/2006" xmlns:a14="http://schemas.microsoft.com/office/drawing/2010/main">
+        <mc:Choice Requires="a14">
           <p:sp>
             <p:nvSpPr>
               <p:cNvPr id="16" name="テキスト ボックス 15">
@@ -9381,7 +9421,7 @@
             </p:txBody>
           </p:sp>
         </mc:Choice>
-        <mc:Fallback>
+        <mc:Fallback xmlns="">
           <p:sp>
             <p:nvSpPr>
               <p:cNvPr id="16" name="テキスト ボックス 15">
@@ -9470,8 +9510,8 @@
           </a:fontRef>
         </p:style>
       </p:cxnSp>
-      <mc:AlternateContent xmlns:mc="http://schemas.openxmlformats.org/markup-compatibility/2006">
-        <mc:Choice xmlns:a14="http://schemas.microsoft.com/office/drawing/2010/main" Requires="a14">
+      <mc:AlternateContent xmlns:mc="http://schemas.openxmlformats.org/markup-compatibility/2006" xmlns:a14="http://schemas.microsoft.com/office/drawing/2010/main">
+        <mc:Choice Requires="a14">
           <p:sp>
             <p:nvSpPr>
               <p:cNvPr id="12" name="テキスト ボックス 11">
@@ -9561,7 +9601,7 @@
             </p:txBody>
           </p:sp>
         </mc:Choice>
-        <mc:Fallback>
+        <mc:Fallback xmlns="">
           <p:sp>
             <p:nvSpPr>
               <p:cNvPr id="12" name="テキスト ボックス 11">
@@ -9921,8 +9961,8 @@
           </a:p>
         </p:txBody>
       </p:sp>
-      <mc:AlternateContent xmlns:mc="http://schemas.openxmlformats.org/markup-compatibility/2006">
-        <mc:Choice xmlns:a14="http://schemas.microsoft.com/office/drawing/2010/main" Requires="a14">
+      <mc:AlternateContent xmlns:mc="http://schemas.openxmlformats.org/markup-compatibility/2006" xmlns:a14="http://schemas.microsoft.com/office/drawing/2010/main">
+        <mc:Choice Requires="a14">
           <p:sp>
             <p:nvSpPr>
               <p:cNvPr id="16" name="テキスト ボックス 15">
@@ -10030,13 +10070,7 @@
                       <a:rPr lang="en-US" altLang="ja-JP" sz="2400" i="1">
                         <a:latin typeface="Cambria Math" panose="02040503050406030204" pitchFamily="18" charset="0"/>
                       </a:rPr>
-                      <m:t>60°</m:t>
-                    </m:r>
-                    <m:r>
-                      <a:rPr lang="en-US" altLang="ja-JP" sz="2400" i="1">
-                        <a:latin typeface="Cambria Math" panose="02040503050406030204" pitchFamily="18" charset="0"/>
-                      </a:rPr>
-                      <m:t>]</m:t>
+                      <m:t>60°]</m:t>
                     </m:r>
                   </m:oMath>
                 </a14:m>
@@ -10064,19 +10098,7 @@
                       <a:rPr lang="en-US" altLang="ja-JP" sz="2400" b="0" i="1" smtClean="0">
                         <a:latin typeface="Cambria Math" panose="02040503050406030204" pitchFamily="18" charset="0"/>
                       </a:rPr>
-                      <m:t>50</m:t>
-                    </m:r>
-                    <m:r>
-                      <a:rPr lang="en-US" altLang="ja-JP" sz="2400" b="0" i="1" smtClean="0">
-                        <a:latin typeface="Cambria Math" panose="02040503050406030204" pitchFamily="18" charset="0"/>
-                      </a:rPr>
-                      <m:t>,</m:t>
-                    </m:r>
-                    <m:r>
-                      <a:rPr lang="en-US" altLang="ja-JP" sz="2400" b="0" i="1" smtClean="0">
-                        <a:latin typeface="Cambria Math" panose="02040503050406030204" pitchFamily="18" charset="0"/>
-                      </a:rPr>
-                      <m:t>86</m:t>
+                      <m:t>50,86</m:t>
                     </m:r>
                     <m:r>
                       <a:rPr lang="en-US" altLang="ja-JP" sz="2400" i="1">
@@ -10097,7 +10119,7 @@
             </p:txBody>
           </p:sp>
         </mc:Choice>
-        <mc:Fallback>
+        <mc:Fallback xmlns="">
           <p:sp>
             <p:nvSpPr>
               <p:cNvPr id="16" name="テキスト ボックス 15">
@@ -10186,8 +10208,8 @@
           </a:fontRef>
         </p:style>
       </p:cxnSp>
-      <mc:AlternateContent xmlns:mc="http://schemas.openxmlformats.org/markup-compatibility/2006">
-        <mc:Choice xmlns:a14="http://schemas.microsoft.com/office/drawing/2010/main" Requires="a14">
+      <mc:AlternateContent xmlns:mc="http://schemas.openxmlformats.org/markup-compatibility/2006" xmlns:a14="http://schemas.microsoft.com/office/drawing/2010/main">
+        <mc:Choice Requires="a14">
           <p:sp>
             <p:nvSpPr>
               <p:cNvPr id="12" name="テキスト ボックス 11">
@@ -10277,7 +10299,7 @@
             </p:txBody>
           </p:sp>
         </mc:Choice>
-        <mc:Fallback>
+        <mc:Fallback xmlns="">
           <p:sp>
             <p:nvSpPr>
               <p:cNvPr id="12" name="テキスト ボックス 11">
@@ -10364,8 +10386,8 @@
           </a:fontRef>
         </p:style>
       </p:cxnSp>
-      <mc:AlternateContent xmlns:mc="http://schemas.openxmlformats.org/markup-compatibility/2006">
-        <mc:Choice xmlns:a14="http://schemas.microsoft.com/office/drawing/2010/main" Requires="a14">
+      <mc:AlternateContent xmlns:mc="http://schemas.openxmlformats.org/markup-compatibility/2006" xmlns:a14="http://schemas.microsoft.com/office/drawing/2010/main">
+        <mc:Choice Requires="a14">
           <p:sp>
             <p:nvSpPr>
               <p:cNvPr id="14" name="テキスト ボックス 13">
@@ -10467,7 +10489,7 @@
             </p:txBody>
           </p:sp>
         </mc:Choice>
-        <mc:Fallback>
+        <mc:Fallback xmlns="">
           <p:sp>
             <p:nvSpPr>
               <p:cNvPr id="14" name="テキスト ボックス 13">
@@ -10762,8 +10784,8 @@
           </a:p>
         </p:txBody>
       </p:sp>
-      <mc:AlternateContent xmlns:mc="http://schemas.openxmlformats.org/markup-compatibility/2006">
-        <mc:Choice xmlns:a14="http://schemas.microsoft.com/office/drawing/2010/main" Requires="a14">
+      <mc:AlternateContent xmlns:mc="http://schemas.openxmlformats.org/markup-compatibility/2006" xmlns:a14="http://schemas.microsoft.com/office/drawing/2010/main">
+        <mc:Choice Requires="a14">
           <p:sp>
             <p:nvSpPr>
               <p:cNvPr id="16" name="テキスト ボックス 15">
@@ -10913,7 +10935,7 @@
             </p:txBody>
           </p:sp>
         </mc:Choice>
-        <mc:Fallback>
+        <mc:Fallback xmlns="">
           <p:sp>
             <p:nvSpPr>
               <p:cNvPr id="16" name="テキスト ボックス 15">
@@ -11002,8 +11024,8 @@
           </a:fontRef>
         </p:style>
       </p:cxnSp>
-      <mc:AlternateContent xmlns:mc="http://schemas.openxmlformats.org/markup-compatibility/2006">
-        <mc:Choice xmlns:a14="http://schemas.microsoft.com/office/drawing/2010/main" Requires="a14">
+      <mc:AlternateContent xmlns:mc="http://schemas.openxmlformats.org/markup-compatibility/2006" xmlns:a14="http://schemas.microsoft.com/office/drawing/2010/main">
+        <mc:Choice Requires="a14">
           <p:sp>
             <p:nvSpPr>
               <p:cNvPr id="12" name="テキスト ボックス 11">
@@ -11093,7 +11115,7 @@
             </p:txBody>
           </p:sp>
         </mc:Choice>
-        <mc:Fallback>
+        <mc:Fallback xmlns="">
           <p:sp>
             <p:nvSpPr>
               <p:cNvPr id="12" name="テキスト ボックス 11">
@@ -11180,8 +11202,8 @@
           </a:fontRef>
         </p:style>
       </p:cxnSp>
-      <mc:AlternateContent xmlns:mc="http://schemas.openxmlformats.org/markup-compatibility/2006">
-        <mc:Choice xmlns:a14="http://schemas.microsoft.com/office/drawing/2010/main" Requires="a14">
+      <mc:AlternateContent xmlns:mc="http://schemas.openxmlformats.org/markup-compatibility/2006" xmlns:a14="http://schemas.microsoft.com/office/drawing/2010/main">
+        <mc:Choice Requires="a14">
           <p:sp>
             <p:nvSpPr>
               <p:cNvPr id="13" name="テキスト ボックス 12">
@@ -11283,7 +11305,7 @@
             </p:txBody>
           </p:sp>
         </mc:Choice>
-        <mc:Fallback>
+        <mc:Fallback xmlns="">
           <p:sp>
             <p:nvSpPr>
               <p:cNvPr id="13" name="テキスト ボックス 12">
@@ -11372,8 +11394,8 @@
           </a:fontRef>
         </p:style>
       </p:cxnSp>
-      <mc:AlternateContent xmlns:mc="http://schemas.openxmlformats.org/markup-compatibility/2006">
-        <mc:Choice xmlns:a14="http://schemas.microsoft.com/office/drawing/2010/main" Requires="a14">
+      <mc:AlternateContent xmlns:mc="http://schemas.openxmlformats.org/markup-compatibility/2006" xmlns:a14="http://schemas.microsoft.com/office/drawing/2010/main">
+        <mc:Choice Requires="a14">
           <p:sp>
             <p:nvSpPr>
               <p:cNvPr id="14" name="テキスト ボックス 13">
@@ -11454,7 +11476,7 @@
             </p:txBody>
           </p:sp>
         </mc:Choice>
-        <mc:Fallback>
+        <mc:Fallback xmlns="">
           <p:sp>
             <p:nvSpPr>
               <p:cNvPr id="14" name="テキスト ボックス 13">
